--- a/poster/poster_A0.pptx
+++ b/poster/poster_A0.pptx
@@ -4815,7 +4815,7 @@
                 <a:latin typeface="Meiryo"/>
                 <a:ea typeface="Meiryo"/>
               </a:rPr>
-              <a:t>③ 生体適合性・注入実証</a:t>
+              <a:t>③ 生体適合性(安全性)</a:t>
             </a:r>
           </a:p>
         </p:txBody>
@@ -4829,7 +4829,7 @@
         <p:spPr>
           <a:xfrm>
             <a:off x="288000" y="9828000"/>
-            <a:ext cx="9780000" cy="13950000"/>
+            <a:ext cx="9780000" cy="13446000"/>
           </a:xfrm>
           <a:prstGeom prst="roundRect">
             <a:avLst>
@@ -5087,7 +5087,7 @@
         <p:spPr>
           <a:xfrm>
             <a:off x="396000" y="11808000"/>
-            <a:ext cx="9564000" cy="11862000"/>
+            <a:ext cx="9564000" cy="11358000"/>
           </a:xfrm>
           <a:prstGeom prst="rect">
             <a:avLst/>
@@ -5133,7 +5133,7 @@
         <p:spPr>
           <a:xfrm>
             <a:off x="396000" y="11808000"/>
-            <a:ext cx="9564000" cy="11862000"/>
+            <a:ext cx="9564000" cy="11358000"/>
           </a:xfrm>
           <a:prstGeom prst="rect">
             <a:avLst/>
@@ -5195,8 +5195,8 @@
         </p:nvSpPr>
         <p:spPr>
           <a:xfrm>
-            <a:off x="288000" y="23958000"/>
-            <a:ext cx="9780000" cy="13950000"/>
+            <a:off x="288000" y="23454000"/>
+            <a:ext cx="9780000" cy="13446000"/>
           </a:xfrm>
           <a:prstGeom prst="roundRect">
             <a:avLst>
@@ -5243,7 +5243,7 @@
         </p:nvSpPr>
         <p:spPr>
           <a:xfrm>
-            <a:off x="288000" y="23958000"/>
+            <a:off x="288000" y="23454000"/>
             <a:ext cx="9780000" cy="324000"/>
           </a:xfrm>
           <a:prstGeom prst="rect">
@@ -5287,7 +5287,7 @@
         </p:nvSpPr>
         <p:spPr>
           <a:xfrm>
-            <a:off x="324000" y="23958000"/>
+            <a:off x="324000" y="23454000"/>
             <a:ext cx="9708000" cy="324000"/>
           </a:xfrm>
           <a:prstGeom prst="rect">
@@ -5330,7 +5330,7 @@
         </p:nvSpPr>
         <p:spPr>
           <a:xfrm>
-            <a:off x="342000" y="24318000"/>
+            <a:off x="342000" y="23814000"/>
             <a:ext cx="9672000" cy="1584000"/>
           </a:xfrm>
           <a:prstGeom prst="rect">
@@ -5453,8 +5453,8 @@
         </p:nvSpPr>
         <p:spPr>
           <a:xfrm>
-            <a:off x="396000" y="25938000"/>
-            <a:ext cx="9564000" cy="11862000"/>
+            <a:off x="396000" y="25434000"/>
+            <a:ext cx="9564000" cy="11358000"/>
           </a:xfrm>
           <a:prstGeom prst="rect">
             <a:avLst/>
@@ -5499,8 +5499,8 @@
         </p:nvSpPr>
         <p:spPr>
           <a:xfrm>
-            <a:off x="396000" y="25938000"/>
-            <a:ext cx="9564000" cy="11862000"/>
+            <a:off x="396000" y="25434000"/>
+            <a:ext cx="9564000" cy="11358000"/>
           </a:xfrm>
           <a:prstGeom prst="rect">
             <a:avLst/>
@@ -5563,7 +5563,7 @@
         <p:spPr>
           <a:xfrm>
             <a:off x="10248000" y="9828000"/>
-            <a:ext cx="9780000" cy="13950000"/>
+            <a:ext cx="9780000" cy="13446000"/>
           </a:xfrm>
           <a:prstGeom prst="roundRect">
             <a:avLst>
@@ -5801,7 +5801,7 @@
         <p:spPr>
           <a:xfrm>
             <a:off x="10356000" y="11520000"/>
-            <a:ext cx="9564000" cy="12150000"/>
+            <a:ext cx="9564000" cy="11646000"/>
           </a:xfrm>
           <a:prstGeom prst="rect">
             <a:avLst/>
@@ -5847,7 +5847,7 @@
         <p:spPr>
           <a:xfrm>
             <a:off x="10356000" y="11520000"/>
-            <a:ext cx="9564000" cy="12150000"/>
+            <a:ext cx="9564000" cy="11646000"/>
           </a:xfrm>
           <a:prstGeom prst="rect">
             <a:avLst/>
@@ -5909,8 +5909,8 @@
         </p:nvSpPr>
         <p:spPr>
           <a:xfrm>
-            <a:off x="10248000" y="23958000"/>
-            <a:ext cx="9780000" cy="13950000"/>
+            <a:off x="10248000" y="23454000"/>
+            <a:ext cx="9780000" cy="13446000"/>
           </a:xfrm>
           <a:prstGeom prst="roundRect">
             <a:avLst>
@@ -5957,7 +5957,7 @@
         </p:nvSpPr>
         <p:spPr>
           <a:xfrm>
-            <a:off x="10248000" y="23958000"/>
+            <a:off x="10248000" y="23454000"/>
             <a:ext cx="9780000" cy="324000"/>
           </a:xfrm>
           <a:prstGeom prst="rect">
@@ -6001,7 +6001,7 @@
         </p:nvSpPr>
         <p:spPr>
           <a:xfrm>
-            <a:off x="10284000" y="23958000"/>
+            <a:off x="10284000" y="23454000"/>
             <a:ext cx="9708000" cy="324000"/>
           </a:xfrm>
           <a:prstGeom prst="rect">
@@ -6044,7 +6044,7 @@
         </p:nvSpPr>
         <p:spPr>
           <a:xfrm>
-            <a:off x="10302000" y="24318000"/>
+            <a:off x="10302000" y="23814000"/>
             <a:ext cx="9672000" cy="1296000"/>
           </a:xfrm>
           <a:prstGeom prst="rect">
@@ -6147,8 +6147,8 @@
         </p:nvSpPr>
         <p:spPr>
           <a:xfrm>
-            <a:off x="10356000" y="25650000"/>
-            <a:ext cx="9564000" cy="12150000"/>
+            <a:off x="10356000" y="25146000"/>
+            <a:ext cx="9564000" cy="11646000"/>
           </a:xfrm>
           <a:prstGeom prst="rect">
             <a:avLst/>
@@ -6193,8 +6193,8 @@
         </p:nvSpPr>
         <p:spPr>
           <a:xfrm>
-            <a:off x="10356000" y="25650000"/>
-            <a:ext cx="9564000" cy="12150000"/>
+            <a:off x="10356000" y="25146000"/>
+            <a:ext cx="9564000" cy="11646000"/>
           </a:xfrm>
           <a:prstGeom prst="rect">
             <a:avLst/>
@@ -6257,7 +6257,7 @@
         <p:spPr>
           <a:xfrm>
             <a:off x="20208000" y="9828000"/>
-            <a:ext cx="9780000" cy="9240000"/>
+            <a:ext cx="9780000" cy="13446000"/>
           </a:xfrm>
           <a:prstGeom prst="roundRect">
             <a:avLst>
@@ -6392,7 +6392,7 @@
         <p:spPr>
           <a:xfrm>
             <a:off x="20262000" y="10188000"/>
-            <a:ext cx="9672000" cy="864000"/>
+            <a:ext cx="9672000" cy="1296000"/>
           </a:xfrm>
           <a:prstGeom prst="rect">
             <a:avLst/>
@@ -6441,7 +6441,27 @@
                 <a:latin typeface="Meiryo"/>
                 <a:ea typeface="Meiryo"/>
               </a:rPr>
-              <a:t>・PG3-1:3日 / PG4-0125:4日 / PG4-025:25日</a:t>
+              <a:t>・PG3-1:3日 / PG4-0125:4日</a:t>
+            </a:r>
+          </a:p>
+          <a:p>
+            <a:pPr algn="l">
+              <a:spcBef>
+                <a:spcPts val="0"/>
+              </a:spcBef>
+              <a:spcAft>
+                <a:spcPts val="200"/>
+              </a:spcAft>
+            </a:pPr>
+            <a:r>
+              <a:rPr sz="1200" b="0">
+                <a:solidFill>
+                  <a:srgbClr val="222222"/>
+                </a:solidFill>
+                <a:latin typeface="Meiryo"/>
+                <a:ea typeface="Meiryo"/>
+              </a:rPr>
+              <a:t>・PG4-025:25日で完全溶解</a:t>
             </a:r>
           </a:p>
           <a:p>
@@ -6474,8 +6494,8 @@
         </p:nvSpPr>
         <p:spPr>
           <a:xfrm>
-            <a:off x="20316000" y="11088000"/>
-            <a:ext cx="9564000" cy="7872000"/>
+            <a:off x="20316000" y="11520000"/>
+            <a:ext cx="9564000" cy="11646000"/>
           </a:xfrm>
           <a:prstGeom prst="rect">
             <a:avLst/>
@@ -6520,8 +6540,8 @@
         </p:nvSpPr>
         <p:spPr>
           <a:xfrm>
-            <a:off x="20316000" y="11088000"/>
-            <a:ext cx="9564000" cy="7872000"/>
+            <a:off x="20316000" y="11520000"/>
+            <a:ext cx="9564000" cy="11646000"/>
           </a:xfrm>
           <a:prstGeom prst="rect">
             <a:avLst/>
@@ -6583,8 +6603,8 @@
         </p:nvSpPr>
         <p:spPr>
           <a:xfrm>
-            <a:off x="20208000" y="19248000"/>
-            <a:ext cx="9780000" cy="9240000"/>
+            <a:off x="20208000" y="23454000"/>
+            <a:ext cx="9780000" cy="13446000"/>
           </a:xfrm>
           <a:prstGeom prst="roundRect">
             <a:avLst>
@@ -6631,7 +6651,7 @@
         </p:nvSpPr>
         <p:spPr>
           <a:xfrm>
-            <a:off x="20208000" y="19248000"/>
+            <a:off x="20208000" y="23454000"/>
             <a:ext cx="9780000" cy="324000"/>
           </a:xfrm>
           <a:prstGeom prst="rect">
@@ -6675,7 +6695,7 @@
         </p:nvSpPr>
         <p:spPr>
           <a:xfrm>
-            <a:off x="20244000" y="19248000"/>
+            <a:off x="20244000" y="23454000"/>
             <a:ext cx="9708000" cy="324000"/>
           </a:xfrm>
           <a:prstGeom prst="rect">
@@ -6718,8 +6738,8 @@
         </p:nvSpPr>
         <p:spPr>
           <a:xfrm>
-            <a:off x="20262000" y="19608000"/>
-            <a:ext cx="9672000" cy="864000"/>
+            <a:off x="20262000" y="23814000"/>
+            <a:ext cx="9672000" cy="1296000"/>
           </a:xfrm>
           <a:prstGeom prst="rect">
             <a:avLst/>
@@ -6788,6 +6808,26 @@
                 <a:latin typeface="Meiryo"/>
                 <a:ea typeface="Meiryo"/>
               </a:rPr>
+              <a:t>・溶解後も毒性なし</a:t>
+            </a:r>
+          </a:p>
+          <a:p>
+            <a:pPr algn="l">
+              <a:spcBef>
+                <a:spcPts val="0"/>
+              </a:spcBef>
+              <a:spcAft>
+                <a:spcPts val="200"/>
+              </a:spcAft>
+            </a:pPr>
+            <a:r>
+              <a:rPr sz="1200" b="0">
+                <a:solidFill>
+                  <a:srgbClr val="222222"/>
+                </a:solidFill>
+                <a:latin typeface="Meiryo"/>
+                <a:ea typeface="Meiryo"/>
+              </a:rPr>
               <a:t>→ 化学架橋剤なしで高生存率</a:t>
             </a:r>
           </a:p>
@@ -6801,8 +6841,8 @@
         </p:nvSpPr>
         <p:spPr>
           <a:xfrm>
-            <a:off x="20316000" y="20508000"/>
-            <a:ext cx="9564000" cy="7872000"/>
+            <a:off x="20316000" y="25146000"/>
+            <a:ext cx="9564000" cy="11646000"/>
           </a:xfrm>
           <a:prstGeom prst="rect">
             <a:avLst/>
@@ -6847,8 +6887,8 @@
         </p:nvSpPr>
         <p:spPr>
           <a:xfrm>
-            <a:off x="20316000" y="20508000"/>
-            <a:ext cx="9564000" cy="7872000"/>
+            <a:off x="20316000" y="25146000"/>
+            <a:ext cx="9564000" cy="11646000"/>
           </a:xfrm>
           <a:prstGeom prst="rect">
             <a:avLst/>
@@ -6910,8 +6950,143 @@
         </p:nvSpPr>
         <p:spPr>
           <a:xfrm>
-            <a:off x="20208000" y="28668000"/>
-            <a:ext cx="9780000" cy="9240000"/>
+            <a:off x="288000" y="37080000"/>
+            <a:ext cx="29700000" cy="3888000"/>
+          </a:xfrm>
+          <a:prstGeom prst="roundRect">
+            <a:avLst>
+              <a:gd name="adj" fmla="val 4000"/>
+            </a:avLst>
+          </a:prstGeom>
+          <a:solidFill>
+            <a:srgbClr val="FBF3EE"/>
+          </a:solidFill>
+          <a:ln w="25400">
+            <a:solidFill>
+              <a:srgbClr val="EA580C"/>
+            </a:solidFill>
+          </a:ln>
+          <a:effectLst/>
+        </p:spPr>
+        <p:style>
+          <a:lnRef idx="1">
+            <a:schemeClr val="accent1"/>
+          </a:lnRef>
+          <a:fillRef idx="3">
+            <a:schemeClr val="accent1"/>
+          </a:fillRef>
+          <a:effectRef idx="2">
+            <a:schemeClr val="accent1"/>
+          </a:effectRef>
+          <a:fontRef idx="minor">
+            <a:schemeClr val="lt1"/>
+          </a:fontRef>
+        </p:style>
+        <p:txBody>
+          <a:bodyPr rtlCol="0" anchor="ctr"/>
+          <a:lstStyle/>
+          <a:p>
+            <a:pPr algn="ctr"/>
+          </a:p>
+        </p:txBody>
+      </p:sp>
+      <p:sp>
+        <p:nvSpPr>
+          <p:cNvPr id="71" name="Rectangle 70"/>
+          <p:cNvSpPr/>
+          <p:nvPr/>
+        </p:nvSpPr>
+        <p:spPr>
+          <a:xfrm>
+            <a:off x="288000" y="37080000"/>
+            <a:ext cx="29700000" cy="396000"/>
+          </a:xfrm>
+          <a:prstGeom prst="rect">
+            <a:avLst/>
+          </a:prstGeom>
+          <a:solidFill>
+            <a:srgbClr val="33506B"/>
+          </a:solidFill>
+          <a:ln>
+            <a:noFill/>
+          </a:ln>
+          <a:effectLst/>
+        </p:spPr>
+        <p:style>
+          <a:lnRef idx="1">
+            <a:schemeClr val="accent1"/>
+          </a:lnRef>
+          <a:fillRef idx="3">
+            <a:schemeClr val="accent1"/>
+          </a:fillRef>
+          <a:effectRef idx="2">
+            <a:schemeClr val="accent1"/>
+          </a:effectRef>
+          <a:fontRef idx="minor">
+            <a:schemeClr val="lt1"/>
+          </a:fontRef>
+        </p:style>
+        <p:txBody>
+          <a:bodyPr rtlCol="0" anchor="ctr"/>
+          <a:lstStyle/>
+          <a:p>
+            <a:pPr algn="ctr"/>
+          </a:p>
+        </p:txBody>
+      </p:sp>
+      <p:sp>
+        <p:nvSpPr>
+          <p:cNvPr id="72" name="TextBox 71"/>
+          <p:cNvSpPr txBox="1"/>
+          <p:nvPr/>
+        </p:nvSpPr>
+        <p:spPr>
+          <a:xfrm>
+            <a:off x="432000" y="37080000"/>
+            <a:ext cx="29412000" cy="396000"/>
+          </a:xfrm>
+          <a:prstGeom prst="rect">
+            <a:avLst/>
+          </a:prstGeom>
+          <a:noFill/>
+        </p:spPr>
+        <p:txBody>
+          <a:bodyPr wrap="square" anchor="ctr" lIns="72000" rIns="72000" tIns="36000" bIns="36000">
+            <a:spAutoFit/>
+          </a:bodyPr>
+          <a:lstStyle/>
+          <a:p>
+            <a:pPr algn="l">
+              <a:spcBef>
+                <a:spcPts val="0"/>
+              </a:spcBef>
+              <a:spcAft>
+                <a:spcPts val="200"/>
+              </a:spcAft>
+            </a:pPr>
+            <a:r>
+              <a:rPr sz="1700" b="1">
+                <a:solidFill>
+                  <a:srgbClr val="FFFFFF"/>
+                </a:solidFill>
+                <a:latin typeface="Meiryo"/>
+                <a:ea typeface="Meiryo"/>
+              </a:rPr>
+              <a:t>C. 実用性評価 ｜ 注入試験（In vitro → In vivo）〔新データ・目玉〕</a:t>
+            </a:r>
+          </a:p>
+        </p:txBody>
+      </p:sp>
+      <p:sp>
+        <p:nvSpPr>
+          <p:cNvPr id="73" name="Rounded Rectangle 72"/>
+          <p:cNvSpPr/>
+          <p:nvPr/>
+        </p:nvSpPr>
+        <p:spPr>
+          <a:xfrm>
+            <a:off x="360000" y="37548000"/>
+            <a:ext cx="14688000" cy="3312000"/>
           </a:xfrm>
           <a:prstGeom prst="roundRect">
             <a:avLst>
@@ -6952,14 +7127,14 @@
       </p:sp>
       <p:sp>
         <p:nvSpPr>
-          <p:cNvPr id="71" name="Rectangle 70"/>
+          <p:cNvPr id="74" name="Rectangle 73"/>
           <p:cNvSpPr/>
           <p:nvPr/>
         </p:nvSpPr>
         <p:spPr>
           <a:xfrm>
-            <a:off x="20208000" y="28668000"/>
-            <a:ext cx="9780000" cy="324000"/>
+            <a:off x="360000" y="37548000"/>
+            <a:ext cx="14688000" cy="324000"/>
           </a:xfrm>
           <a:prstGeom prst="rect">
             <a:avLst/>
@@ -6996,14 +7171,14 @@
       </p:sp>
       <p:sp>
         <p:nvSpPr>
-          <p:cNvPr id="72" name="TextBox 71"/>
+          <p:cNvPr id="75" name="TextBox 74"/>
           <p:cNvSpPr txBox="1"/>
           <p:nvPr/>
         </p:nvSpPr>
         <p:spPr>
           <a:xfrm>
-            <a:off x="20244000" y="28668000"/>
-            <a:ext cx="9708000" cy="324000"/>
+            <a:off x="396000" y="37548000"/>
+            <a:ext cx="14616000" cy="324000"/>
           </a:xfrm>
           <a:prstGeom prst="rect">
             <a:avLst/>
@@ -7032,21 +7207,21 @@
                 <a:latin typeface="Meiryo"/>
                 <a:ea typeface="Meiryo"/>
               </a:rPr>
-              <a:t>G. in vitro 注入試験〔新〕</a:t>
-            </a:r>
-          </a:p>
-        </p:txBody>
-      </p:sp>
-      <p:sp>
-        <p:nvSpPr>
-          <p:cNvPr id="73" name="TextBox 72"/>
+              <a:t>C-1. in vitro 注入試験</a:t>
+            </a:r>
+          </a:p>
+        </p:txBody>
+      </p:sp>
+      <p:sp>
+        <p:nvSpPr>
+          <p:cNvPr id="76" name="TextBox 75"/>
           <p:cNvSpPr txBox="1"/>
           <p:nvPr/>
         </p:nvSpPr>
         <p:spPr>
           <a:xfrm>
-            <a:off x="20262000" y="29028000"/>
-            <a:ext cx="9672000" cy="864000"/>
+            <a:off x="414000" y="37908000"/>
+            <a:ext cx="14580000" cy="1368000"/>
           </a:xfrm>
           <a:prstGeom prst="rect">
             <a:avLst/>
@@ -7075,7 +7250,7 @@
                 <a:latin typeface="Meiryo"/>
                 <a:ea typeface="Meiryo"/>
               </a:rPr>
-              <a:t>・赤色化PG4-0125をシリンジ吐出</a:t>
+              <a:t>・赤色化PG4-0125をシリンジから吐出</a:t>
             </a:r>
           </a:p>
           <a:p>
@@ -7095,7 +7270,7 @@
                 <a:latin typeface="Meiryo"/>
                 <a:ea typeface="Meiryo"/>
               </a:rPr>
-              <a:t>・針内でゾル化→吐出後に即ゲル化</a:t>
+              <a:t>・針内で高せん断 → ゾル化(シアシニング)</a:t>
             </a:r>
           </a:p>
           <a:p>
@@ -7115,21 +7290,41 @@
                 <a:latin typeface="Meiryo"/>
                 <a:ea typeface="Meiryo"/>
               </a:rPr>
-              <a:t>→ 液だれせず形状を保持</a:t>
-            </a:r>
-          </a:p>
-        </p:txBody>
-      </p:sp>
-      <p:sp>
-        <p:nvSpPr>
-          <p:cNvPr id="74" name="Rectangle 73"/>
+              <a:t>・吐出直後に即ゲル化、液だれせず形状保持</a:t>
+            </a:r>
+          </a:p>
+          <a:p>
+            <a:pPr algn="l">
+              <a:spcBef>
+                <a:spcPts val="0"/>
+              </a:spcBef>
+              <a:spcAft>
+                <a:spcPts val="200"/>
+              </a:spcAft>
+            </a:pPr>
+            <a:r>
+              <a:rPr sz="1200" b="0">
+                <a:solidFill>
+                  <a:srgbClr val="222222"/>
+                </a:solidFill>
+                <a:latin typeface="Meiryo"/>
+                <a:ea typeface="Meiryo"/>
+              </a:rPr>
+              <a:t>→ レオロジー挙動を実機操作で可視化</a:t>
+            </a:r>
+          </a:p>
+        </p:txBody>
+      </p:sp>
+      <p:sp>
+        <p:nvSpPr>
+          <p:cNvPr id="77" name="Rectangle 76"/>
           <p:cNvSpPr/>
           <p:nvPr/>
         </p:nvSpPr>
         <p:spPr>
           <a:xfrm>
-            <a:off x="20316000" y="29927999"/>
-            <a:ext cx="9564000" cy="7872000"/>
+            <a:off x="468000" y="39312000"/>
+            <a:ext cx="14472000" cy="1440000"/>
           </a:xfrm>
           <a:prstGeom prst="rect">
             <a:avLst/>
@@ -7168,14 +7363,14 @@
       </p:sp>
       <p:sp>
         <p:nvSpPr>
-          <p:cNvPr id="75" name="TextBox 74"/>
+          <p:cNvPr id="78" name="TextBox 77"/>
           <p:cNvSpPr txBox="1"/>
           <p:nvPr/>
         </p:nvSpPr>
         <p:spPr>
           <a:xfrm>
-            <a:off x="20316000" y="29927999"/>
-            <a:ext cx="9564000" cy="7872000"/>
+            <a:off x="468000" y="39312000"/>
+            <a:ext cx="14472000" cy="1440000"/>
           </a:xfrm>
           <a:prstGeom prst="rect">
             <a:avLst/>
@@ -7224,21 +7419,21 @@
                 <a:latin typeface="Meiryo"/>
                 <a:ea typeface="Meiryo"/>
               </a:rPr>
-              <a:t>図: 注入の連続写真</a:t>
-            </a:r>
-          </a:p>
-        </p:txBody>
-      </p:sp>
-      <p:sp>
-        <p:nvSpPr>
-          <p:cNvPr id="76" name="Rounded Rectangle 75"/>
+              <a:t>図: in vitro 注入の連続写真</a:t>
+            </a:r>
+          </a:p>
+        </p:txBody>
+      </p:sp>
+      <p:sp>
+        <p:nvSpPr>
+          <p:cNvPr id="79" name="Rounded Rectangle 78"/>
           <p:cNvSpPr/>
           <p:nvPr/>
         </p:nvSpPr>
         <p:spPr>
           <a:xfrm>
-            <a:off x="288000" y="38088000"/>
-            <a:ext cx="29700000" cy="2808000"/>
+            <a:off x="15228000" y="37548000"/>
+            <a:ext cx="14688000" cy="3312000"/>
           </a:xfrm>
           <a:prstGeom prst="roundRect">
             <a:avLst>
@@ -7248,9 +7443,9 @@
           <a:solidFill>
             <a:srgbClr val="FFE3D3"/>
           </a:solidFill>
-          <a:ln w="25400">
+          <a:ln w="12700">
             <a:solidFill>
-              <a:srgbClr val="EA580C"/>
+              <a:srgbClr val="90A4B5"/>
             </a:solidFill>
           </a:ln>
           <a:effectLst/>
@@ -7279,14 +7474,14 @@
       </p:sp>
       <p:sp>
         <p:nvSpPr>
-          <p:cNvPr id="77" name="Rectangle 76"/>
+          <p:cNvPr id="80" name="Rectangle 79"/>
           <p:cNvSpPr/>
           <p:nvPr/>
         </p:nvSpPr>
         <p:spPr>
           <a:xfrm>
-            <a:off x="288000" y="38088000"/>
-            <a:ext cx="29700000" cy="396000"/>
+            <a:off x="15228000" y="37548000"/>
+            <a:ext cx="14688000" cy="324000"/>
           </a:xfrm>
           <a:prstGeom prst="rect">
             <a:avLst/>
@@ -7323,14 +7518,14 @@
       </p:sp>
       <p:sp>
         <p:nvSpPr>
-          <p:cNvPr id="78" name="TextBox 77"/>
+          <p:cNvPr id="81" name="TextBox 80"/>
           <p:cNvSpPr txBox="1"/>
           <p:nvPr/>
         </p:nvSpPr>
         <p:spPr>
           <a:xfrm>
-            <a:off x="432000" y="38088000"/>
-            <a:ext cx="29412000" cy="396000"/>
+            <a:off x="15264000" y="37548000"/>
+            <a:ext cx="14616000" cy="324000"/>
           </a:xfrm>
           <a:prstGeom prst="rect">
             <a:avLst/>
@@ -7352,28 +7547,28 @@
               </a:spcAft>
             </a:pPr>
             <a:r>
-              <a:rPr sz="1700" b="1">
+              <a:rPr sz="1400" b="1">
                 <a:solidFill>
                   <a:srgbClr val="FFFFFF"/>
                 </a:solidFill>
                 <a:latin typeface="Meiryo"/>
                 <a:ea typeface="Meiryo"/>
               </a:rPr>
-              <a:t>C. In vivo 評価 ｜ マウス皮下注入試験（最重要・目玉）〔新データ〕</a:t>
-            </a:r>
-          </a:p>
-        </p:txBody>
-      </p:sp>
-      <p:sp>
-        <p:nvSpPr>
-          <p:cNvPr id="79" name="TextBox 78"/>
+              <a:t>C-2. in vivo マウス皮下注入試験（最重要）</a:t>
+            </a:r>
+          </a:p>
+        </p:txBody>
+      </p:sp>
+      <p:sp>
+        <p:nvSpPr>
+          <p:cNvPr id="82" name="TextBox 81"/>
           <p:cNvSpPr txBox="1"/>
           <p:nvPr/>
         </p:nvSpPr>
         <p:spPr>
           <a:xfrm>
-            <a:off x="432000" y="38556000"/>
-            <a:ext cx="17820000" cy="2268000"/>
+            <a:off x="15282000" y="37908000"/>
+            <a:ext cx="14580000" cy="1368000"/>
           </a:xfrm>
           <a:prstGeom prst="rect">
             <a:avLst/>
@@ -7391,11 +7586,11 @@
                 <a:spcPts val="0"/>
               </a:spcBef>
               <a:spcAft>
-                <a:spcPts val="300"/>
-              </a:spcAft>
-            </a:pPr>
-            <a:r>
-              <a:rPr sz="1300" b="0">
+                <a:spcPts val="200"/>
+              </a:spcAft>
+            </a:pPr>
+            <a:r>
+              <a:rPr sz="1200" b="0">
                 <a:solidFill>
                   <a:srgbClr val="222222"/>
                 </a:solidFill>
@@ -7411,11 +7606,11 @@
                 <a:spcPts val="0"/>
               </a:spcBef>
               <a:spcAft>
-                <a:spcPts val="300"/>
-              </a:spcAft>
-            </a:pPr>
-            <a:r>
-              <a:rPr sz="1300" b="0">
+                <a:spcPts val="200"/>
+              </a:spcAft>
+            </a:pPr>
+            <a:r>
+              <a:rPr sz="1200" b="0">
                 <a:solidFill>
                   <a:srgbClr val="222222"/>
                 </a:solidFill>
@@ -7431,18 +7626,18 @@
                 <a:spcPts val="0"/>
               </a:spcBef>
               <a:spcAft>
-                <a:spcPts val="300"/>
-              </a:spcAft>
-            </a:pPr>
-            <a:r>
-              <a:rPr sz="1300" b="0">
+                <a:spcPts val="200"/>
+              </a:spcAft>
+            </a:pPr>
+            <a:r>
+              <a:rPr sz="1200" b="0">
                 <a:solidFill>
                   <a:srgbClr val="222222"/>
                 </a:solidFill>
                 <a:latin typeface="Meiryo"/>
                 <a:ea typeface="Meiryo"/>
               </a:rPr>
-              <a:t>・抵抗なくスムーズに注入 → 生体内で即座に自己修復</a:t>
+              <a:t>・抵抗なく注入 → 生体内で即座に自己修復</a:t>
             </a:r>
           </a:p>
           <a:p>
@@ -7451,32 +7646,32 @@
                 <a:spcPts val="0"/>
               </a:spcBef>
               <a:spcAft>
-                <a:spcPts val="300"/>
-              </a:spcAft>
-            </a:pPr>
-            <a:r>
-              <a:rPr sz="1300" b="1">
+                <a:spcPts val="200"/>
+              </a:spcAft>
+            </a:pPr>
+            <a:r>
+              <a:rPr sz="1200" b="0">
                 <a:solidFill>
                   <a:srgbClr val="222222"/>
                 </a:solidFill>
                 <a:latin typeface="Meiryo"/>
                 <a:ea typeface="Meiryo"/>
               </a:rPr>
-              <a:t>→ 局所に明瞭なドーム状デポを形成。低侵襲な局所投与キャリアの実用性を実証</a:t>
-            </a:r>
-          </a:p>
-        </p:txBody>
-      </p:sp>
-      <p:sp>
-        <p:nvSpPr>
-          <p:cNvPr id="80" name="Rectangle 79"/>
+              <a:t>→ 局所に明瞭なドーム状デポを形成し実用性を実証</a:t>
+            </a:r>
+          </a:p>
+        </p:txBody>
+      </p:sp>
+      <p:sp>
+        <p:nvSpPr>
+          <p:cNvPr id="83" name="Rectangle 82"/>
           <p:cNvSpPr/>
           <p:nvPr/>
         </p:nvSpPr>
         <p:spPr>
           <a:xfrm>
-            <a:off x="18999000" y="38592000"/>
-            <a:ext cx="10395000" cy="2160000"/>
+            <a:off x="15336000" y="39312000"/>
+            <a:ext cx="14472000" cy="1440000"/>
           </a:xfrm>
           <a:prstGeom prst="rect">
             <a:avLst/>
@@ -7515,14 +7710,14 @@
       </p:sp>
       <p:sp>
         <p:nvSpPr>
-          <p:cNvPr id="81" name="TextBox 80"/>
+          <p:cNvPr id="84" name="TextBox 83"/>
           <p:cNvSpPr txBox="1"/>
           <p:nvPr/>
         </p:nvSpPr>
         <p:spPr>
           <a:xfrm>
-            <a:off x="18999000" y="38592000"/>
-            <a:ext cx="10395000" cy="2160000"/>
+            <a:off x="15336000" y="39312000"/>
+            <a:ext cx="14472000" cy="1440000"/>
           </a:xfrm>
           <a:prstGeom prst="rect">
             <a:avLst/>
@@ -7578,14 +7773,14 @@
       </p:sp>
       <p:sp>
         <p:nvSpPr>
-          <p:cNvPr id="82" name="Rounded Rectangle 81"/>
+          <p:cNvPr id="85" name="Rounded Rectangle 84"/>
           <p:cNvSpPr/>
           <p:nvPr/>
         </p:nvSpPr>
         <p:spPr>
           <a:xfrm>
-            <a:off x="288000" y="41076000"/>
-            <a:ext cx="29700000" cy="1440000"/>
+            <a:off x="288000" y="41148000"/>
+            <a:ext cx="29700000" cy="1368000"/>
           </a:xfrm>
           <a:prstGeom prst="roundRect">
             <a:avLst>
@@ -7626,13 +7821,13 @@
       </p:sp>
       <p:sp>
         <p:nvSpPr>
-          <p:cNvPr id="83" name="TextBox 82"/>
+          <p:cNvPr id="86" name="TextBox 85"/>
           <p:cNvSpPr txBox="1"/>
           <p:nvPr/>
         </p:nvSpPr>
         <p:spPr>
           <a:xfrm>
-            <a:off x="396000" y="41148000"/>
+            <a:off x="396000" y="41220000"/>
             <a:ext cx="29484000" cy="648000"/>
           </a:xfrm>
           <a:prstGeom prst="rect">
@@ -7669,13 +7864,13 @@
       </p:sp>
       <p:sp>
         <p:nvSpPr>
-          <p:cNvPr id="84" name="TextBox 83"/>
+          <p:cNvPr id="87" name="TextBox 86"/>
           <p:cNvSpPr txBox="1"/>
           <p:nvPr/>
         </p:nvSpPr>
         <p:spPr>
           <a:xfrm>
-            <a:off x="396000" y="41796000"/>
+            <a:off x="396000" y="41868000"/>
             <a:ext cx="29484000" cy="648000"/>
           </a:xfrm>
           <a:prstGeom prst="rect">

--- a/poster/poster_A0.pptx
+++ b/poster/poster_A0.pptx
@@ -4561,275 +4561,14 @@
       </p:sp>
       <p:sp>
         <p:nvSpPr>
-          <p:cNvPr id="28" name="Rectangle 27"/>
+          <p:cNvPr id="28" name="Rounded Rectangle 27"/>
           <p:cNvSpPr/>
           <p:nvPr/>
         </p:nvSpPr>
         <p:spPr>
           <a:xfrm>
             <a:off x="288000" y="9288000"/>
-            <a:ext cx="9780000" cy="396000"/>
-          </a:xfrm>
-          <a:prstGeom prst="rect">
-            <a:avLst/>
-          </a:prstGeom>
-          <a:solidFill>
-            <a:srgbClr val="C9962A"/>
-          </a:solidFill>
-          <a:ln>
-            <a:noFill/>
-          </a:ln>
-          <a:effectLst/>
-        </p:spPr>
-        <p:style>
-          <a:lnRef idx="1">
-            <a:schemeClr val="accent1"/>
-          </a:lnRef>
-          <a:fillRef idx="3">
-            <a:schemeClr val="accent1"/>
-          </a:fillRef>
-          <a:effectRef idx="2">
-            <a:schemeClr val="accent1"/>
-          </a:effectRef>
-          <a:fontRef idx="minor">
-            <a:schemeClr val="lt1"/>
-          </a:fontRef>
-        </p:style>
-        <p:txBody>
-          <a:bodyPr rtlCol="0" anchor="ctr"/>
-          <a:lstStyle/>
-          <a:p>
-            <a:pPr algn="ctr"/>
-          </a:p>
-        </p:txBody>
-      </p:sp>
-      <p:sp>
-        <p:nvSpPr>
-          <p:cNvPr id="29" name="TextBox 28"/>
-          <p:cNvSpPr txBox="1"/>
-          <p:nvPr/>
-        </p:nvSpPr>
-        <p:spPr>
-          <a:xfrm>
-            <a:off x="288000" y="9288000"/>
-            <a:ext cx="9780000" cy="396000"/>
-          </a:xfrm>
-          <a:prstGeom prst="rect">
-            <a:avLst/>
-          </a:prstGeom>
-          <a:noFill/>
-        </p:spPr>
-        <p:txBody>
-          <a:bodyPr wrap="square" anchor="ctr" lIns="72000" rIns="72000" tIns="36000" bIns="36000">
-            <a:spAutoFit/>
-          </a:bodyPr>
-          <a:lstStyle/>
-          <a:p>
-            <a:pPr algn="ctr">
-              <a:spcBef>
-                <a:spcPts val="0"/>
-              </a:spcBef>
-              <a:spcAft>
-                <a:spcPts val="200"/>
-              </a:spcAft>
-            </a:pPr>
-            <a:r>
-              <a:rPr sz="1500" b="1">
-                <a:solidFill>
-                  <a:srgbClr val="FFFFFF"/>
-                </a:solidFill>
-                <a:latin typeface="Meiryo"/>
-                <a:ea typeface="Meiryo"/>
-              </a:rPr>
-              <a:t>① 合成・架橋メカニズム</a:t>
-            </a:r>
-          </a:p>
-        </p:txBody>
-      </p:sp>
-      <p:sp>
-        <p:nvSpPr>
-          <p:cNvPr id="30" name="Rectangle 29"/>
-          <p:cNvSpPr/>
-          <p:nvPr/>
-        </p:nvSpPr>
-        <p:spPr>
-          <a:xfrm>
-            <a:off x="10248000" y="9288000"/>
-            <a:ext cx="9780000" cy="396000"/>
-          </a:xfrm>
-          <a:prstGeom prst="rect">
-            <a:avLst/>
-          </a:prstGeom>
-          <a:solidFill>
-            <a:srgbClr val="2563EB"/>
-          </a:solidFill>
-          <a:ln>
-            <a:noFill/>
-          </a:ln>
-          <a:effectLst/>
-        </p:spPr>
-        <p:style>
-          <a:lnRef idx="1">
-            <a:schemeClr val="accent1"/>
-          </a:lnRef>
-          <a:fillRef idx="3">
-            <a:schemeClr val="accent1"/>
-          </a:fillRef>
-          <a:effectRef idx="2">
-            <a:schemeClr val="accent1"/>
-          </a:effectRef>
-          <a:fontRef idx="minor">
-            <a:schemeClr val="lt1"/>
-          </a:fontRef>
-        </p:style>
-        <p:txBody>
-          <a:bodyPr rtlCol="0" anchor="ctr"/>
-          <a:lstStyle/>
-          <a:p>
-            <a:pPr algn="ctr"/>
-          </a:p>
-        </p:txBody>
-      </p:sp>
-      <p:sp>
-        <p:nvSpPr>
-          <p:cNvPr id="31" name="TextBox 30"/>
-          <p:cNvSpPr txBox="1"/>
-          <p:nvPr/>
-        </p:nvSpPr>
-        <p:spPr>
-          <a:xfrm>
-            <a:off x="10248000" y="9288000"/>
-            <a:ext cx="9780000" cy="396000"/>
-          </a:xfrm>
-          <a:prstGeom prst="rect">
-            <a:avLst/>
-          </a:prstGeom>
-          <a:noFill/>
-        </p:spPr>
-        <p:txBody>
-          <a:bodyPr wrap="square" anchor="ctr" lIns="72000" rIns="72000" tIns="36000" bIns="36000">
-            <a:spAutoFit/>
-          </a:bodyPr>
-          <a:lstStyle/>
-          <a:p>
-            <a:pPr algn="ctr">
-              <a:spcBef>
-                <a:spcPts val="0"/>
-              </a:spcBef>
-              <a:spcAft>
-                <a:spcPts val="200"/>
-              </a:spcAft>
-            </a:pPr>
-            <a:r>
-              <a:rPr sz="1500" b="1">
-                <a:solidFill>
-                  <a:srgbClr val="FFFFFF"/>
-                </a:solidFill>
-                <a:latin typeface="Meiryo"/>
-                <a:ea typeface="Meiryo"/>
-              </a:rPr>
-              <a:t>② ゲル化・力学特性</a:t>
-            </a:r>
-          </a:p>
-        </p:txBody>
-      </p:sp>
-      <p:sp>
-        <p:nvSpPr>
-          <p:cNvPr id="32" name="Rectangle 31"/>
-          <p:cNvSpPr/>
-          <p:nvPr/>
-        </p:nvSpPr>
-        <p:spPr>
-          <a:xfrm>
-            <a:off x="20208000" y="9288000"/>
-            <a:ext cx="9780000" cy="396000"/>
-          </a:xfrm>
-          <a:prstGeom prst="rect">
-            <a:avLst/>
-          </a:prstGeom>
-          <a:solidFill>
-            <a:srgbClr val="2563EB"/>
-          </a:solidFill>
-          <a:ln>
-            <a:noFill/>
-          </a:ln>
-          <a:effectLst/>
-        </p:spPr>
-        <p:style>
-          <a:lnRef idx="1">
-            <a:schemeClr val="accent1"/>
-          </a:lnRef>
-          <a:fillRef idx="3">
-            <a:schemeClr val="accent1"/>
-          </a:fillRef>
-          <a:effectRef idx="2">
-            <a:schemeClr val="accent1"/>
-          </a:effectRef>
-          <a:fontRef idx="minor">
-            <a:schemeClr val="lt1"/>
-          </a:fontRef>
-        </p:style>
-        <p:txBody>
-          <a:bodyPr rtlCol="0" anchor="ctr"/>
-          <a:lstStyle/>
-          <a:p>
-            <a:pPr algn="ctr"/>
-          </a:p>
-        </p:txBody>
-      </p:sp>
-      <p:sp>
-        <p:nvSpPr>
-          <p:cNvPr id="33" name="TextBox 32"/>
-          <p:cNvSpPr txBox="1"/>
-          <p:nvPr/>
-        </p:nvSpPr>
-        <p:spPr>
-          <a:xfrm>
-            <a:off x="20208000" y="9288000"/>
-            <a:ext cx="9780000" cy="396000"/>
-          </a:xfrm>
-          <a:prstGeom prst="rect">
-            <a:avLst/>
-          </a:prstGeom>
-          <a:noFill/>
-        </p:spPr>
-        <p:txBody>
-          <a:bodyPr wrap="square" anchor="ctr" lIns="72000" rIns="72000" tIns="36000" bIns="36000">
-            <a:spAutoFit/>
-          </a:bodyPr>
-          <a:lstStyle/>
-          <a:p>
-            <a:pPr algn="ctr">
-              <a:spcBef>
-                <a:spcPts val="0"/>
-              </a:spcBef>
-              <a:spcAft>
-                <a:spcPts val="200"/>
-              </a:spcAft>
-            </a:pPr>
-            <a:r>
-              <a:rPr sz="1500" b="1">
-                <a:solidFill>
-                  <a:srgbClr val="FFFFFF"/>
-                </a:solidFill>
-                <a:latin typeface="Meiryo"/>
-                <a:ea typeface="Meiryo"/>
-              </a:rPr>
-              <a:t>③ 生体適合性(安全性)</a:t>
-            </a:r>
-          </a:p>
-        </p:txBody>
-      </p:sp>
-      <p:sp>
-        <p:nvSpPr>
-          <p:cNvPr id="34" name="Rounded Rectangle 33"/>
-          <p:cNvSpPr/>
-          <p:nvPr/>
-        </p:nvSpPr>
-        <p:spPr>
-          <a:xfrm>
-            <a:off x="288000" y="9828000"/>
-            <a:ext cx="9780000" cy="13446000"/>
+            <a:ext cx="9780000" cy="27612000"/>
           </a:xfrm>
           <a:prstGeom prst="roundRect">
             <a:avLst>
@@ -4870,13 +4609,13 @@
       </p:sp>
       <p:sp>
         <p:nvSpPr>
-          <p:cNvPr id="35" name="Rectangle 34"/>
+          <p:cNvPr id="29" name="Rectangle 28"/>
           <p:cNvSpPr/>
           <p:nvPr/>
         </p:nvSpPr>
         <p:spPr>
           <a:xfrm>
-            <a:off x="288000" y="9828000"/>
+            <a:off x="288000" y="9288000"/>
             <a:ext cx="9780000" cy="324000"/>
           </a:xfrm>
           <a:prstGeom prst="rect">
@@ -4914,13 +4653,13 @@
       </p:sp>
       <p:sp>
         <p:nvSpPr>
-          <p:cNvPr id="36" name="TextBox 35"/>
+          <p:cNvPr id="30" name="TextBox 29"/>
           <p:cNvSpPr txBox="1"/>
           <p:nvPr/>
         </p:nvSpPr>
         <p:spPr>
           <a:xfrm>
-            <a:off x="324000" y="9828000"/>
+            <a:off x="324000" y="9288000"/>
             <a:ext cx="9708000" cy="324000"/>
           </a:xfrm>
           <a:prstGeom prst="rect">
@@ -4950,21 +4689,21 @@
                 <a:latin typeface="Meiryo"/>
                 <a:ea typeface="Meiryo"/>
               </a:rPr>
-              <a:t>A. 高純度 PGD G4 の精密合成〔新〕</a:t>
-            </a:r>
-          </a:p>
-        </p:txBody>
-      </p:sp>
-      <p:sp>
-        <p:nvSpPr>
-          <p:cNvPr id="37" name="TextBox 36"/>
+              <a:t>① 合成・架橋｜PGD G4合成と架橋点の同定〔新〕</a:t>
+            </a:r>
+          </a:p>
+        </p:txBody>
+      </p:sp>
+      <p:sp>
+        <p:nvSpPr>
+          <p:cNvPr id="31" name="TextBox 30"/>
           <p:cNvSpPr txBox="1"/>
           <p:nvPr/>
         </p:nvSpPr>
         <p:spPr>
           <a:xfrm>
-            <a:off x="342000" y="10188000"/>
-            <a:ext cx="9672000" cy="1584000"/>
+            <a:off x="342000" y="9648000"/>
+            <a:ext cx="9672000" cy="1368000"/>
           </a:xfrm>
           <a:prstGeom prst="rect">
             <a:avLst/>
@@ -4993,7 +4732,7 @@
                 <a:latin typeface="Meiryo"/>
                 <a:ea typeface="Meiryo"/>
               </a:rPr>
-              <a:t>・Divergent法(全8段階)で合成</a:t>
+              <a:t>・Divergent法で単分散PGD G4を合成</a:t>
             </a:r>
           </a:p>
           <a:p>
@@ -5013,7 +4752,7 @@
                 <a:latin typeface="Meiryo"/>
                 <a:ea typeface="Meiryo"/>
               </a:rPr>
-              <a:t>・撹拌強化＋反応時間2倍で最適化</a:t>
+              <a:t>  (収率90%, MALDI単一ピーク [M+Na]⁺=3488)</a:t>
             </a:r>
           </a:p>
           <a:p>
@@ -5033,7 +4772,7 @@
                 <a:latin typeface="Meiryo"/>
                 <a:ea typeface="Meiryo"/>
               </a:rPr>
-              <a:t>・G3.5→G4 収率90%, 13.0 g 取得</a:t>
+              <a:t>・GCアミノ基をアセチル化 → DA↑でゲル化遅延</a:t>
             </a:r>
           </a:p>
           <a:p>
@@ -5053,7 +4792,7 @@
                 <a:latin typeface="Meiryo"/>
                 <a:ea typeface="Meiryo"/>
               </a:rPr>
-              <a:t>・MALDI 単一ピーク [M+Na]⁺=3488</a:t>
+              <a:t>  (DA 16.7%:1.5h → 90%:80h)</a:t>
             </a:r>
           </a:p>
           <a:p>
@@ -5073,21 +4812,21 @@
                 <a:latin typeface="Meiryo"/>
                 <a:ea typeface="Meiryo"/>
               </a:rPr>
-              <a:t>  → 単分散の高品質体を確認</a:t>
-            </a:r>
-          </a:p>
-        </p:txBody>
-      </p:sp>
-      <p:sp>
-        <p:nvSpPr>
-          <p:cNvPr id="38" name="Rectangle 37"/>
+              <a:t>→ アミノ基が主架橋点と化学的に証明</a:t>
+            </a:r>
+          </a:p>
+        </p:txBody>
+      </p:sp>
+      <p:sp>
+        <p:nvSpPr>
+          <p:cNvPr id="32" name="Rectangle 31"/>
           <p:cNvSpPr/>
           <p:nvPr/>
         </p:nvSpPr>
         <p:spPr>
           <a:xfrm>
-            <a:off x="396000" y="11808000"/>
-            <a:ext cx="9564000" cy="11358000"/>
+            <a:off x="396000" y="11052000"/>
+            <a:ext cx="9564000" cy="25740000"/>
           </a:xfrm>
           <a:prstGeom prst="rect">
             <a:avLst/>
@@ -5126,14 +4865,14 @@
       </p:sp>
       <p:sp>
         <p:nvSpPr>
-          <p:cNvPr id="39" name="TextBox 38"/>
+          <p:cNvPr id="33" name="TextBox 32"/>
           <p:cNvSpPr txBox="1"/>
           <p:nvPr/>
         </p:nvSpPr>
         <p:spPr>
           <a:xfrm>
-            <a:off x="396000" y="11808000"/>
-            <a:ext cx="9564000" cy="11358000"/>
+            <a:off x="396000" y="11052000"/>
+            <a:ext cx="9564000" cy="25740000"/>
           </a:xfrm>
           <a:prstGeom prst="rect">
             <a:avLst/>
@@ -5182,388 +4921,21 @@
                 <a:latin typeface="Meiryo"/>
                 <a:ea typeface="Meiryo"/>
               </a:rPr>
-              <a:t>図: MALDI(1回目 vs 2回目) / 収率表</a:t>
-            </a:r>
-          </a:p>
-        </p:txBody>
-      </p:sp>
-      <p:sp>
-        <p:nvSpPr>
-          <p:cNvPr id="40" name="Rounded Rectangle 39"/>
+              <a:t>図: MALDI(最適化前後) / DA vs ゲル化時間</a:t>
+            </a:r>
+          </a:p>
+        </p:txBody>
+      </p:sp>
+      <p:sp>
+        <p:nvSpPr>
+          <p:cNvPr id="34" name="Rounded Rectangle 33"/>
           <p:cNvSpPr/>
           <p:nvPr/>
         </p:nvSpPr>
         <p:spPr>
           <a:xfrm>
-            <a:off x="288000" y="23454000"/>
-            <a:ext cx="9780000" cy="13446000"/>
-          </a:xfrm>
-          <a:prstGeom prst="roundRect">
-            <a:avLst>
-              <a:gd name="adj" fmla="val 4000"/>
-            </a:avLst>
-          </a:prstGeom>
-          <a:solidFill>
-            <a:srgbClr val="FDF0D5"/>
-          </a:solidFill>
-          <a:ln w="12700">
-            <a:solidFill>
-              <a:srgbClr val="90A4B5"/>
-            </a:solidFill>
-          </a:ln>
-          <a:effectLst/>
-        </p:spPr>
-        <p:style>
-          <a:lnRef idx="1">
-            <a:schemeClr val="accent1"/>
-          </a:lnRef>
-          <a:fillRef idx="3">
-            <a:schemeClr val="accent1"/>
-          </a:fillRef>
-          <a:effectRef idx="2">
-            <a:schemeClr val="accent1"/>
-          </a:effectRef>
-          <a:fontRef idx="minor">
-            <a:schemeClr val="lt1"/>
-          </a:fontRef>
-        </p:style>
-        <p:txBody>
-          <a:bodyPr rtlCol="0" anchor="ctr"/>
-          <a:lstStyle/>
-          <a:p>
-            <a:pPr algn="ctr"/>
-          </a:p>
-        </p:txBody>
-      </p:sp>
-      <p:sp>
-        <p:nvSpPr>
-          <p:cNvPr id="41" name="Rectangle 40"/>
-          <p:cNvSpPr/>
-          <p:nvPr/>
-        </p:nvSpPr>
-        <p:spPr>
-          <a:xfrm>
-            <a:off x="288000" y="23454000"/>
-            <a:ext cx="9780000" cy="324000"/>
-          </a:xfrm>
-          <a:prstGeom prst="rect">
-            <a:avLst/>
-          </a:prstGeom>
-          <a:solidFill>
-            <a:srgbClr val="C9962A"/>
-          </a:solidFill>
-          <a:ln>
-            <a:noFill/>
-          </a:ln>
-          <a:effectLst/>
-        </p:spPr>
-        <p:style>
-          <a:lnRef idx="1">
-            <a:schemeClr val="accent1"/>
-          </a:lnRef>
-          <a:fillRef idx="3">
-            <a:schemeClr val="accent1"/>
-          </a:fillRef>
-          <a:effectRef idx="2">
-            <a:schemeClr val="accent1"/>
-          </a:effectRef>
-          <a:fontRef idx="minor">
-            <a:schemeClr val="lt1"/>
-          </a:fontRef>
-        </p:style>
-        <p:txBody>
-          <a:bodyPr rtlCol="0" anchor="ctr"/>
-          <a:lstStyle/>
-          <a:p>
-            <a:pPr algn="ctr"/>
-          </a:p>
-        </p:txBody>
-      </p:sp>
-      <p:sp>
-        <p:nvSpPr>
-          <p:cNvPr id="42" name="TextBox 41"/>
-          <p:cNvSpPr txBox="1"/>
-          <p:nvPr/>
-        </p:nvSpPr>
-        <p:spPr>
-          <a:xfrm>
-            <a:off x="324000" y="23454000"/>
-            <a:ext cx="9708000" cy="324000"/>
-          </a:xfrm>
-          <a:prstGeom prst="rect">
-            <a:avLst/>
-          </a:prstGeom>
-          <a:noFill/>
-        </p:spPr>
-        <p:txBody>
-          <a:bodyPr wrap="square" anchor="ctr" lIns="72000" rIns="72000" tIns="36000" bIns="36000">
-            <a:spAutoFit/>
-          </a:bodyPr>
-          <a:lstStyle/>
-          <a:p>
-            <a:pPr algn="l">
-              <a:spcBef>
-                <a:spcPts val="0"/>
-              </a:spcBef>
-              <a:spcAft>
-                <a:spcPts val="200"/>
-              </a:spcAft>
-            </a:pPr>
-            <a:r>
-              <a:rPr sz="1400" b="1">
-                <a:solidFill>
-                  <a:srgbClr val="FFFFFF"/>
-                </a:solidFill>
-                <a:latin typeface="Meiryo"/>
-                <a:ea typeface="Meiryo"/>
-              </a:rPr>
-              <a:t>B. 架橋点の同定: GCアセチル化〔新〕</a:t>
-            </a:r>
-          </a:p>
-        </p:txBody>
-      </p:sp>
-      <p:sp>
-        <p:nvSpPr>
-          <p:cNvPr id="43" name="TextBox 42"/>
-          <p:cNvSpPr txBox="1"/>
-          <p:nvPr/>
-        </p:nvSpPr>
-        <p:spPr>
-          <a:xfrm>
-            <a:off x="342000" y="23814000"/>
-            <a:ext cx="9672000" cy="1584000"/>
-          </a:xfrm>
-          <a:prstGeom prst="rect">
-            <a:avLst/>
-          </a:prstGeom>
-          <a:noFill/>
-        </p:spPr>
-        <p:txBody>
-          <a:bodyPr wrap="square" anchor="t" lIns="72000" rIns="72000" tIns="36000" bIns="36000">
-            <a:spAutoFit/>
-          </a:bodyPr>
-          <a:lstStyle/>
-          <a:p>
-            <a:pPr algn="l">
-              <a:spcBef>
-                <a:spcPts val="0"/>
-              </a:spcBef>
-              <a:spcAft>
-                <a:spcPts val="200"/>
-              </a:spcAft>
-            </a:pPr>
-            <a:r>
-              <a:rPr sz="1200" b="0">
-                <a:solidFill>
-                  <a:srgbClr val="222222"/>
-                </a:solidFill>
-                <a:latin typeface="Meiryo"/>
-                <a:ea typeface="Meiryo"/>
-              </a:rPr>
-              <a:t>・GCアミノ基を部分N-アセチル化</a:t>
-            </a:r>
-          </a:p>
-          <a:p>
-            <a:pPr algn="l">
-              <a:spcBef>
-                <a:spcPts val="0"/>
-              </a:spcBef>
-              <a:spcAft>
-                <a:spcPts val="200"/>
-              </a:spcAft>
-            </a:pPr>
-            <a:r>
-              <a:rPr sz="1200" b="0">
-                <a:solidFill>
-                  <a:srgbClr val="222222"/>
-                </a:solidFill>
-                <a:latin typeface="Meiryo"/>
-                <a:ea typeface="Meiryo"/>
-              </a:rPr>
-              <a:t>・DA↑でゲル化遅延</a:t>
-            </a:r>
-          </a:p>
-          <a:p>
-            <a:pPr algn="l">
-              <a:spcBef>
-                <a:spcPts val="0"/>
-              </a:spcBef>
-              <a:spcAft>
-                <a:spcPts val="200"/>
-              </a:spcAft>
-            </a:pPr>
-            <a:r>
-              <a:rPr sz="1200" b="0">
-                <a:solidFill>
-                  <a:srgbClr val="222222"/>
-                </a:solidFill>
-                <a:latin typeface="Meiryo"/>
-                <a:ea typeface="Meiryo"/>
-              </a:rPr>
-              <a:t>  (DA 16.7%:1.5h → 90%:80h)</a:t>
-            </a:r>
-          </a:p>
-          <a:p>
-            <a:pPr algn="l">
-              <a:spcBef>
-                <a:spcPts val="0"/>
-              </a:spcBef>
-              <a:spcAft>
-                <a:spcPts val="200"/>
-              </a:spcAft>
-            </a:pPr>
-            <a:r>
-              <a:rPr sz="1200" b="0">
-                <a:solidFill>
-                  <a:srgbClr val="222222"/>
-                </a:solidFill>
-                <a:latin typeface="Meiryo"/>
-                <a:ea typeface="Meiryo"/>
-              </a:rPr>
-              <a:t>→ アミノ基が主架橋点と化学的に証明</a:t>
-            </a:r>
-          </a:p>
-          <a:p>
-            <a:pPr algn="l">
-              <a:spcBef>
-                <a:spcPts val="0"/>
-              </a:spcBef>
-              <a:spcAft>
-                <a:spcPts val="200"/>
-              </a:spcAft>
-            </a:pPr>
-            <a:r>
-              <a:rPr sz="1200" b="0">
-                <a:solidFill>
-                  <a:srgbClr val="222222"/>
-                </a:solidFill>
-                <a:latin typeface="Meiryo"/>
-                <a:ea typeface="Meiryo"/>
-              </a:rPr>
-              <a:t>  アセチル化度で物性調整も可</a:t>
-            </a:r>
-          </a:p>
-        </p:txBody>
-      </p:sp>
-      <p:sp>
-        <p:nvSpPr>
-          <p:cNvPr id="44" name="Rectangle 43"/>
-          <p:cNvSpPr/>
-          <p:nvPr/>
-        </p:nvSpPr>
-        <p:spPr>
-          <a:xfrm>
-            <a:off x="396000" y="25434000"/>
-            <a:ext cx="9564000" cy="11358000"/>
-          </a:xfrm>
-          <a:prstGeom prst="rect">
-            <a:avLst/>
-          </a:prstGeom>
-          <a:solidFill>
-            <a:srgbClr val="F0F3F6"/>
-          </a:solidFill>
-          <a:ln w="12700">
-            <a:solidFill>
-              <a:srgbClr val="B0BCC7"/>
-            </a:solidFill>
-          </a:ln>
-          <a:effectLst/>
-        </p:spPr>
-        <p:style>
-          <a:lnRef idx="1">
-            <a:schemeClr val="accent1"/>
-          </a:lnRef>
-          <a:fillRef idx="3">
-            <a:schemeClr val="accent1"/>
-          </a:fillRef>
-          <a:effectRef idx="2">
-            <a:schemeClr val="accent1"/>
-          </a:effectRef>
-          <a:fontRef idx="minor">
-            <a:schemeClr val="lt1"/>
-          </a:fontRef>
-        </p:style>
-        <p:txBody>
-          <a:bodyPr rtlCol="0" anchor="ctr"/>
-          <a:lstStyle/>
-          <a:p>
-            <a:pPr algn="ctr"/>
-          </a:p>
-        </p:txBody>
-      </p:sp>
-      <p:sp>
-        <p:nvSpPr>
-          <p:cNvPr id="45" name="TextBox 44"/>
-          <p:cNvSpPr txBox="1"/>
-          <p:nvPr/>
-        </p:nvSpPr>
-        <p:spPr>
-          <a:xfrm>
-            <a:off x="396000" y="25434000"/>
-            <a:ext cx="9564000" cy="11358000"/>
-          </a:xfrm>
-          <a:prstGeom prst="rect">
-            <a:avLst/>
-          </a:prstGeom>
-          <a:noFill/>
-        </p:spPr>
-        <p:txBody>
-          <a:bodyPr wrap="square" anchor="ctr" lIns="72000" rIns="72000" tIns="36000" bIns="36000">
-            <a:spAutoFit/>
-          </a:bodyPr>
-          <a:lstStyle/>
-          <a:p>
-            <a:pPr algn="ctr">
-              <a:spcBef>
-                <a:spcPts val="0"/>
-              </a:spcBef>
-              <a:spcAft>
-                <a:spcPts val="200"/>
-              </a:spcAft>
-            </a:pPr>
-            <a:r>
-              <a:rPr sz="1100" b="1">
-                <a:solidFill>
-                  <a:srgbClr val="B0BCC7"/>
-                </a:solidFill>
-                <a:latin typeface="Meiryo"/>
-                <a:ea typeface="Meiryo"/>
-              </a:rPr>
-              <a:t>【図を差し込み】</a:t>
-            </a:r>
-          </a:p>
-          <a:p>
-            <a:pPr algn="ctr">
-              <a:spcBef>
-                <a:spcPts val="0"/>
-              </a:spcBef>
-              <a:spcAft>
-                <a:spcPts val="200"/>
-              </a:spcAft>
-            </a:pPr>
-            <a:r>
-              <a:rPr sz="1100" b="0">
-                <a:solidFill>
-                  <a:srgbClr val="6B7884"/>
-                </a:solidFill>
-                <a:latin typeface="Meiryo"/>
-                <a:ea typeface="Meiryo"/>
-              </a:rPr>
-              <a:t>図: DA vs ゲル化時間 / NMR</a:t>
-            </a:r>
-          </a:p>
-        </p:txBody>
-      </p:sp>
-      <p:sp>
-        <p:nvSpPr>
-          <p:cNvPr id="46" name="Rounded Rectangle 45"/>
-          <p:cNvSpPr/>
-          <p:nvPr/>
-        </p:nvSpPr>
-        <p:spPr>
-          <a:xfrm>
-            <a:off x="10248000" y="9828000"/>
-            <a:ext cx="9780000" cy="13446000"/>
+            <a:off x="10248000" y="9288000"/>
+            <a:ext cx="9780000" cy="27612000"/>
           </a:xfrm>
           <a:prstGeom prst="roundRect">
             <a:avLst>
@@ -5604,13 +4976,13 @@
       </p:sp>
       <p:sp>
         <p:nvSpPr>
-          <p:cNvPr id="47" name="Rectangle 46"/>
+          <p:cNvPr id="35" name="Rectangle 34"/>
           <p:cNvSpPr/>
           <p:nvPr/>
         </p:nvSpPr>
         <p:spPr>
           <a:xfrm>
-            <a:off x="10248000" y="9828000"/>
+            <a:off x="10248000" y="9288000"/>
             <a:ext cx="9780000" cy="324000"/>
           </a:xfrm>
           <a:prstGeom prst="rect">
@@ -5648,13 +5020,13 @@
       </p:sp>
       <p:sp>
         <p:nvSpPr>
-          <p:cNvPr id="48" name="TextBox 47"/>
+          <p:cNvPr id="36" name="TextBox 35"/>
           <p:cNvSpPr txBox="1"/>
           <p:nvPr/>
         </p:nvSpPr>
         <p:spPr>
           <a:xfrm>
-            <a:off x="10284000" y="9828000"/>
+            <a:off x="10284000" y="9288000"/>
             <a:ext cx="9708000" cy="324000"/>
           </a:xfrm>
           <a:prstGeom prst="rect">
@@ -5684,21 +5056,21 @@
                 <a:latin typeface="Meiryo"/>
                 <a:ea typeface="Meiryo"/>
               </a:rPr>
-              <a:t>C. ゲル化時間の制御 (In vitro)</a:t>
-            </a:r>
-          </a:p>
-        </p:txBody>
-      </p:sp>
-      <p:sp>
-        <p:nvSpPr>
-          <p:cNvPr id="49" name="TextBox 48"/>
+              <a:t>② ゲル化・力学｜ゲル化挙動と自己修復性〔新〕</a:t>
+            </a:r>
+          </a:p>
+        </p:txBody>
+      </p:sp>
+      <p:sp>
+        <p:nvSpPr>
+          <p:cNvPr id="37" name="TextBox 36"/>
           <p:cNvSpPr txBox="1"/>
           <p:nvPr/>
         </p:nvSpPr>
         <p:spPr>
           <a:xfrm>
-            <a:off x="10302000" y="10188000"/>
-            <a:ext cx="9672000" cy="1296000"/>
+            <a:off x="10302000" y="9648000"/>
+            <a:ext cx="9672000" cy="1368000"/>
           </a:xfrm>
           <a:prstGeom prst="rect">
             <a:avLst/>
@@ -5727,7 +5099,7 @@
                 <a:latin typeface="Meiryo"/>
                 <a:ea typeface="Meiryo"/>
               </a:rPr>
-              <a:t>・世代↑(G3→G4)で短縮</a:t>
+              <a:t>・世代↑・PGD比↑でゲル化時間を短縮</a:t>
             </a:r>
           </a:p>
           <a:p>
@@ -5747,7 +5119,7 @@
                 <a:latin typeface="Meiryo"/>
                 <a:ea typeface="Meiryo"/>
               </a:rPr>
-              <a:t>・PGD/GC比↑で短縮</a:t>
+              <a:t>  (PG4-025: 2分 / PG3-1: 67分)</a:t>
             </a:r>
           </a:p>
           <a:p>
@@ -5767,7 +5139,7 @@
                 <a:latin typeface="Meiryo"/>
                 <a:ea typeface="Meiryo"/>
               </a:rPr>
-              <a:t>・PG4-025: 2分 / PG3-1: 67分</a:t>
+              <a:t>・レオロジー: G′&gt;G″ の安定ネットワーク</a:t>
             </a:r>
           </a:p>
           <a:p>
@@ -5787,21 +5159,41 @@
                 <a:latin typeface="Meiryo"/>
                 <a:ea typeface="Meiryo"/>
               </a:rPr>
-              <a:t>  (架橋点密度に依存)</a:t>
-            </a:r>
-          </a:p>
-        </p:txBody>
-      </p:sp>
-      <p:sp>
-        <p:nvSpPr>
-          <p:cNvPr id="50" name="Rectangle 49"/>
+              <a:t>・大歪500%でゾル化 → 低歪で即 G′回復</a:t>
+            </a:r>
+          </a:p>
+          <a:p>
+            <a:pPr algn="l">
+              <a:spcBef>
+                <a:spcPts val="0"/>
+              </a:spcBef>
+              <a:spcAft>
+                <a:spcPts val="200"/>
+              </a:spcAft>
+            </a:pPr>
+            <a:r>
+              <a:rPr sz="1200" b="0">
+                <a:solidFill>
+                  <a:srgbClr val="222222"/>
+                </a:solidFill>
+                <a:latin typeface="Meiryo"/>
+                <a:ea typeface="Meiryo"/>
+              </a:rPr>
+              <a:t>→ シアシニング &amp; 自己修復を実証</a:t>
+            </a:r>
+          </a:p>
+        </p:txBody>
+      </p:sp>
+      <p:sp>
+        <p:nvSpPr>
+          <p:cNvPr id="38" name="Rectangle 37"/>
           <p:cNvSpPr/>
           <p:nvPr/>
         </p:nvSpPr>
         <p:spPr>
           <a:xfrm>
-            <a:off x="10356000" y="11520000"/>
-            <a:ext cx="9564000" cy="11646000"/>
+            <a:off x="10356000" y="11052000"/>
+            <a:ext cx="9564000" cy="25740000"/>
           </a:xfrm>
           <a:prstGeom prst="rect">
             <a:avLst/>
@@ -5840,14 +5232,14 @@
       </p:sp>
       <p:sp>
         <p:nvSpPr>
-          <p:cNvPr id="51" name="TextBox 50"/>
+          <p:cNvPr id="39" name="TextBox 38"/>
           <p:cNvSpPr txBox="1"/>
           <p:nvPr/>
         </p:nvSpPr>
         <p:spPr>
           <a:xfrm>
-            <a:off x="10356000" y="11520000"/>
-            <a:ext cx="9564000" cy="11646000"/>
+            <a:off x="10356000" y="11052000"/>
+            <a:ext cx="9564000" cy="25740000"/>
           </a:xfrm>
           <a:prstGeom prst="rect">
             <a:avLst/>
@@ -5896,21 +5288,21 @@
                 <a:latin typeface="Meiryo"/>
                 <a:ea typeface="Meiryo"/>
               </a:rPr>
-              <a:t>図: ゲル化時間 vs アミノ基比</a:t>
-            </a:r>
-          </a:p>
-        </p:txBody>
-      </p:sp>
-      <p:sp>
-        <p:nvSpPr>
-          <p:cNvPr id="52" name="Rounded Rectangle 51"/>
+              <a:t>図: ゲル化時間 / Time sweep・ステップ歪み</a:t>
+            </a:r>
+          </a:p>
+        </p:txBody>
+      </p:sp>
+      <p:sp>
+        <p:nvSpPr>
+          <p:cNvPr id="40" name="Rounded Rectangle 39"/>
           <p:cNvSpPr/>
           <p:nvPr/>
         </p:nvSpPr>
         <p:spPr>
           <a:xfrm>
-            <a:off x="10248000" y="23454000"/>
-            <a:ext cx="9780000" cy="13446000"/>
+            <a:off x="20208000" y="9288000"/>
+            <a:ext cx="9780000" cy="27612000"/>
           </a:xfrm>
           <a:prstGeom prst="roundRect">
             <a:avLst>
@@ -5951,13 +5343,13 @@
       </p:sp>
       <p:sp>
         <p:nvSpPr>
-          <p:cNvPr id="53" name="Rectangle 52"/>
+          <p:cNvPr id="41" name="Rectangle 40"/>
           <p:cNvSpPr/>
           <p:nvPr/>
         </p:nvSpPr>
         <p:spPr>
           <a:xfrm>
-            <a:off x="10248000" y="23454000"/>
+            <a:off x="20208000" y="9288000"/>
             <a:ext cx="9780000" cy="324000"/>
           </a:xfrm>
           <a:prstGeom prst="rect">
@@ -5995,13 +5387,13 @@
       </p:sp>
       <p:sp>
         <p:nvSpPr>
-          <p:cNvPr id="54" name="TextBox 53"/>
+          <p:cNvPr id="42" name="TextBox 41"/>
           <p:cNvSpPr txBox="1"/>
           <p:nvPr/>
         </p:nvSpPr>
         <p:spPr>
           <a:xfrm>
-            <a:off x="10284000" y="23454000"/>
+            <a:off x="20244000" y="9288000"/>
             <a:ext cx="9708000" cy="324000"/>
           </a:xfrm>
           <a:prstGeom prst="rect">
@@ -6031,21 +5423,21 @@
                 <a:latin typeface="Meiryo"/>
                 <a:ea typeface="Meiryo"/>
               </a:rPr>
-              <a:t>D. レオロジー: 自己修復性 (目玉)</a:t>
-            </a:r>
-          </a:p>
-        </p:txBody>
-      </p:sp>
-      <p:sp>
-        <p:nvSpPr>
-          <p:cNvPr id="55" name="TextBox 54"/>
+              <a:t>③ 生体適合性｜分解性と細胞適合性 (In vitro)〔新〕</a:t>
+            </a:r>
+          </a:p>
+        </p:txBody>
+      </p:sp>
+      <p:sp>
+        <p:nvSpPr>
+          <p:cNvPr id="43" name="TextBox 42"/>
           <p:cNvSpPr txBox="1"/>
           <p:nvPr/>
         </p:nvSpPr>
         <p:spPr>
           <a:xfrm>
-            <a:off x="10302000" y="23814000"/>
-            <a:ext cx="9672000" cy="1296000"/>
+            <a:off x="20262000" y="9648000"/>
+            <a:ext cx="9672000" cy="1368000"/>
           </a:xfrm>
           <a:prstGeom prst="rect">
             <a:avLst/>
@@ -6074,7 +5466,7 @@
                 <a:latin typeface="Meiryo"/>
                 <a:ea typeface="Meiryo"/>
               </a:rPr>
-              <a:t>・G′&gt;G″ 安定なゲルネットワーク</a:t>
+              <a:t>・37℃ PBS中で分解、滞留期間を制御</a:t>
             </a:r>
           </a:p>
           <a:p>
@@ -6094,7 +5486,7 @@
                 <a:latin typeface="Meiryo"/>
                 <a:ea typeface="Meiryo"/>
               </a:rPr>
-              <a:t>・大歪500%でゾル化</a:t>
+              <a:t>  (PG3-1:3日 / PG4-025:25日)</a:t>
             </a:r>
           </a:p>
           <a:p>
@@ -6114,7 +5506,7 @@
                 <a:latin typeface="Meiryo"/>
                 <a:ea typeface="Meiryo"/>
               </a:rPr>
-              <a:t>・低歪に戻すと即 G′回復(自己修復)</a:t>
+              <a:t>・D1細胞包埋 Live/Dead: 1/5/9日とも</a:t>
             </a:r>
           </a:p>
           <a:p>
@@ -6134,21 +5526,41 @@
                 <a:latin typeface="Meiryo"/>
                 <a:ea typeface="Meiryo"/>
               </a:rPr>
-              <a:t>・複数サイクルで再現</a:t>
-            </a:r>
-          </a:p>
-        </p:txBody>
-      </p:sp>
-      <p:sp>
-        <p:nvSpPr>
-          <p:cNvPr id="56" name="Rectangle 55"/>
+              <a:t>  死細胞ほぼ無し(溶解後も毒性なし)</a:t>
+            </a:r>
+          </a:p>
+          <a:p>
+            <a:pPr algn="l">
+              <a:spcBef>
+                <a:spcPts val="0"/>
+              </a:spcBef>
+              <a:spcAft>
+                <a:spcPts val="200"/>
+              </a:spcAft>
+            </a:pPr>
+            <a:r>
+              <a:rPr sz="1200" b="0">
+                <a:solidFill>
+                  <a:srgbClr val="222222"/>
+                </a:solidFill>
+                <a:latin typeface="Meiryo"/>
+                <a:ea typeface="Meiryo"/>
+              </a:rPr>
+              <a:t>→ 化学架橋剤なしで高い生体適合性</a:t>
+            </a:r>
+          </a:p>
+        </p:txBody>
+      </p:sp>
+      <p:sp>
+        <p:nvSpPr>
+          <p:cNvPr id="44" name="Rectangle 43"/>
           <p:cNvSpPr/>
           <p:nvPr/>
         </p:nvSpPr>
         <p:spPr>
           <a:xfrm>
-            <a:off x="10356000" y="25146000"/>
-            <a:ext cx="9564000" cy="11646000"/>
+            <a:off x="20316000" y="11052000"/>
+            <a:ext cx="9564000" cy="25740000"/>
           </a:xfrm>
           <a:prstGeom prst="rect">
             <a:avLst/>
@@ -6187,14 +5599,14 @@
       </p:sp>
       <p:sp>
         <p:nvSpPr>
-          <p:cNvPr id="57" name="TextBox 56"/>
+          <p:cNvPr id="45" name="TextBox 44"/>
           <p:cNvSpPr txBox="1"/>
           <p:nvPr/>
         </p:nvSpPr>
         <p:spPr>
           <a:xfrm>
-            <a:off x="10356000" y="25146000"/>
-            <a:ext cx="9564000" cy="11646000"/>
+            <a:off x="20316000" y="11052000"/>
+            <a:ext cx="9564000" cy="25740000"/>
           </a:xfrm>
           <a:prstGeom prst="rect">
             <a:avLst/>
@@ -6243,21 +5655,156 @@
                 <a:latin typeface="Meiryo"/>
                 <a:ea typeface="Meiryo"/>
               </a:rPr>
-              <a:t>図: Time sweep / ステップ歪み</a:t>
-            </a:r>
-          </a:p>
-        </p:txBody>
-      </p:sp>
-      <p:sp>
-        <p:nvSpPr>
-          <p:cNvPr id="58" name="Rounded Rectangle 57"/>
+              <a:t>図: 分解曲線 / Live-Dead 蛍光像</a:t>
+            </a:r>
+          </a:p>
+        </p:txBody>
+      </p:sp>
+      <p:sp>
+        <p:nvSpPr>
+          <p:cNvPr id="46" name="Rounded Rectangle 45"/>
           <p:cNvSpPr/>
           <p:nvPr/>
         </p:nvSpPr>
         <p:spPr>
           <a:xfrm>
-            <a:off x="20208000" y="9828000"/>
-            <a:ext cx="9780000" cy="13446000"/>
+            <a:off x="288000" y="37080000"/>
+            <a:ext cx="29700000" cy="3888000"/>
+          </a:xfrm>
+          <a:prstGeom prst="roundRect">
+            <a:avLst>
+              <a:gd name="adj" fmla="val 4000"/>
+            </a:avLst>
+          </a:prstGeom>
+          <a:solidFill>
+            <a:srgbClr val="FBF3EE"/>
+          </a:solidFill>
+          <a:ln w="25400">
+            <a:solidFill>
+              <a:srgbClr val="EA580C"/>
+            </a:solidFill>
+          </a:ln>
+          <a:effectLst/>
+        </p:spPr>
+        <p:style>
+          <a:lnRef idx="1">
+            <a:schemeClr val="accent1"/>
+          </a:lnRef>
+          <a:fillRef idx="3">
+            <a:schemeClr val="accent1"/>
+          </a:fillRef>
+          <a:effectRef idx="2">
+            <a:schemeClr val="accent1"/>
+          </a:effectRef>
+          <a:fontRef idx="minor">
+            <a:schemeClr val="lt1"/>
+          </a:fontRef>
+        </p:style>
+        <p:txBody>
+          <a:bodyPr rtlCol="0" anchor="ctr"/>
+          <a:lstStyle/>
+          <a:p>
+            <a:pPr algn="ctr"/>
+          </a:p>
+        </p:txBody>
+      </p:sp>
+      <p:sp>
+        <p:nvSpPr>
+          <p:cNvPr id="47" name="Rectangle 46"/>
+          <p:cNvSpPr/>
+          <p:nvPr/>
+        </p:nvSpPr>
+        <p:spPr>
+          <a:xfrm>
+            <a:off x="288000" y="37080000"/>
+            <a:ext cx="29700000" cy="396000"/>
+          </a:xfrm>
+          <a:prstGeom prst="rect">
+            <a:avLst/>
+          </a:prstGeom>
+          <a:solidFill>
+            <a:srgbClr val="33506B"/>
+          </a:solidFill>
+          <a:ln>
+            <a:noFill/>
+          </a:ln>
+          <a:effectLst/>
+        </p:spPr>
+        <p:style>
+          <a:lnRef idx="1">
+            <a:schemeClr val="accent1"/>
+          </a:lnRef>
+          <a:fillRef idx="3">
+            <a:schemeClr val="accent1"/>
+          </a:fillRef>
+          <a:effectRef idx="2">
+            <a:schemeClr val="accent1"/>
+          </a:effectRef>
+          <a:fontRef idx="minor">
+            <a:schemeClr val="lt1"/>
+          </a:fontRef>
+        </p:style>
+        <p:txBody>
+          <a:bodyPr rtlCol="0" anchor="ctr"/>
+          <a:lstStyle/>
+          <a:p>
+            <a:pPr algn="ctr"/>
+          </a:p>
+        </p:txBody>
+      </p:sp>
+      <p:sp>
+        <p:nvSpPr>
+          <p:cNvPr id="48" name="TextBox 47"/>
+          <p:cNvSpPr txBox="1"/>
+          <p:nvPr/>
+        </p:nvSpPr>
+        <p:spPr>
+          <a:xfrm>
+            <a:off x="432000" y="37080000"/>
+            <a:ext cx="29412000" cy="396000"/>
+          </a:xfrm>
+          <a:prstGeom prst="rect">
+            <a:avLst/>
+          </a:prstGeom>
+          <a:noFill/>
+        </p:spPr>
+        <p:txBody>
+          <a:bodyPr wrap="square" anchor="ctr" lIns="72000" rIns="72000" tIns="36000" bIns="36000">
+            <a:spAutoFit/>
+          </a:bodyPr>
+          <a:lstStyle/>
+          <a:p>
+            <a:pPr algn="l">
+              <a:spcBef>
+                <a:spcPts val="0"/>
+              </a:spcBef>
+              <a:spcAft>
+                <a:spcPts val="200"/>
+              </a:spcAft>
+            </a:pPr>
+            <a:r>
+              <a:rPr sz="1700" b="1">
+                <a:solidFill>
+                  <a:srgbClr val="FFFFFF"/>
+                </a:solidFill>
+                <a:latin typeface="Meiryo"/>
+                <a:ea typeface="Meiryo"/>
+              </a:rPr>
+              <a:t>C. 実用性評価 ｜ 注入試験（In vitro → In vivo）〔新データ・目玉〕</a:t>
+            </a:r>
+          </a:p>
+        </p:txBody>
+      </p:sp>
+      <p:sp>
+        <p:nvSpPr>
+          <p:cNvPr id="49" name="Rounded Rectangle 48"/>
+          <p:cNvSpPr/>
+          <p:nvPr/>
+        </p:nvSpPr>
+        <p:spPr>
+          <a:xfrm>
+            <a:off x="360000" y="37548000"/>
+            <a:ext cx="14688000" cy="3312000"/>
           </a:xfrm>
           <a:prstGeom prst="roundRect">
             <a:avLst>
@@ -6298,14 +5845,14 @@
       </p:sp>
       <p:sp>
         <p:nvSpPr>
-          <p:cNvPr id="59" name="Rectangle 58"/>
+          <p:cNvPr id="50" name="Rectangle 49"/>
           <p:cNvSpPr/>
           <p:nvPr/>
         </p:nvSpPr>
         <p:spPr>
           <a:xfrm>
-            <a:off x="20208000" y="9828000"/>
-            <a:ext cx="9780000" cy="324000"/>
+            <a:off x="360000" y="37548000"/>
+            <a:ext cx="14688000" cy="324000"/>
           </a:xfrm>
           <a:prstGeom prst="rect">
             <a:avLst/>
@@ -6342,14 +5889,14 @@
       </p:sp>
       <p:sp>
         <p:nvSpPr>
-          <p:cNvPr id="60" name="TextBox 59"/>
+          <p:cNvPr id="51" name="TextBox 50"/>
           <p:cNvSpPr txBox="1"/>
           <p:nvPr/>
         </p:nvSpPr>
         <p:spPr>
           <a:xfrm>
-            <a:off x="20244000" y="9828000"/>
-            <a:ext cx="9708000" cy="324000"/>
+            <a:off x="396000" y="37548000"/>
+            <a:ext cx="14616000" cy="324000"/>
           </a:xfrm>
           <a:prstGeom prst="rect">
             <a:avLst/>
@@ -6378,21 +5925,21 @@
                 <a:latin typeface="Meiryo"/>
                 <a:ea typeface="Meiryo"/>
               </a:rPr>
-              <a:t>E. in vitro 分解性〔新〕</a:t>
-            </a:r>
-          </a:p>
-        </p:txBody>
-      </p:sp>
-      <p:sp>
-        <p:nvSpPr>
-          <p:cNvPr id="61" name="TextBox 60"/>
+              <a:t>C-1. in vitro 注入試験</a:t>
+            </a:r>
+          </a:p>
+        </p:txBody>
+      </p:sp>
+      <p:sp>
+        <p:nvSpPr>
+          <p:cNvPr id="52" name="TextBox 51"/>
           <p:cNvSpPr txBox="1"/>
           <p:nvPr/>
         </p:nvSpPr>
         <p:spPr>
           <a:xfrm>
-            <a:off x="20262000" y="10188000"/>
-            <a:ext cx="9672000" cy="1296000"/>
+            <a:off x="414000" y="37908000"/>
+            <a:ext cx="14580000" cy="1368000"/>
           </a:xfrm>
           <a:prstGeom prst="rect">
             <a:avLst/>
@@ -6421,7 +5968,7 @@
                 <a:latin typeface="Meiryo"/>
                 <a:ea typeface="Meiryo"/>
               </a:rPr>
-              <a:t>・37℃ PBS中の重量変化で評価</a:t>
+              <a:t>・赤色化PG4-0125をシリンジから吐出</a:t>
             </a:r>
           </a:p>
           <a:p>
@@ -6441,7 +5988,7 @@
                 <a:latin typeface="Meiryo"/>
                 <a:ea typeface="Meiryo"/>
               </a:rPr>
-              <a:t>・PG3-1:3日 / PG4-0125:4日</a:t>
+              <a:t>・針内で高せん断 → ゾル化(シアシニング)</a:t>
             </a:r>
           </a:p>
           <a:p>
@@ -6461,7 +6008,7 @@
                 <a:latin typeface="Meiryo"/>
                 <a:ea typeface="Meiryo"/>
               </a:rPr>
-              <a:t>・PG4-025:25日で完全溶解</a:t>
+              <a:t>・吐出直後に即ゲル化、液だれせず形状保持</a:t>
             </a:r>
           </a:p>
           <a:p>
@@ -6481,21 +6028,21 @@
                 <a:latin typeface="Meiryo"/>
                 <a:ea typeface="Meiryo"/>
               </a:rPr>
-              <a:t>→ 滞留期間を数日〜数週間で制御</a:t>
-            </a:r>
-          </a:p>
-        </p:txBody>
-      </p:sp>
-      <p:sp>
-        <p:nvSpPr>
-          <p:cNvPr id="62" name="Rectangle 61"/>
+              <a:t>→ レオロジー挙動を実機操作で可視化</a:t>
+            </a:r>
+          </a:p>
+        </p:txBody>
+      </p:sp>
+      <p:sp>
+        <p:nvSpPr>
+          <p:cNvPr id="53" name="Rectangle 52"/>
           <p:cNvSpPr/>
           <p:nvPr/>
         </p:nvSpPr>
         <p:spPr>
           <a:xfrm>
-            <a:off x="20316000" y="11520000"/>
-            <a:ext cx="9564000" cy="11646000"/>
+            <a:off x="468000" y="39312000"/>
+            <a:ext cx="14472000" cy="1440000"/>
           </a:xfrm>
           <a:prstGeom prst="rect">
             <a:avLst/>
@@ -6534,14 +6081,14 @@
       </p:sp>
       <p:sp>
         <p:nvSpPr>
-          <p:cNvPr id="63" name="TextBox 62"/>
+          <p:cNvPr id="54" name="TextBox 53"/>
           <p:cNvSpPr txBox="1"/>
           <p:nvPr/>
         </p:nvSpPr>
         <p:spPr>
           <a:xfrm>
-            <a:off x="20316000" y="11520000"/>
-            <a:ext cx="9564000" cy="11646000"/>
+            <a:off x="468000" y="39312000"/>
+            <a:ext cx="14472000" cy="1440000"/>
           </a:xfrm>
           <a:prstGeom prst="rect">
             <a:avLst/>
@@ -6590,835 +6137,6 @@
                 <a:latin typeface="Meiryo"/>
                 <a:ea typeface="Meiryo"/>
               </a:rPr>
-              <a:t>図: 分解曲線</a:t>
-            </a:r>
-          </a:p>
-        </p:txBody>
-      </p:sp>
-      <p:sp>
-        <p:nvSpPr>
-          <p:cNvPr id="64" name="Rounded Rectangle 63"/>
-          <p:cNvSpPr/>
-          <p:nvPr/>
-        </p:nvSpPr>
-        <p:spPr>
-          <a:xfrm>
-            <a:off x="20208000" y="23454000"/>
-            <a:ext cx="9780000" cy="13446000"/>
-          </a:xfrm>
-          <a:prstGeom prst="roundRect">
-            <a:avLst>
-              <a:gd name="adj" fmla="val 4000"/>
-            </a:avLst>
-          </a:prstGeom>
-          <a:solidFill>
-            <a:srgbClr val="DBEAFE"/>
-          </a:solidFill>
-          <a:ln w="12700">
-            <a:solidFill>
-              <a:srgbClr val="90A4B5"/>
-            </a:solidFill>
-          </a:ln>
-          <a:effectLst/>
-        </p:spPr>
-        <p:style>
-          <a:lnRef idx="1">
-            <a:schemeClr val="accent1"/>
-          </a:lnRef>
-          <a:fillRef idx="3">
-            <a:schemeClr val="accent1"/>
-          </a:fillRef>
-          <a:effectRef idx="2">
-            <a:schemeClr val="accent1"/>
-          </a:effectRef>
-          <a:fontRef idx="minor">
-            <a:schemeClr val="lt1"/>
-          </a:fontRef>
-        </p:style>
-        <p:txBody>
-          <a:bodyPr rtlCol="0" anchor="ctr"/>
-          <a:lstStyle/>
-          <a:p>
-            <a:pPr algn="ctr"/>
-          </a:p>
-        </p:txBody>
-      </p:sp>
-      <p:sp>
-        <p:nvSpPr>
-          <p:cNvPr id="65" name="Rectangle 64"/>
-          <p:cNvSpPr/>
-          <p:nvPr/>
-        </p:nvSpPr>
-        <p:spPr>
-          <a:xfrm>
-            <a:off x="20208000" y="23454000"/>
-            <a:ext cx="9780000" cy="324000"/>
-          </a:xfrm>
-          <a:prstGeom prst="rect">
-            <a:avLst/>
-          </a:prstGeom>
-          <a:solidFill>
-            <a:srgbClr val="2563EB"/>
-          </a:solidFill>
-          <a:ln>
-            <a:noFill/>
-          </a:ln>
-          <a:effectLst/>
-        </p:spPr>
-        <p:style>
-          <a:lnRef idx="1">
-            <a:schemeClr val="accent1"/>
-          </a:lnRef>
-          <a:fillRef idx="3">
-            <a:schemeClr val="accent1"/>
-          </a:fillRef>
-          <a:effectRef idx="2">
-            <a:schemeClr val="accent1"/>
-          </a:effectRef>
-          <a:fontRef idx="minor">
-            <a:schemeClr val="lt1"/>
-          </a:fontRef>
-        </p:style>
-        <p:txBody>
-          <a:bodyPr rtlCol="0" anchor="ctr"/>
-          <a:lstStyle/>
-          <a:p>
-            <a:pPr algn="ctr"/>
-          </a:p>
-        </p:txBody>
-      </p:sp>
-      <p:sp>
-        <p:nvSpPr>
-          <p:cNvPr id="66" name="TextBox 65"/>
-          <p:cNvSpPr txBox="1"/>
-          <p:nvPr/>
-        </p:nvSpPr>
-        <p:spPr>
-          <a:xfrm>
-            <a:off x="20244000" y="23454000"/>
-            <a:ext cx="9708000" cy="324000"/>
-          </a:xfrm>
-          <a:prstGeom prst="rect">
-            <a:avLst/>
-          </a:prstGeom>
-          <a:noFill/>
-        </p:spPr>
-        <p:txBody>
-          <a:bodyPr wrap="square" anchor="ctr" lIns="72000" rIns="72000" tIns="36000" bIns="36000">
-            <a:spAutoFit/>
-          </a:bodyPr>
-          <a:lstStyle/>
-          <a:p>
-            <a:pPr algn="l">
-              <a:spcBef>
-                <a:spcPts val="0"/>
-              </a:spcBef>
-              <a:spcAft>
-                <a:spcPts val="200"/>
-              </a:spcAft>
-            </a:pPr>
-            <a:r>
-              <a:rPr sz="1400" b="1">
-                <a:solidFill>
-                  <a:srgbClr val="FFFFFF"/>
-                </a:solidFill>
-                <a:latin typeface="Meiryo"/>
-                <a:ea typeface="Meiryo"/>
-              </a:rPr>
-              <a:t>F. 生体適合性 Live/Dead〔新〕</a:t>
-            </a:r>
-          </a:p>
-        </p:txBody>
-      </p:sp>
-      <p:sp>
-        <p:nvSpPr>
-          <p:cNvPr id="67" name="TextBox 66"/>
-          <p:cNvSpPr txBox="1"/>
-          <p:nvPr/>
-        </p:nvSpPr>
-        <p:spPr>
-          <a:xfrm>
-            <a:off x="20262000" y="23814000"/>
-            <a:ext cx="9672000" cy="1296000"/>
-          </a:xfrm>
-          <a:prstGeom prst="rect">
-            <a:avLst/>
-          </a:prstGeom>
-          <a:noFill/>
-        </p:spPr>
-        <p:txBody>
-          <a:bodyPr wrap="square" anchor="t" lIns="72000" rIns="72000" tIns="36000" bIns="36000">
-            <a:spAutoFit/>
-          </a:bodyPr>
-          <a:lstStyle/>
-          <a:p>
-            <a:pPr algn="l">
-              <a:spcBef>
-                <a:spcPts val="0"/>
-              </a:spcBef>
-              <a:spcAft>
-                <a:spcPts val="200"/>
-              </a:spcAft>
-            </a:pPr>
-            <a:r>
-              <a:rPr sz="1200" b="0">
-                <a:solidFill>
-                  <a:srgbClr val="222222"/>
-                </a:solidFill>
-                <a:latin typeface="Meiryo"/>
-                <a:ea typeface="Meiryo"/>
-              </a:rPr>
-              <a:t>・D1細胞を3次元包埋し培養</a:t>
-            </a:r>
-          </a:p>
-          <a:p>
-            <a:pPr algn="l">
-              <a:spcBef>
-                <a:spcPts val="0"/>
-              </a:spcBef>
-              <a:spcAft>
-                <a:spcPts val="200"/>
-              </a:spcAft>
-            </a:pPr>
-            <a:r>
-              <a:rPr sz="1200" b="0">
-                <a:solidFill>
-                  <a:srgbClr val="222222"/>
-                </a:solidFill>
-                <a:latin typeface="Meiryo"/>
-                <a:ea typeface="Meiryo"/>
-              </a:rPr>
-              <a:t>・1/5/9日とも死細胞ほぼ無し</a:t>
-            </a:r>
-          </a:p>
-          <a:p>
-            <a:pPr algn="l">
-              <a:spcBef>
-                <a:spcPts val="0"/>
-              </a:spcBef>
-              <a:spcAft>
-                <a:spcPts val="200"/>
-              </a:spcAft>
-            </a:pPr>
-            <a:r>
-              <a:rPr sz="1200" b="0">
-                <a:solidFill>
-                  <a:srgbClr val="222222"/>
-                </a:solidFill>
-                <a:latin typeface="Meiryo"/>
-                <a:ea typeface="Meiryo"/>
-              </a:rPr>
-              <a:t>・溶解後も毒性なし</a:t>
-            </a:r>
-          </a:p>
-          <a:p>
-            <a:pPr algn="l">
-              <a:spcBef>
-                <a:spcPts val="0"/>
-              </a:spcBef>
-              <a:spcAft>
-                <a:spcPts val="200"/>
-              </a:spcAft>
-            </a:pPr>
-            <a:r>
-              <a:rPr sz="1200" b="0">
-                <a:solidFill>
-                  <a:srgbClr val="222222"/>
-                </a:solidFill>
-                <a:latin typeface="Meiryo"/>
-                <a:ea typeface="Meiryo"/>
-              </a:rPr>
-              <a:t>→ 化学架橋剤なしで高生存率</a:t>
-            </a:r>
-          </a:p>
-        </p:txBody>
-      </p:sp>
-      <p:sp>
-        <p:nvSpPr>
-          <p:cNvPr id="68" name="Rectangle 67"/>
-          <p:cNvSpPr/>
-          <p:nvPr/>
-        </p:nvSpPr>
-        <p:spPr>
-          <a:xfrm>
-            <a:off x="20316000" y="25146000"/>
-            <a:ext cx="9564000" cy="11646000"/>
-          </a:xfrm>
-          <a:prstGeom prst="rect">
-            <a:avLst/>
-          </a:prstGeom>
-          <a:solidFill>
-            <a:srgbClr val="F0F3F6"/>
-          </a:solidFill>
-          <a:ln w="12700">
-            <a:solidFill>
-              <a:srgbClr val="B0BCC7"/>
-            </a:solidFill>
-          </a:ln>
-          <a:effectLst/>
-        </p:spPr>
-        <p:style>
-          <a:lnRef idx="1">
-            <a:schemeClr val="accent1"/>
-          </a:lnRef>
-          <a:fillRef idx="3">
-            <a:schemeClr val="accent1"/>
-          </a:fillRef>
-          <a:effectRef idx="2">
-            <a:schemeClr val="accent1"/>
-          </a:effectRef>
-          <a:fontRef idx="minor">
-            <a:schemeClr val="lt1"/>
-          </a:fontRef>
-        </p:style>
-        <p:txBody>
-          <a:bodyPr rtlCol="0" anchor="ctr"/>
-          <a:lstStyle/>
-          <a:p>
-            <a:pPr algn="ctr"/>
-          </a:p>
-        </p:txBody>
-      </p:sp>
-      <p:sp>
-        <p:nvSpPr>
-          <p:cNvPr id="69" name="TextBox 68"/>
-          <p:cNvSpPr txBox="1"/>
-          <p:nvPr/>
-        </p:nvSpPr>
-        <p:spPr>
-          <a:xfrm>
-            <a:off x="20316000" y="25146000"/>
-            <a:ext cx="9564000" cy="11646000"/>
-          </a:xfrm>
-          <a:prstGeom prst="rect">
-            <a:avLst/>
-          </a:prstGeom>
-          <a:noFill/>
-        </p:spPr>
-        <p:txBody>
-          <a:bodyPr wrap="square" anchor="ctr" lIns="72000" rIns="72000" tIns="36000" bIns="36000">
-            <a:spAutoFit/>
-          </a:bodyPr>
-          <a:lstStyle/>
-          <a:p>
-            <a:pPr algn="ctr">
-              <a:spcBef>
-                <a:spcPts val="0"/>
-              </a:spcBef>
-              <a:spcAft>
-                <a:spcPts val="200"/>
-              </a:spcAft>
-            </a:pPr>
-            <a:r>
-              <a:rPr sz="1100" b="1">
-                <a:solidFill>
-                  <a:srgbClr val="B0BCC7"/>
-                </a:solidFill>
-                <a:latin typeface="Meiryo"/>
-                <a:ea typeface="Meiryo"/>
-              </a:rPr>
-              <a:t>【図を差し込み】</a:t>
-            </a:r>
-          </a:p>
-          <a:p>
-            <a:pPr algn="ctr">
-              <a:spcBef>
-                <a:spcPts val="0"/>
-              </a:spcBef>
-              <a:spcAft>
-                <a:spcPts val="200"/>
-              </a:spcAft>
-            </a:pPr>
-            <a:r>
-              <a:rPr sz="1100" b="0">
-                <a:solidFill>
-                  <a:srgbClr val="6B7884"/>
-                </a:solidFill>
-                <a:latin typeface="Meiryo"/>
-                <a:ea typeface="Meiryo"/>
-              </a:rPr>
-              <a:t>図: 蛍光像(PG3-1/4-025/4-0125)</a:t>
-            </a:r>
-          </a:p>
-        </p:txBody>
-      </p:sp>
-      <p:sp>
-        <p:nvSpPr>
-          <p:cNvPr id="70" name="Rounded Rectangle 69"/>
-          <p:cNvSpPr/>
-          <p:nvPr/>
-        </p:nvSpPr>
-        <p:spPr>
-          <a:xfrm>
-            <a:off x="288000" y="37080000"/>
-            <a:ext cx="29700000" cy="3888000"/>
-          </a:xfrm>
-          <a:prstGeom prst="roundRect">
-            <a:avLst>
-              <a:gd name="adj" fmla="val 4000"/>
-            </a:avLst>
-          </a:prstGeom>
-          <a:solidFill>
-            <a:srgbClr val="FBF3EE"/>
-          </a:solidFill>
-          <a:ln w="25400">
-            <a:solidFill>
-              <a:srgbClr val="EA580C"/>
-            </a:solidFill>
-          </a:ln>
-          <a:effectLst/>
-        </p:spPr>
-        <p:style>
-          <a:lnRef idx="1">
-            <a:schemeClr val="accent1"/>
-          </a:lnRef>
-          <a:fillRef idx="3">
-            <a:schemeClr val="accent1"/>
-          </a:fillRef>
-          <a:effectRef idx="2">
-            <a:schemeClr val="accent1"/>
-          </a:effectRef>
-          <a:fontRef idx="minor">
-            <a:schemeClr val="lt1"/>
-          </a:fontRef>
-        </p:style>
-        <p:txBody>
-          <a:bodyPr rtlCol="0" anchor="ctr"/>
-          <a:lstStyle/>
-          <a:p>
-            <a:pPr algn="ctr"/>
-          </a:p>
-        </p:txBody>
-      </p:sp>
-      <p:sp>
-        <p:nvSpPr>
-          <p:cNvPr id="71" name="Rectangle 70"/>
-          <p:cNvSpPr/>
-          <p:nvPr/>
-        </p:nvSpPr>
-        <p:spPr>
-          <a:xfrm>
-            <a:off x="288000" y="37080000"/>
-            <a:ext cx="29700000" cy="396000"/>
-          </a:xfrm>
-          <a:prstGeom prst="rect">
-            <a:avLst/>
-          </a:prstGeom>
-          <a:solidFill>
-            <a:srgbClr val="33506B"/>
-          </a:solidFill>
-          <a:ln>
-            <a:noFill/>
-          </a:ln>
-          <a:effectLst/>
-        </p:spPr>
-        <p:style>
-          <a:lnRef idx="1">
-            <a:schemeClr val="accent1"/>
-          </a:lnRef>
-          <a:fillRef idx="3">
-            <a:schemeClr val="accent1"/>
-          </a:fillRef>
-          <a:effectRef idx="2">
-            <a:schemeClr val="accent1"/>
-          </a:effectRef>
-          <a:fontRef idx="minor">
-            <a:schemeClr val="lt1"/>
-          </a:fontRef>
-        </p:style>
-        <p:txBody>
-          <a:bodyPr rtlCol="0" anchor="ctr"/>
-          <a:lstStyle/>
-          <a:p>
-            <a:pPr algn="ctr"/>
-          </a:p>
-        </p:txBody>
-      </p:sp>
-      <p:sp>
-        <p:nvSpPr>
-          <p:cNvPr id="72" name="TextBox 71"/>
-          <p:cNvSpPr txBox="1"/>
-          <p:nvPr/>
-        </p:nvSpPr>
-        <p:spPr>
-          <a:xfrm>
-            <a:off x="432000" y="37080000"/>
-            <a:ext cx="29412000" cy="396000"/>
-          </a:xfrm>
-          <a:prstGeom prst="rect">
-            <a:avLst/>
-          </a:prstGeom>
-          <a:noFill/>
-        </p:spPr>
-        <p:txBody>
-          <a:bodyPr wrap="square" anchor="ctr" lIns="72000" rIns="72000" tIns="36000" bIns="36000">
-            <a:spAutoFit/>
-          </a:bodyPr>
-          <a:lstStyle/>
-          <a:p>
-            <a:pPr algn="l">
-              <a:spcBef>
-                <a:spcPts val="0"/>
-              </a:spcBef>
-              <a:spcAft>
-                <a:spcPts val="200"/>
-              </a:spcAft>
-            </a:pPr>
-            <a:r>
-              <a:rPr sz="1700" b="1">
-                <a:solidFill>
-                  <a:srgbClr val="FFFFFF"/>
-                </a:solidFill>
-                <a:latin typeface="Meiryo"/>
-                <a:ea typeface="Meiryo"/>
-              </a:rPr>
-              <a:t>C. 実用性評価 ｜ 注入試験（In vitro → In vivo）〔新データ・目玉〕</a:t>
-            </a:r>
-          </a:p>
-        </p:txBody>
-      </p:sp>
-      <p:sp>
-        <p:nvSpPr>
-          <p:cNvPr id="73" name="Rounded Rectangle 72"/>
-          <p:cNvSpPr/>
-          <p:nvPr/>
-        </p:nvSpPr>
-        <p:spPr>
-          <a:xfrm>
-            <a:off x="360000" y="37548000"/>
-            <a:ext cx="14688000" cy="3312000"/>
-          </a:xfrm>
-          <a:prstGeom prst="roundRect">
-            <a:avLst>
-              <a:gd name="adj" fmla="val 4000"/>
-            </a:avLst>
-          </a:prstGeom>
-          <a:solidFill>
-            <a:srgbClr val="DBEAFE"/>
-          </a:solidFill>
-          <a:ln w="12700">
-            <a:solidFill>
-              <a:srgbClr val="90A4B5"/>
-            </a:solidFill>
-          </a:ln>
-          <a:effectLst/>
-        </p:spPr>
-        <p:style>
-          <a:lnRef idx="1">
-            <a:schemeClr val="accent1"/>
-          </a:lnRef>
-          <a:fillRef idx="3">
-            <a:schemeClr val="accent1"/>
-          </a:fillRef>
-          <a:effectRef idx="2">
-            <a:schemeClr val="accent1"/>
-          </a:effectRef>
-          <a:fontRef idx="minor">
-            <a:schemeClr val="lt1"/>
-          </a:fontRef>
-        </p:style>
-        <p:txBody>
-          <a:bodyPr rtlCol="0" anchor="ctr"/>
-          <a:lstStyle/>
-          <a:p>
-            <a:pPr algn="ctr"/>
-          </a:p>
-        </p:txBody>
-      </p:sp>
-      <p:sp>
-        <p:nvSpPr>
-          <p:cNvPr id="74" name="Rectangle 73"/>
-          <p:cNvSpPr/>
-          <p:nvPr/>
-        </p:nvSpPr>
-        <p:spPr>
-          <a:xfrm>
-            <a:off x="360000" y="37548000"/>
-            <a:ext cx="14688000" cy="324000"/>
-          </a:xfrm>
-          <a:prstGeom prst="rect">
-            <a:avLst/>
-          </a:prstGeom>
-          <a:solidFill>
-            <a:srgbClr val="2563EB"/>
-          </a:solidFill>
-          <a:ln>
-            <a:noFill/>
-          </a:ln>
-          <a:effectLst/>
-        </p:spPr>
-        <p:style>
-          <a:lnRef idx="1">
-            <a:schemeClr val="accent1"/>
-          </a:lnRef>
-          <a:fillRef idx="3">
-            <a:schemeClr val="accent1"/>
-          </a:fillRef>
-          <a:effectRef idx="2">
-            <a:schemeClr val="accent1"/>
-          </a:effectRef>
-          <a:fontRef idx="minor">
-            <a:schemeClr val="lt1"/>
-          </a:fontRef>
-        </p:style>
-        <p:txBody>
-          <a:bodyPr rtlCol="0" anchor="ctr"/>
-          <a:lstStyle/>
-          <a:p>
-            <a:pPr algn="ctr"/>
-          </a:p>
-        </p:txBody>
-      </p:sp>
-      <p:sp>
-        <p:nvSpPr>
-          <p:cNvPr id="75" name="TextBox 74"/>
-          <p:cNvSpPr txBox="1"/>
-          <p:nvPr/>
-        </p:nvSpPr>
-        <p:spPr>
-          <a:xfrm>
-            <a:off x="396000" y="37548000"/>
-            <a:ext cx="14616000" cy="324000"/>
-          </a:xfrm>
-          <a:prstGeom prst="rect">
-            <a:avLst/>
-          </a:prstGeom>
-          <a:noFill/>
-        </p:spPr>
-        <p:txBody>
-          <a:bodyPr wrap="square" anchor="ctr" lIns="72000" rIns="72000" tIns="36000" bIns="36000">
-            <a:spAutoFit/>
-          </a:bodyPr>
-          <a:lstStyle/>
-          <a:p>
-            <a:pPr algn="l">
-              <a:spcBef>
-                <a:spcPts val="0"/>
-              </a:spcBef>
-              <a:spcAft>
-                <a:spcPts val="200"/>
-              </a:spcAft>
-            </a:pPr>
-            <a:r>
-              <a:rPr sz="1400" b="1">
-                <a:solidFill>
-                  <a:srgbClr val="FFFFFF"/>
-                </a:solidFill>
-                <a:latin typeface="Meiryo"/>
-                <a:ea typeface="Meiryo"/>
-              </a:rPr>
-              <a:t>C-1. in vitro 注入試験</a:t>
-            </a:r>
-          </a:p>
-        </p:txBody>
-      </p:sp>
-      <p:sp>
-        <p:nvSpPr>
-          <p:cNvPr id="76" name="TextBox 75"/>
-          <p:cNvSpPr txBox="1"/>
-          <p:nvPr/>
-        </p:nvSpPr>
-        <p:spPr>
-          <a:xfrm>
-            <a:off x="414000" y="37908000"/>
-            <a:ext cx="14580000" cy="1368000"/>
-          </a:xfrm>
-          <a:prstGeom prst="rect">
-            <a:avLst/>
-          </a:prstGeom>
-          <a:noFill/>
-        </p:spPr>
-        <p:txBody>
-          <a:bodyPr wrap="square" anchor="t" lIns="72000" rIns="72000" tIns="36000" bIns="36000">
-            <a:spAutoFit/>
-          </a:bodyPr>
-          <a:lstStyle/>
-          <a:p>
-            <a:pPr algn="l">
-              <a:spcBef>
-                <a:spcPts val="0"/>
-              </a:spcBef>
-              <a:spcAft>
-                <a:spcPts val="200"/>
-              </a:spcAft>
-            </a:pPr>
-            <a:r>
-              <a:rPr sz="1200" b="0">
-                <a:solidFill>
-                  <a:srgbClr val="222222"/>
-                </a:solidFill>
-                <a:latin typeface="Meiryo"/>
-                <a:ea typeface="Meiryo"/>
-              </a:rPr>
-              <a:t>・赤色化PG4-0125をシリンジから吐出</a:t>
-            </a:r>
-          </a:p>
-          <a:p>
-            <a:pPr algn="l">
-              <a:spcBef>
-                <a:spcPts val="0"/>
-              </a:spcBef>
-              <a:spcAft>
-                <a:spcPts val="200"/>
-              </a:spcAft>
-            </a:pPr>
-            <a:r>
-              <a:rPr sz="1200" b="0">
-                <a:solidFill>
-                  <a:srgbClr val="222222"/>
-                </a:solidFill>
-                <a:latin typeface="Meiryo"/>
-                <a:ea typeface="Meiryo"/>
-              </a:rPr>
-              <a:t>・針内で高せん断 → ゾル化(シアシニング)</a:t>
-            </a:r>
-          </a:p>
-          <a:p>
-            <a:pPr algn="l">
-              <a:spcBef>
-                <a:spcPts val="0"/>
-              </a:spcBef>
-              <a:spcAft>
-                <a:spcPts val="200"/>
-              </a:spcAft>
-            </a:pPr>
-            <a:r>
-              <a:rPr sz="1200" b="0">
-                <a:solidFill>
-                  <a:srgbClr val="222222"/>
-                </a:solidFill>
-                <a:latin typeface="Meiryo"/>
-                <a:ea typeface="Meiryo"/>
-              </a:rPr>
-              <a:t>・吐出直後に即ゲル化、液だれせず形状保持</a:t>
-            </a:r>
-          </a:p>
-          <a:p>
-            <a:pPr algn="l">
-              <a:spcBef>
-                <a:spcPts val="0"/>
-              </a:spcBef>
-              <a:spcAft>
-                <a:spcPts val="200"/>
-              </a:spcAft>
-            </a:pPr>
-            <a:r>
-              <a:rPr sz="1200" b="0">
-                <a:solidFill>
-                  <a:srgbClr val="222222"/>
-                </a:solidFill>
-                <a:latin typeface="Meiryo"/>
-                <a:ea typeface="Meiryo"/>
-              </a:rPr>
-              <a:t>→ レオロジー挙動を実機操作で可視化</a:t>
-            </a:r>
-          </a:p>
-        </p:txBody>
-      </p:sp>
-      <p:sp>
-        <p:nvSpPr>
-          <p:cNvPr id="77" name="Rectangle 76"/>
-          <p:cNvSpPr/>
-          <p:nvPr/>
-        </p:nvSpPr>
-        <p:spPr>
-          <a:xfrm>
-            <a:off x="468000" y="39312000"/>
-            <a:ext cx="14472000" cy="1440000"/>
-          </a:xfrm>
-          <a:prstGeom prst="rect">
-            <a:avLst/>
-          </a:prstGeom>
-          <a:solidFill>
-            <a:srgbClr val="F0F3F6"/>
-          </a:solidFill>
-          <a:ln w="12700">
-            <a:solidFill>
-              <a:srgbClr val="B0BCC7"/>
-            </a:solidFill>
-          </a:ln>
-          <a:effectLst/>
-        </p:spPr>
-        <p:style>
-          <a:lnRef idx="1">
-            <a:schemeClr val="accent1"/>
-          </a:lnRef>
-          <a:fillRef idx="3">
-            <a:schemeClr val="accent1"/>
-          </a:fillRef>
-          <a:effectRef idx="2">
-            <a:schemeClr val="accent1"/>
-          </a:effectRef>
-          <a:fontRef idx="minor">
-            <a:schemeClr val="lt1"/>
-          </a:fontRef>
-        </p:style>
-        <p:txBody>
-          <a:bodyPr rtlCol="0" anchor="ctr"/>
-          <a:lstStyle/>
-          <a:p>
-            <a:pPr algn="ctr"/>
-          </a:p>
-        </p:txBody>
-      </p:sp>
-      <p:sp>
-        <p:nvSpPr>
-          <p:cNvPr id="78" name="TextBox 77"/>
-          <p:cNvSpPr txBox="1"/>
-          <p:nvPr/>
-        </p:nvSpPr>
-        <p:spPr>
-          <a:xfrm>
-            <a:off x="468000" y="39312000"/>
-            <a:ext cx="14472000" cy="1440000"/>
-          </a:xfrm>
-          <a:prstGeom prst="rect">
-            <a:avLst/>
-          </a:prstGeom>
-          <a:noFill/>
-        </p:spPr>
-        <p:txBody>
-          <a:bodyPr wrap="square" anchor="ctr" lIns="72000" rIns="72000" tIns="36000" bIns="36000">
-            <a:spAutoFit/>
-          </a:bodyPr>
-          <a:lstStyle/>
-          <a:p>
-            <a:pPr algn="ctr">
-              <a:spcBef>
-                <a:spcPts val="0"/>
-              </a:spcBef>
-              <a:spcAft>
-                <a:spcPts val="200"/>
-              </a:spcAft>
-            </a:pPr>
-            <a:r>
-              <a:rPr sz="1100" b="1">
-                <a:solidFill>
-                  <a:srgbClr val="B0BCC7"/>
-                </a:solidFill>
-                <a:latin typeface="Meiryo"/>
-                <a:ea typeface="Meiryo"/>
-              </a:rPr>
-              <a:t>【図を差し込み】</a:t>
-            </a:r>
-          </a:p>
-          <a:p>
-            <a:pPr algn="ctr">
-              <a:spcBef>
-                <a:spcPts val="0"/>
-              </a:spcBef>
-              <a:spcAft>
-                <a:spcPts val="200"/>
-              </a:spcAft>
-            </a:pPr>
-            <a:r>
-              <a:rPr sz="1100" b="0">
-                <a:solidFill>
-                  <a:srgbClr val="6B7884"/>
-                </a:solidFill>
-                <a:latin typeface="Meiryo"/>
-                <a:ea typeface="Meiryo"/>
-              </a:rPr>
               <a:t>図: in vitro 注入の連続写真</a:t>
             </a:r>
           </a:p>
@@ -7426,7 +6144,7 @@
       </p:sp>
       <p:sp>
         <p:nvSpPr>
-          <p:cNvPr id="79" name="Rounded Rectangle 78"/>
+          <p:cNvPr id="55" name="Rounded Rectangle 54"/>
           <p:cNvSpPr/>
           <p:nvPr/>
         </p:nvSpPr>
@@ -7474,7 +6192,7 @@
       </p:sp>
       <p:sp>
         <p:nvSpPr>
-          <p:cNvPr id="80" name="Rectangle 79"/>
+          <p:cNvPr id="56" name="Rectangle 55"/>
           <p:cNvSpPr/>
           <p:nvPr/>
         </p:nvSpPr>
@@ -7518,7 +6236,7 @@
       </p:sp>
       <p:sp>
         <p:nvSpPr>
-          <p:cNvPr id="81" name="TextBox 80"/>
+          <p:cNvPr id="57" name="TextBox 56"/>
           <p:cNvSpPr txBox="1"/>
           <p:nvPr/>
         </p:nvSpPr>
@@ -7561,7 +6279,7 @@
       </p:sp>
       <p:sp>
         <p:nvSpPr>
-          <p:cNvPr id="82" name="TextBox 81"/>
+          <p:cNvPr id="58" name="TextBox 57"/>
           <p:cNvSpPr txBox="1"/>
           <p:nvPr/>
         </p:nvSpPr>
@@ -7664,7 +6382,7 @@
       </p:sp>
       <p:sp>
         <p:nvSpPr>
-          <p:cNvPr id="83" name="Rectangle 82"/>
+          <p:cNvPr id="59" name="Rectangle 58"/>
           <p:cNvSpPr/>
           <p:nvPr/>
         </p:nvSpPr>
@@ -7710,7 +6428,7 @@
       </p:sp>
       <p:sp>
         <p:nvSpPr>
-          <p:cNvPr id="84" name="TextBox 83"/>
+          <p:cNvPr id="60" name="TextBox 59"/>
           <p:cNvSpPr txBox="1"/>
           <p:nvPr/>
         </p:nvSpPr>
@@ -7773,7 +6491,7 @@
       </p:sp>
       <p:sp>
         <p:nvSpPr>
-          <p:cNvPr id="85" name="Rounded Rectangle 84"/>
+          <p:cNvPr id="61" name="Rounded Rectangle 60"/>
           <p:cNvSpPr/>
           <p:nvPr/>
         </p:nvSpPr>
@@ -7821,7 +6539,7 @@
       </p:sp>
       <p:sp>
         <p:nvSpPr>
-          <p:cNvPr id="86" name="TextBox 85"/>
+          <p:cNvPr id="62" name="TextBox 61"/>
           <p:cNvSpPr txBox="1"/>
           <p:nvPr/>
         </p:nvSpPr>
@@ -7864,7 +6582,7 @@
       </p:sp>
       <p:sp>
         <p:nvSpPr>
-          <p:cNvPr id="87" name="TextBox 86"/>
+          <p:cNvPr id="63" name="TextBox 62"/>
           <p:cNvSpPr txBox="1"/>
           <p:nvPr/>
         </p:nvSpPr>

--- a/poster/poster_A0.pptx
+++ b/poster/poster_A0.pptx
@@ -4689,7 +4689,7 @@
                 <a:latin typeface="Meiryo"/>
                 <a:ea typeface="Meiryo"/>
               </a:rPr>
-              <a:t>① 合成・架橋｜PGD G4合成と架橋点の同定〔新〕</a:t>
+              <a:t>① 合成｜PGD G4 の精密合成〔新〕</a:t>
             </a:r>
           </a:p>
         </p:txBody>
@@ -4703,7 +4703,7 @@
         <p:spPr>
           <a:xfrm>
             <a:off x="342000" y="9648000"/>
-            <a:ext cx="9672000" cy="1368000"/>
+            <a:ext cx="9672000" cy="1872000"/>
           </a:xfrm>
           <a:prstGeom prst="rect">
             <a:avLst/>
@@ -4732,7 +4732,7 @@
                 <a:latin typeface="Meiryo"/>
                 <a:ea typeface="Meiryo"/>
               </a:rPr>
-              <a:t>・Divergent法で単分散PGD G4を合成</a:t>
+              <a:t>・Divergent法(全8段階)で単分散PGD G4を合成</a:t>
             </a:r>
           </a:p>
           <a:p>
@@ -4752,7 +4752,7 @@
                 <a:latin typeface="Meiryo"/>
                 <a:ea typeface="Meiryo"/>
               </a:rPr>
-              <a:t>  (収率90%, MALDI単一ピーク [M+Na]⁺=3488)</a:t>
+              <a:t>・撹拌強化＋反応時間2倍で高世代を最適化</a:t>
             </a:r>
           </a:p>
           <a:p>
@@ -4772,7 +4772,7 @@
                 <a:latin typeface="Meiryo"/>
                 <a:ea typeface="Meiryo"/>
               </a:rPr>
-              <a:t>・GCアミノ基をアセチル化 → DA↑でゲル化遅延</a:t>
+              <a:t>・G3.5→G4 収率90%, 13.0 g を取得</a:t>
             </a:r>
           </a:p>
           <a:p>
@@ -4792,7 +4792,7 @@
                 <a:latin typeface="Meiryo"/>
                 <a:ea typeface="Meiryo"/>
               </a:rPr>
-              <a:t>  (DA 16.7%:1.5h → 90%:80h)</a:t>
+              <a:t>・MALDI 単一ピーク [M+Na]⁺=3488</a:t>
             </a:r>
           </a:p>
           <a:p>
@@ -4812,7 +4812,7 @@
                 <a:latin typeface="Meiryo"/>
                 <a:ea typeface="Meiryo"/>
               </a:rPr>
-              <a:t>→ アミノ基が主架橋点と化学的に証明</a:t>
+              <a:t>  → 単分散の高品質体を確認</a:t>
             </a:r>
           </a:p>
         </p:txBody>
@@ -4825,8 +4825,8 @@
         </p:nvSpPr>
         <p:spPr>
           <a:xfrm>
-            <a:off x="396000" y="11052000"/>
-            <a:ext cx="9564000" cy="25740000"/>
+            <a:off x="396000" y="11556000"/>
+            <a:ext cx="9564000" cy="25236000"/>
           </a:xfrm>
           <a:prstGeom prst="rect">
             <a:avLst/>
@@ -4871,8 +4871,8 @@
         </p:nvSpPr>
         <p:spPr>
           <a:xfrm>
-            <a:off x="396000" y="11052000"/>
-            <a:ext cx="9564000" cy="25740000"/>
+            <a:off x="396000" y="11556000"/>
+            <a:ext cx="9564000" cy="25236000"/>
           </a:xfrm>
           <a:prstGeom prst="rect">
             <a:avLst/>
@@ -4921,7 +4921,7 @@
                 <a:latin typeface="Meiryo"/>
                 <a:ea typeface="Meiryo"/>
               </a:rPr>
-              <a:t>図: MALDI(最適化前後) / DA vs ゲル化時間</a:t>
+              <a:t>図: MALDI(最適化前後) / 収率表・NMR</a:t>
             </a:r>
           </a:p>
         </p:txBody>
@@ -5056,7 +5056,7 @@
                 <a:latin typeface="Meiryo"/>
                 <a:ea typeface="Meiryo"/>
               </a:rPr>
-              <a:t>② ゲル化・力学｜ゲル化挙動と自己修復性〔新〕</a:t>
+              <a:t>② ゲル化・架橋・力学｜ゲル化と自己修復性〔新〕</a:t>
             </a:r>
           </a:p>
         </p:txBody>
@@ -5070,7 +5070,7 @@
         <p:spPr>
           <a:xfrm>
             <a:off x="10302000" y="9648000"/>
-            <a:ext cx="9672000" cy="1368000"/>
+            <a:ext cx="9672000" cy="1872000"/>
           </a:xfrm>
           <a:prstGeom prst="rect">
             <a:avLst/>
@@ -5139,7 +5139,7 @@
                 <a:latin typeface="Meiryo"/>
                 <a:ea typeface="Meiryo"/>
               </a:rPr>
-              <a:t>・レオロジー: G′&gt;G″ の安定ネットワーク</a:t>
+              <a:t>・GCアセチル化: DA↑でゲル化遅延</a:t>
             </a:r>
           </a:p>
           <a:p>
@@ -5159,7 +5159,7 @@
                 <a:latin typeface="Meiryo"/>
                 <a:ea typeface="Meiryo"/>
               </a:rPr>
-              <a:t>・大歪500%でゾル化 → 低歪で即 G′回復</a:t>
+              <a:t>  (16.7%:1.5h→90%:80h) → アミノ基が主架橋点</a:t>
             </a:r>
           </a:p>
           <a:p>
@@ -5179,7 +5179,27 @@
                 <a:latin typeface="Meiryo"/>
                 <a:ea typeface="Meiryo"/>
               </a:rPr>
-              <a:t>→ シアシニング &amp; 自己修復を実証</a:t>
+              <a:t>・レオロジー: 大歪500%でゾル化→低歪で即回復</a:t>
+            </a:r>
+          </a:p>
+          <a:p>
+            <a:pPr algn="l">
+              <a:spcBef>
+                <a:spcPts val="0"/>
+              </a:spcBef>
+              <a:spcAft>
+                <a:spcPts val="200"/>
+              </a:spcAft>
+            </a:pPr>
+            <a:r>
+              <a:rPr sz="1200" b="0">
+                <a:solidFill>
+                  <a:srgbClr val="222222"/>
+                </a:solidFill>
+                <a:latin typeface="Meiryo"/>
+                <a:ea typeface="Meiryo"/>
+              </a:rPr>
+              <a:t>  → シアシニング &amp; 自己修復を実証</a:t>
             </a:r>
           </a:p>
         </p:txBody>
@@ -5192,8 +5212,8 @@
         </p:nvSpPr>
         <p:spPr>
           <a:xfrm>
-            <a:off x="10356000" y="11052000"/>
-            <a:ext cx="9564000" cy="25740000"/>
+            <a:off x="10356000" y="11556000"/>
+            <a:ext cx="9564000" cy="25236000"/>
           </a:xfrm>
           <a:prstGeom prst="rect">
             <a:avLst/>
@@ -5238,8 +5258,8 @@
         </p:nvSpPr>
         <p:spPr>
           <a:xfrm>
-            <a:off x="10356000" y="11052000"/>
-            <a:ext cx="9564000" cy="25740000"/>
+            <a:off x="10356000" y="11556000"/>
+            <a:ext cx="9564000" cy="25236000"/>
           </a:xfrm>
           <a:prstGeom prst="rect">
             <a:avLst/>
@@ -5288,7 +5308,7 @@
                 <a:latin typeface="Meiryo"/>
                 <a:ea typeface="Meiryo"/>
               </a:rPr>
-              <a:t>図: ゲル化時間 / Time sweep・ステップ歪み</a:t>
+              <a:t>図: ゲル化時間 / DA vs ゲル化 / レオロジー</a:t>
             </a:r>
           </a:p>
         </p:txBody>
@@ -5437,7 +5457,7 @@
         <p:spPr>
           <a:xfrm>
             <a:off x="20262000" y="9648000"/>
-            <a:ext cx="9672000" cy="1368000"/>
+            <a:ext cx="9672000" cy="1872000"/>
           </a:xfrm>
           <a:prstGeom prst="rect">
             <a:avLst/>
@@ -5559,8 +5579,8 @@
         </p:nvSpPr>
         <p:spPr>
           <a:xfrm>
-            <a:off x="20316000" y="11052000"/>
-            <a:ext cx="9564000" cy="25740000"/>
+            <a:off x="20316000" y="11556000"/>
+            <a:ext cx="9564000" cy="25236000"/>
           </a:xfrm>
           <a:prstGeom prst="rect">
             <a:avLst/>
@@ -5605,8 +5625,8 @@
         </p:nvSpPr>
         <p:spPr>
           <a:xfrm>
-            <a:off x="20316000" y="11052000"/>
-            <a:ext cx="9564000" cy="25740000"/>
+            <a:off x="20316000" y="11556000"/>
+            <a:ext cx="9564000" cy="25236000"/>
           </a:xfrm>
           <a:prstGeom prst="rect">
             <a:avLst/>

--- a/poster/poster_A0.pptx
+++ b/poster/poster_A0.pptx
@@ -4568,7 +4568,7 @@
         <p:spPr>
           <a:xfrm>
             <a:off x="288000" y="9288000"/>
-            <a:ext cx="9780000" cy="27612000"/>
+            <a:ext cx="9780000" cy="13716000"/>
           </a:xfrm>
           <a:prstGeom prst="roundRect">
             <a:avLst>
@@ -4689,7 +4689,7 @@
                 <a:latin typeface="Meiryo"/>
                 <a:ea typeface="Meiryo"/>
               </a:rPr>
-              <a:t>① 合成｜PGD G4 の精密合成〔新〕</a:t>
+              <a:t>① PGD G4 の精密合成〔新〕</a:t>
             </a:r>
           </a:p>
         </p:txBody>
@@ -4703,7 +4703,7 @@
         <p:spPr>
           <a:xfrm>
             <a:off x="342000" y="9648000"/>
-            <a:ext cx="9672000" cy="1872000"/>
+            <a:ext cx="9672000" cy="1080000"/>
           </a:xfrm>
           <a:prstGeom prst="rect">
             <a:avLst/>
@@ -4772,47 +4772,7 @@
                 <a:latin typeface="Meiryo"/>
                 <a:ea typeface="Meiryo"/>
               </a:rPr>
-              <a:t>・G3.5→G4 収率90%, 13.0 g を取得</a:t>
-            </a:r>
-          </a:p>
-          <a:p>
-            <a:pPr algn="l">
-              <a:spcBef>
-                <a:spcPts val="0"/>
-              </a:spcBef>
-              <a:spcAft>
-                <a:spcPts val="200"/>
-              </a:spcAft>
-            </a:pPr>
-            <a:r>
-              <a:rPr sz="1200" b="0">
-                <a:solidFill>
-                  <a:srgbClr val="222222"/>
-                </a:solidFill>
-                <a:latin typeface="Meiryo"/>
-                <a:ea typeface="Meiryo"/>
-              </a:rPr>
-              <a:t>・MALDI 単一ピーク [M+Na]⁺=3488</a:t>
-            </a:r>
-          </a:p>
-          <a:p>
-            <a:pPr algn="l">
-              <a:spcBef>
-                <a:spcPts val="0"/>
-              </a:spcBef>
-              <a:spcAft>
-                <a:spcPts val="200"/>
-              </a:spcAft>
-            </a:pPr>
-            <a:r>
-              <a:rPr sz="1200" b="0">
-                <a:solidFill>
-                  <a:srgbClr val="222222"/>
-                </a:solidFill>
-                <a:latin typeface="Meiryo"/>
-                <a:ea typeface="Meiryo"/>
-              </a:rPr>
-              <a:t>  → 単分散の高品質体を確認</a:t>
+              <a:t>・収率90%, MALDI単一ピーク [M+Na]⁺=3488</a:t>
             </a:r>
           </a:p>
         </p:txBody>
@@ -4825,8 +4785,8 @@
         </p:nvSpPr>
         <p:spPr>
           <a:xfrm>
-            <a:off x="396000" y="11556000"/>
-            <a:ext cx="9564000" cy="25236000"/>
+            <a:off x="396000" y="10764000"/>
+            <a:ext cx="9564000" cy="12132000"/>
           </a:xfrm>
           <a:prstGeom prst="rect">
             <a:avLst/>
@@ -4871,8 +4831,8 @@
         </p:nvSpPr>
         <p:spPr>
           <a:xfrm>
-            <a:off x="396000" y="11556000"/>
-            <a:ext cx="9564000" cy="25236000"/>
+            <a:off x="396000" y="10764000"/>
+            <a:ext cx="9564000" cy="12132000"/>
           </a:xfrm>
           <a:prstGeom prst="rect">
             <a:avLst/>
@@ -4921,7 +4881,7 @@
                 <a:latin typeface="Meiryo"/>
                 <a:ea typeface="Meiryo"/>
               </a:rPr>
-              <a:t>図: MALDI(最適化前後) / 収率表・NMR</a:t>
+              <a:t>図: MALDI(最適化前後) / 収率表</a:t>
             </a:r>
           </a:p>
         </p:txBody>
@@ -4934,8 +4894,8 @@
         </p:nvSpPr>
         <p:spPr>
           <a:xfrm>
-            <a:off x="10248000" y="9288000"/>
-            <a:ext cx="9780000" cy="27612000"/>
+            <a:off x="288000" y="23184000"/>
+            <a:ext cx="9780000" cy="13716000"/>
           </a:xfrm>
           <a:prstGeom prst="roundRect">
             <a:avLst>
@@ -4982,7 +4942,7 @@
         </p:nvSpPr>
         <p:spPr>
           <a:xfrm>
-            <a:off x="10248000" y="9288000"/>
+            <a:off x="288000" y="23184000"/>
             <a:ext cx="9780000" cy="324000"/>
           </a:xfrm>
           <a:prstGeom prst="rect">
@@ -5026,7 +4986,7 @@
         </p:nvSpPr>
         <p:spPr>
           <a:xfrm>
-            <a:off x="10284000" y="9288000"/>
+            <a:off x="324000" y="23184000"/>
             <a:ext cx="9708000" cy="324000"/>
           </a:xfrm>
           <a:prstGeom prst="rect">
@@ -5056,7 +5016,7 @@
                 <a:latin typeface="Meiryo"/>
                 <a:ea typeface="Meiryo"/>
               </a:rPr>
-              <a:t>② ゲル化・架橋・力学｜ゲル化と自己修復性〔新〕</a:t>
+              <a:t>レオロジー｜自己修復性 (In vitro・目玉)</a:t>
             </a:r>
           </a:p>
         </p:txBody>
@@ -5069,8 +5029,8 @@
         </p:nvSpPr>
         <p:spPr>
           <a:xfrm>
-            <a:off x="10302000" y="9648000"/>
-            <a:ext cx="9672000" cy="1872000"/>
+            <a:off x="342000" y="23544000"/>
+            <a:ext cx="9672000" cy="1080000"/>
           </a:xfrm>
           <a:prstGeom prst="rect">
             <a:avLst/>
@@ -5099,7 +5059,7 @@
                 <a:latin typeface="Meiryo"/>
                 <a:ea typeface="Meiryo"/>
               </a:rPr>
-              <a:t>・世代↑・PGD比↑でゲル化時間を短縮</a:t>
+              <a:t>・G′&gt;G″ 安定なゲルネットワーク</a:t>
             </a:r>
           </a:p>
           <a:p>
@@ -5119,7 +5079,7 @@
                 <a:latin typeface="Meiryo"/>
                 <a:ea typeface="Meiryo"/>
               </a:rPr>
-              <a:t>  (PG4-025: 2分 / PG3-1: 67分)</a:t>
+              <a:t>・大歪500%でゾル化 → 低歪で即 G′回復</a:t>
             </a:r>
           </a:p>
           <a:p>
@@ -5139,67 +5099,7 @@
                 <a:latin typeface="Meiryo"/>
                 <a:ea typeface="Meiryo"/>
               </a:rPr>
-              <a:t>・GCアセチル化: DA↑でゲル化遅延</a:t>
-            </a:r>
-          </a:p>
-          <a:p>
-            <a:pPr algn="l">
-              <a:spcBef>
-                <a:spcPts val="0"/>
-              </a:spcBef>
-              <a:spcAft>
-                <a:spcPts val="200"/>
-              </a:spcAft>
-            </a:pPr>
-            <a:r>
-              <a:rPr sz="1200" b="0">
-                <a:solidFill>
-                  <a:srgbClr val="222222"/>
-                </a:solidFill>
-                <a:latin typeface="Meiryo"/>
-                <a:ea typeface="Meiryo"/>
-              </a:rPr>
-              <a:t>  (16.7%:1.5h→90%:80h) → アミノ基が主架橋点</a:t>
-            </a:r>
-          </a:p>
-          <a:p>
-            <a:pPr algn="l">
-              <a:spcBef>
-                <a:spcPts val="0"/>
-              </a:spcBef>
-              <a:spcAft>
-                <a:spcPts val="200"/>
-              </a:spcAft>
-            </a:pPr>
-            <a:r>
-              <a:rPr sz="1200" b="0">
-                <a:solidFill>
-                  <a:srgbClr val="222222"/>
-                </a:solidFill>
-                <a:latin typeface="Meiryo"/>
-                <a:ea typeface="Meiryo"/>
-              </a:rPr>
-              <a:t>・レオロジー: 大歪500%でゾル化→低歪で即回復</a:t>
-            </a:r>
-          </a:p>
-          <a:p>
-            <a:pPr algn="l">
-              <a:spcBef>
-                <a:spcPts val="0"/>
-              </a:spcBef>
-              <a:spcAft>
-                <a:spcPts val="200"/>
-              </a:spcAft>
-            </a:pPr>
-            <a:r>
-              <a:rPr sz="1200" b="0">
-                <a:solidFill>
-                  <a:srgbClr val="222222"/>
-                </a:solidFill>
-                <a:latin typeface="Meiryo"/>
-                <a:ea typeface="Meiryo"/>
-              </a:rPr>
-              <a:t>  → シアシニング &amp; 自己修復を実証</a:t>
+              <a:t>・複数サイクルで再現 → 自己修復を実証</a:t>
             </a:r>
           </a:p>
         </p:txBody>
@@ -5212,8 +5112,8 @@
         </p:nvSpPr>
         <p:spPr>
           <a:xfrm>
-            <a:off x="10356000" y="11556000"/>
-            <a:ext cx="9564000" cy="25236000"/>
+            <a:off x="396000" y="24660000"/>
+            <a:ext cx="9564000" cy="12132000"/>
           </a:xfrm>
           <a:prstGeom prst="rect">
             <a:avLst/>
@@ -5258,8 +5158,8 @@
         </p:nvSpPr>
         <p:spPr>
           <a:xfrm>
-            <a:off x="10356000" y="11556000"/>
-            <a:ext cx="9564000" cy="25236000"/>
+            <a:off x="396000" y="24660000"/>
+            <a:ext cx="9564000" cy="12132000"/>
           </a:xfrm>
           <a:prstGeom prst="rect">
             <a:avLst/>
@@ -5308,7 +5208,7 @@
                 <a:latin typeface="Meiryo"/>
                 <a:ea typeface="Meiryo"/>
               </a:rPr>
-              <a:t>図: ゲル化時間 / DA vs ゲル化 / レオロジー</a:t>
+              <a:t>図: Time sweep / ステップ歪み</a:t>
             </a:r>
           </a:p>
         </p:txBody>
@@ -5321,8 +5221,8 @@
         </p:nvSpPr>
         <p:spPr>
           <a:xfrm>
-            <a:off x="20208000" y="9288000"/>
-            <a:ext cx="9780000" cy="27612000"/>
+            <a:off x="10248000" y="9288000"/>
+            <a:ext cx="9780000" cy="13716000"/>
           </a:xfrm>
           <a:prstGeom prst="roundRect">
             <a:avLst>
@@ -5369,7 +5269,7 @@
         </p:nvSpPr>
         <p:spPr>
           <a:xfrm>
-            <a:off x="20208000" y="9288000"/>
+            <a:off x="10248000" y="9288000"/>
             <a:ext cx="9780000" cy="324000"/>
           </a:xfrm>
           <a:prstGeom prst="rect">
@@ -5413,7 +5313,7 @@
         </p:nvSpPr>
         <p:spPr>
           <a:xfrm>
-            <a:off x="20244000" y="9288000"/>
+            <a:off x="10284000" y="9288000"/>
             <a:ext cx="9708000" cy="324000"/>
           </a:xfrm>
           <a:prstGeom prst="rect">
@@ -5443,7 +5343,7 @@
                 <a:latin typeface="Meiryo"/>
                 <a:ea typeface="Meiryo"/>
               </a:rPr>
-              <a:t>③ 生体適合性｜分解性と細胞適合性 (In vitro)〔新〕</a:t>
+              <a:t>② ゲル化時間の制御 (In vitro)</a:t>
             </a:r>
           </a:p>
         </p:txBody>
@@ -5456,8 +5356,8 @@
         </p:nvSpPr>
         <p:spPr>
           <a:xfrm>
-            <a:off x="20262000" y="9648000"/>
-            <a:ext cx="9672000" cy="1872000"/>
+            <a:off x="10302000" y="9648000"/>
+            <a:ext cx="9672000" cy="1080000"/>
           </a:xfrm>
           <a:prstGeom prst="rect">
             <a:avLst/>
@@ -5486,7 +5386,7 @@
                 <a:latin typeface="Meiryo"/>
                 <a:ea typeface="Meiryo"/>
               </a:rPr>
-              <a:t>・37℃ PBS中で分解、滞留期間を制御</a:t>
+              <a:t>・世代↑・PGD比↑でゲル化時間を短縮</a:t>
             </a:r>
           </a:p>
           <a:p>
@@ -5506,7 +5406,7 @@
                 <a:latin typeface="Meiryo"/>
                 <a:ea typeface="Meiryo"/>
               </a:rPr>
-              <a:t>  (PG3-1:3日 / PG4-025:25日)</a:t>
+              <a:t>・PG4-025: 2分 / PG3-1: 67分</a:t>
             </a:r>
           </a:p>
           <a:p>
@@ -5526,47 +5426,7 @@
                 <a:latin typeface="Meiryo"/>
                 <a:ea typeface="Meiryo"/>
               </a:rPr>
-              <a:t>・D1細胞包埋 Live/Dead: 1/5/9日とも</a:t>
-            </a:r>
-          </a:p>
-          <a:p>
-            <a:pPr algn="l">
-              <a:spcBef>
-                <a:spcPts val="0"/>
-              </a:spcBef>
-              <a:spcAft>
-                <a:spcPts val="200"/>
-              </a:spcAft>
-            </a:pPr>
-            <a:r>
-              <a:rPr sz="1200" b="0">
-                <a:solidFill>
-                  <a:srgbClr val="222222"/>
-                </a:solidFill>
-                <a:latin typeface="Meiryo"/>
-                <a:ea typeface="Meiryo"/>
-              </a:rPr>
-              <a:t>  死細胞ほぼ無し(溶解後も毒性なし)</a:t>
-            </a:r>
-          </a:p>
-          <a:p>
-            <a:pPr algn="l">
-              <a:spcBef>
-                <a:spcPts val="0"/>
-              </a:spcBef>
-              <a:spcAft>
-                <a:spcPts val="200"/>
-              </a:spcAft>
-            </a:pPr>
-            <a:r>
-              <a:rPr sz="1200" b="0">
-                <a:solidFill>
-                  <a:srgbClr val="222222"/>
-                </a:solidFill>
-                <a:latin typeface="Meiryo"/>
-                <a:ea typeface="Meiryo"/>
-              </a:rPr>
-              <a:t>→ 化学架橋剤なしで高い生体適合性</a:t>
+              <a:t>・架橋点密度に依存</a:t>
             </a:r>
           </a:p>
         </p:txBody>
@@ -5579,8 +5439,8 @@
         </p:nvSpPr>
         <p:spPr>
           <a:xfrm>
-            <a:off x="20316000" y="11556000"/>
-            <a:ext cx="9564000" cy="25236000"/>
+            <a:off x="10356000" y="10764000"/>
+            <a:ext cx="9564000" cy="12132000"/>
           </a:xfrm>
           <a:prstGeom prst="rect">
             <a:avLst/>
@@ -5625,8 +5485,8 @@
         </p:nvSpPr>
         <p:spPr>
           <a:xfrm>
-            <a:off x="20316000" y="11556000"/>
-            <a:ext cx="9564000" cy="25236000"/>
+            <a:off x="10356000" y="10764000"/>
+            <a:ext cx="9564000" cy="12132000"/>
           </a:xfrm>
           <a:prstGeom prst="rect">
             <a:avLst/>
@@ -5675,7 +5535,7 @@
                 <a:latin typeface="Meiryo"/>
                 <a:ea typeface="Meiryo"/>
               </a:rPr>
-              <a:t>図: 分解曲線 / Live-Dead 蛍光像</a:t>
+              <a:t>図: ゲル化時間 vs アミノ基比</a:t>
             </a:r>
           </a:p>
         </p:txBody>
@@ -5683,6 +5543,987 @@
       <p:sp>
         <p:nvSpPr>
           <p:cNvPr id="46" name="Rounded Rectangle 45"/>
+          <p:cNvSpPr/>
+          <p:nvPr/>
+        </p:nvSpPr>
+        <p:spPr>
+          <a:xfrm>
+            <a:off x="10248000" y="23184000"/>
+            <a:ext cx="9780000" cy="13716000"/>
+          </a:xfrm>
+          <a:prstGeom prst="roundRect">
+            <a:avLst>
+              <a:gd name="adj" fmla="val 4000"/>
+            </a:avLst>
+          </a:prstGeom>
+          <a:solidFill>
+            <a:srgbClr val="DBEAFE"/>
+          </a:solidFill>
+          <a:ln w="12700">
+            <a:solidFill>
+              <a:srgbClr val="90A4B5"/>
+            </a:solidFill>
+          </a:ln>
+          <a:effectLst/>
+        </p:spPr>
+        <p:style>
+          <a:lnRef idx="1">
+            <a:schemeClr val="accent1"/>
+          </a:lnRef>
+          <a:fillRef idx="3">
+            <a:schemeClr val="accent1"/>
+          </a:fillRef>
+          <a:effectRef idx="2">
+            <a:schemeClr val="accent1"/>
+          </a:effectRef>
+          <a:fontRef idx="minor">
+            <a:schemeClr val="lt1"/>
+          </a:fontRef>
+        </p:style>
+        <p:txBody>
+          <a:bodyPr rtlCol="0" anchor="ctr"/>
+          <a:lstStyle/>
+          <a:p>
+            <a:pPr algn="ctr"/>
+          </a:p>
+        </p:txBody>
+      </p:sp>
+      <p:sp>
+        <p:nvSpPr>
+          <p:cNvPr id="47" name="Rectangle 46"/>
+          <p:cNvSpPr/>
+          <p:nvPr/>
+        </p:nvSpPr>
+        <p:spPr>
+          <a:xfrm>
+            <a:off x="10248000" y="23184000"/>
+            <a:ext cx="9780000" cy="324000"/>
+          </a:xfrm>
+          <a:prstGeom prst="rect">
+            <a:avLst/>
+          </a:prstGeom>
+          <a:solidFill>
+            <a:srgbClr val="2563EB"/>
+          </a:solidFill>
+          <a:ln>
+            <a:noFill/>
+          </a:ln>
+          <a:effectLst/>
+        </p:spPr>
+        <p:style>
+          <a:lnRef idx="1">
+            <a:schemeClr val="accent1"/>
+          </a:lnRef>
+          <a:fillRef idx="3">
+            <a:schemeClr val="accent1"/>
+          </a:fillRef>
+          <a:effectRef idx="2">
+            <a:schemeClr val="accent1"/>
+          </a:effectRef>
+          <a:fontRef idx="minor">
+            <a:schemeClr val="lt1"/>
+          </a:fontRef>
+        </p:style>
+        <p:txBody>
+          <a:bodyPr rtlCol="0" anchor="ctr"/>
+          <a:lstStyle/>
+          <a:p>
+            <a:pPr algn="ctr"/>
+          </a:p>
+        </p:txBody>
+      </p:sp>
+      <p:sp>
+        <p:nvSpPr>
+          <p:cNvPr id="48" name="TextBox 47"/>
+          <p:cNvSpPr txBox="1"/>
+          <p:nvPr/>
+        </p:nvSpPr>
+        <p:spPr>
+          <a:xfrm>
+            <a:off x="10284000" y="23184000"/>
+            <a:ext cx="9708000" cy="324000"/>
+          </a:xfrm>
+          <a:prstGeom prst="rect">
+            <a:avLst/>
+          </a:prstGeom>
+          <a:noFill/>
+        </p:spPr>
+        <p:txBody>
+          <a:bodyPr wrap="square" anchor="ctr" lIns="72000" rIns="72000" tIns="36000" bIns="36000">
+            <a:spAutoFit/>
+          </a:bodyPr>
+          <a:lstStyle/>
+          <a:p>
+            <a:pPr algn="l">
+              <a:spcBef>
+                <a:spcPts val="0"/>
+              </a:spcBef>
+              <a:spcAft>
+                <a:spcPts val="200"/>
+              </a:spcAft>
+            </a:pPr>
+            <a:r>
+              <a:rPr sz="1400" b="1">
+                <a:solidFill>
+                  <a:srgbClr val="FFFFFF"/>
+                </a:solidFill>
+                <a:latin typeface="Meiryo"/>
+                <a:ea typeface="Meiryo"/>
+              </a:rPr>
+              <a:t>架橋点の同定｜GCアセチル化〔新〕</a:t>
+            </a:r>
+          </a:p>
+        </p:txBody>
+      </p:sp>
+      <p:sp>
+        <p:nvSpPr>
+          <p:cNvPr id="49" name="TextBox 48"/>
+          <p:cNvSpPr txBox="1"/>
+          <p:nvPr/>
+        </p:nvSpPr>
+        <p:spPr>
+          <a:xfrm>
+            <a:off x="10302000" y="23544000"/>
+            <a:ext cx="9672000" cy="1080000"/>
+          </a:xfrm>
+          <a:prstGeom prst="rect">
+            <a:avLst/>
+          </a:prstGeom>
+          <a:noFill/>
+        </p:spPr>
+        <p:txBody>
+          <a:bodyPr wrap="square" anchor="t" lIns="72000" rIns="72000" tIns="36000" bIns="36000">
+            <a:spAutoFit/>
+          </a:bodyPr>
+          <a:lstStyle/>
+          <a:p>
+            <a:pPr algn="l">
+              <a:spcBef>
+                <a:spcPts val="0"/>
+              </a:spcBef>
+              <a:spcAft>
+                <a:spcPts val="200"/>
+              </a:spcAft>
+            </a:pPr>
+            <a:r>
+              <a:rPr sz="1200" b="0">
+                <a:solidFill>
+                  <a:srgbClr val="222222"/>
+                </a:solidFill>
+                <a:latin typeface="Meiryo"/>
+                <a:ea typeface="Meiryo"/>
+              </a:rPr>
+              <a:t>・GCアミノ基を部分N-アセチル化</a:t>
+            </a:r>
+          </a:p>
+          <a:p>
+            <a:pPr algn="l">
+              <a:spcBef>
+                <a:spcPts val="0"/>
+              </a:spcBef>
+              <a:spcAft>
+                <a:spcPts val="200"/>
+              </a:spcAft>
+            </a:pPr>
+            <a:r>
+              <a:rPr sz="1200" b="0">
+                <a:solidFill>
+                  <a:srgbClr val="222222"/>
+                </a:solidFill>
+                <a:latin typeface="Meiryo"/>
+                <a:ea typeface="Meiryo"/>
+              </a:rPr>
+              <a:t>・DA↑でゲル化遅延 (16.7%:1.5h→90%:80h)</a:t>
+            </a:r>
+          </a:p>
+          <a:p>
+            <a:pPr algn="l">
+              <a:spcBef>
+                <a:spcPts val="0"/>
+              </a:spcBef>
+              <a:spcAft>
+                <a:spcPts val="200"/>
+              </a:spcAft>
+            </a:pPr>
+            <a:r>
+              <a:rPr sz="1200" b="0">
+                <a:solidFill>
+                  <a:srgbClr val="222222"/>
+                </a:solidFill>
+                <a:latin typeface="Meiryo"/>
+                <a:ea typeface="Meiryo"/>
+              </a:rPr>
+              <a:t>・→ アミノ基が主架橋点と化学的に証明</a:t>
+            </a:r>
+          </a:p>
+        </p:txBody>
+      </p:sp>
+      <p:sp>
+        <p:nvSpPr>
+          <p:cNvPr id="50" name="Rectangle 49"/>
+          <p:cNvSpPr/>
+          <p:nvPr/>
+        </p:nvSpPr>
+        <p:spPr>
+          <a:xfrm>
+            <a:off x="10356000" y="24660000"/>
+            <a:ext cx="9564000" cy="12132000"/>
+          </a:xfrm>
+          <a:prstGeom prst="rect">
+            <a:avLst/>
+          </a:prstGeom>
+          <a:solidFill>
+            <a:srgbClr val="F0F3F6"/>
+          </a:solidFill>
+          <a:ln w="12700">
+            <a:solidFill>
+              <a:srgbClr val="B0BCC7"/>
+            </a:solidFill>
+          </a:ln>
+          <a:effectLst/>
+        </p:spPr>
+        <p:style>
+          <a:lnRef idx="1">
+            <a:schemeClr val="accent1"/>
+          </a:lnRef>
+          <a:fillRef idx="3">
+            <a:schemeClr val="accent1"/>
+          </a:fillRef>
+          <a:effectRef idx="2">
+            <a:schemeClr val="accent1"/>
+          </a:effectRef>
+          <a:fontRef idx="minor">
+            <a:schemeClr val="lt1"/>
+          </a:fontRef>
+        </p:style>
+        <p:txBody>
+          <a:bodyPr rtlCol="0" anchor="ctr"/>
+          <a:lstStyle/>
+          <a:p>
+            <a:pPr algn="ctr"/>
+          </a:p>
+        </p:txBody>
+      </p:sp>
+      <p:sp>
+        <p:nvSpPr>
+          <p:cNvPr id="51" name="TextBox 50"/>
+          <p:cNvSpPr txBox="1"/>
+          <p:nvPr/>
+        </p:nvSpPr>
+        <p:spPr>
+          <a:xfrm>
+            <a:off x="10356000" y="24660000"/>
+            <a:ext cx="9564000" cy="12132000"/>
+          </a:xfrm>
+          <a:prstGeom prst="rect">
+            <a:avLst/>
+          </a:prstGeom>
+          <a:noFill/>
+        </p:spPr>
+        <p:txBody>
+          <a:bodyPr wrap="square" anchor="ctr" lIns="72000" rIns="72000" tIns="36000" bIns="36000">
+            <a:spAutoFit/>
+          </a:bodyPr>
+          <a:lstStyle/>
+          <a:p>
+            <a:pPr algn="ctr">
+              <a:spcBef>
+                <a:spcPts val="0"/>
+              </a:spcBef>
+              <a:spcAft>
+                <a:spcPts val="200"/>
+              </a:spcAft>
+            </a:pPr>
+            <a:r>
+              <a:rPr sz="1100" b="1">
+                <a:solidFill>
+                  <a:srgbClr val="B0BCC7"/>
+                </a:solidFill>
+                <a:latin typeface="Meiryo"/>
+                <a:ea typeface="Meiryo"/>
+              </a:rPr>
+              <a:t>【図を差し込み】</a:t>
+            </a:r>
+          </a:p>
+          <a:p>
+            <a:pPr algn="ctr">
+              <a:spcBef>
+                <a:spcPts val="0"/>
+              </a:spcBef>
+              <a:spcAft>
+                <a:spcPts val="200"/>
+              </a:spcAft>
+            </a:pPr>
+            <a:r>
+              <a:rPr sz="1100" b="0">
+                <a:solidFill>
+                  <a:srgbClr val="6B7884"/>
+                </a:solidFill>
+                <a:latin typeface="Meiryo"/>
+                <a:ea typeface="Meiryo"/>
+              </a:rPr>
+              <a:t>図: DA vs ゲル化時間 / NMR</a:t>
+            </a:r>
+          </a:p>
+        </p:txBody>
+      </p:sp>
+      <p:sp>
+        <p:nvSpPr>
+          <p:cNvPr id="52" name="Rounded Rectangle 51"/>
+          <p:cNvSpPr/>
+          <p:nvPr/>
+        </p:nvSpPr>
+        <p:spPr>
+          <a:xfrm>
+            <a:off x="20208000" y="9288000"/>
+            <a:ext cx="9780000" cy="13716000"/>
+          </a:xfrm>
+          <a:prstGeom prst="roundRect">
+            <a:avLst>
+              <a:gd name="adj" fmla="val 4000"/>
+            </a:avLst>
+          </a:prstGeom>
+          <a:solidFill>
+            <a:srgbClr val="DBEAFE"/>
+          </a:solidFill>
+          <a:ln w="12700">
+            <a:solidFill>
+              <a:srgbClr val="90A4B5"/>
+            </a:solidFill>
+          </a:ln>
+          <a:effectLst/>
+        </p:spPr>
+        <p:style>
+          <a:lnRef idx="1">
+            <a:schemeClr val="accent1"/>
+          </a:lnRef>
+          <a:fillRef idx="3">
+            <a:schemeClr val="accent1"/>
+          </a:fillRef>
+          <a:effectRef idx="2">
+            <a:schemeClr val="accent1"/>
+          </a:effectRef>
+          <a:fontRef idx="minor">
+            <a:schemeClr val="lt1"/>
+          </a:fontRef>
+        </p:style>
+        <p:txBody>
+          <a:bodyPr rtlCol="0" anchor="ctr"/>
+          <a:lstStyle/>
+          <a:p>
+            <a:pPr algn="ctr"/>
+          </a:p>
+        </p:txBody>
+      </p:sp>
+      <p:sp>
+        <p:nvSpPr>
+          <p:cNvPr id="53" name="Rectangle 52"/>
+          <p:cNvSpPr/>
+          <p:nvPr/>
+        </p:nvSpPr>
+        <p:spPr>
+          <a:xfrm>
+            <a:off x="20208000" y="9288000"/>
+            <a:ext cx="9780000" cy="324000"/>
+          </a:xfrm>
+          <a:prstGeom prst="rect">
+            <a:avLst/>
+          </a:prstGeom>
+          <a:solidFill>
+            <a:srgbClr val="2563EB"/>
+          </a:solidFill>
+          <a:ln>
+            <a:noFill/>
+          </a:ln>
+          <a:effectLst/>
+        </p:spPr>
+        <p:style>
+          <a:lnRef idx="1">
+            <a:schemeClr val="accent1"/>
+          </a:lnRef>
+          <a:fillRef idx="3">
+            <a:schemeClr val="accent1"/>
+          </a:fillRef>
+          <a:effectRef idx="2">
+            <a:schemeClr val="accent1"/>
+          </a:effectRef>
+          <a:fontRef idx="minor">
+            <a:schemeClr val="lt1"/>
+          </a:fontRef>
+        </p:style>
+        <p:txBody>
+          <a:bodyPr rtlCol="0" anchor="ctr"/>
+          <a:lstStyle/>
+          <a:p>
+            <a:pPr algn="ctr"/>
+          </a:p>
+        </p:txBody>
+      </p:sp>
+      <p:sp>
+        <p:nvSpPr>
+          <p:cNvPr id="54" name="TextBox 53"/>
+          <p:cNvSpPr txBox="1"/>
+          <p:nvPr/>
+        </p:nvSpPr>
+        <p:spPr>
+          <a:xfrm>
+            <a:off x="20244000" y="9288000"/>
+            <a:ext cx="9708000" cy="324000"/>
+          </a:xfrm>
+          <a:prstGeom prst="rect">
+            <a:avLst/>
+          </a:prstGeom>
+          <a:noFill/>
+        </p:spPr>
+        <p:txBody>
+          <a:bodyPr wrap="square" anchor="ctr" lIns="72000" rIns="72000" tIns="36000" bIns="36000">
+            <a:spAutoFit/>
+          </a:bodyPr>
+          <a:lstStyle/>
+          <a:p>
+            <a:pPr algn="l">
+              <a:spcBef>
+                <a:spcPts val="0"/>
+              </a:spcBef>
+              <a:spcAft>
+                <a:spcPts val="200"/>
+              </a:spcAft>
+            </a:pPr>
+            <a:r>
+              <a:rPr sz="1400" b="1">
+                <a:solidFill>
+                  <a:srgbClr val="FFFFFF"/>
+                </a:solidFill>
+                <a:latin typeface="Meiryo"/>
+                <a:ea typeface="Meiryo"/>
+              </a:rPr>
+              <a:t>③ in vitro 分解性〔新〕</a:t>
+            </a:r>
+          </a:p>
+        </p:txBody>
+      </p:sp>
+      <p:sp>
+        <p:nvSpPr>
+          <p:cNvPr id="55" name="TextBox 54"/>
+          <p:cNvSpPr txBox="1"/>
+          <p:nvPr/>
+        </p:nvSpPr>
+        <p:spPr>
+          <a:xfrm>
+            <a:off x="20262000" y="9648000"/>
+            <a:ext cx="9672000" cy="1080000"/>
+          </a:xfrm>
+          <a:prstGeom prst="rect">
+            <a:avLst/>
+          </a:prstGeom>
+          <a:noFill/>
+        </p:spPr>
+        <p:txBody>
+          <a:bodyPr wrap="square" anchor="t" lIns="72000" rIns="72000" tIns="36000" bIns="36000">
+            <a:spAutoFit/>
+          </a:bodyPr>
+          <a:lstStyle/>
+          <a:p>
+            <a:pPr algn="l">
+              <a:spcBef>
+                <a:spcPts val="0"/>
+              </a:spcBef>
+              <a:spcAft>
+                <a:spcPts val="200"/>
+              </a:spcAft>
+            </a:pPr>
+            <a:r>
+              <a:rPr sz="1200" b="0">
+                <a:solidFill>
+                  <a:srgbClr val="222222"/>
+                </a:solidFill>
+                <a:latin typeface="Meiryo"/>
+                <a:ea typeface="Meiryo"/>
+              </a:rPr>
+              <a:t>・37℃ PBS中で分解、滞留期間を制御</a:t>
+            </a:r>
+          </a:p>
+          <a:p>
+            <a:pPr algn="l">
+              <a:spcBef>
+                <a:spcPts val="0"/>
+              </a:spcBef>
+              <a:spcAft>
+                <a:spcPts val="200"/>
+              </a:spcAft>
+            </a:pPr>
+            <a:r>
+              <a:rPr sz="1200" b="0">
+                <a:solidFill>
+                  <a:srgbClr val="222222"/>
+                </a:solidFill>
+                <a:latin typeface="Meiryo"/>
+                <a:ea typeface="Meiryo"/>
+              </a:rPr>
+              <a:t>・PG3-1:3日 / PG4-025:25日</a:t>
+            </a:r>
+          </a:p>
+          <a:p>
+            <a:pPr algn="l">
+              <a:spcBef>
+                <a:spcPts val="0"/>
+              </a:spcBef>
+              <a:spcAft>
+                <a:spcPts val="200"/>
+              </a:spcAft>
+            </a:pPr>
+            <a:r>
+              <a:rPr sz="1200" b="0">
+                <a:solidFill>
+                  <a:srgbClr val="222222"/>
+                </a:solidFill>
+                <a:latin typeface="Meiryo"/>
+                <a:ea typeface="Meiryo"/>
+              </a:rPr>
+              <a:t>・→ 数日〜数週間で任意に制御</a:t>
+            </a:r>
+          </a:p>
+        </p:txBody>
+      </p:sp>
+      <p:sp>
+        <p:nvSpPr>
+          <p:cNvPr id="56" name="Rectangle 55"/>
+          <p:cNvSpPr/>
+          <p:nvPr/>
+        </p:nvSpPr>
+        <p:spPr>
+          <a:xfrm>
+            <a:off x="20316000" y="10764000"/>
+            <a:ext cx="9564000" cy="12132000"/>
+          </a:xfrm>
+          <a:prstGeom prst="rect">
+            <a:avLst/>
+          </a:prstGeom>
+          <a:solidFill>
+            <a:srgbClr val="F0F3F6"/>
+          </a:solidFill>
+          <a:ln w="12700">
+            <a:solidFill>
+              <a:srgbClr val="B0BCC7"/>
+            </a:solidFill>
+          </a:ln>
+          <a:effectLst/>
+        </p:spPr>
+        <p:style>
+          <a:lnRef idx="1">
+            <a:schemeClr val="accent1"/>
+          </a:lnRef>
+          <a:fillRef idx="3">
+            <a:schemeClr val="accent1"/>
+          </a:fillRef>
+          <a:effectRef idx="2">
+            <a:schemeClr val="accent1"/>
+          </a:effectRef>
+          <a:fontRef idx="minor">
+            <a:schemeClr val="lt1"/>
+          </a:fontRef>
+        </p:style>
+        <p:txBody>
+          <a:bodyPr rtlCol="0" anchor="ctr"/>
+          <a:lstStyle/>
+          <a:p>
+            <a:pPr algn="ctr"/>
+          </a:p>
+        </p:txBody>
+      </p:sp>
+      <p:sp>
+        <p:nvSpPr>
+          <p:cNvPr id="57" name="TextBox 56"/>
+          <p:cNvSpPr txBox="1"/>
+          <p:nvPr/>
+        </p:nvSpPr>
+        <p:spPr>
+          <a:xfrm>
+            <a:off x="20316000" y="10764000"/>
+            <a:ext cx="9564000" cy="12132000"/>
+          </a:xfrm>
+          <a:prstGeom prst="rect">
+            <a:avLst/>
+          </a:prstGeom>
+          <a:noFill/>
+        </p:spPr>
+        <p:txBody>
+          <a:bodyPr wrap="square" anchor="ctr" lIns="72000" rIns="72000" tIns="36000" bIns="36000">
+            <a:spAutoFit/>
+          </a:bodyPr>
+          <a:lstStyle/>
+          <a:p>
+            <a:pPr algn="ctr">
+              <a:spcBef>
+                <a:spcPts val="0"/>
+              </a:spcBef>
+              <a:spcAft>
+                <a:spcPts val="200"/>
+              </a:spcAft>
+            </a:pPr>
+            <a:r>
+              <a:rPr sz="1100" b="1">
+                <a:solidFill>
+                  <a:srgbClr val="B0BCC7"/>
+                </a:solidFill>
+                <a:latin typeface="Meiryo"/>
+                <a:ea typeface="Meiryo"/>
+              </a:rPr>
+              <a:t>【図を差し込み】</a:t>
+            </a:r>
+          </a:p>
+          <a:p>
+            <a:pPr algn="ctr">
+              <a:spcBef>
+                <a:spcPts val="0"/>
+              </a:spcBef>
+              <a:spcAft>
+                <a:spcPts val="200"/>
+              </a:spcAft>
+            </a:pPr>
+            <a:r>
+              <a:rPr sz="1100" b="0">
+                <a:solidFill>
+                  <a:srgbClr val="6B7884"/>
+                </a:solidFill>
+                <a:latin typeface="Meiryo"/>
+                <a:ea typeface="Meiryo"/>
+              </a:rPr>
+              <a:t>図: 分解曲線</a:t>
+            </a:r>
+          </a:p>
+        </p:txBody>
+      </p:sp>
+      <p:sp>
+        <p:nvSpPr>
+          <p:cNvPr id="58" name="Rounded Rectangle 57"/>
+          <p:cNvSpPr/>
+          <p:nvPr/>
+        </p:nvSpPr>
+        <p:spPr>
+          <a:xfrm>
+            <a:off x="20208000" y="23184000"/>
+            <a:ext cx="9780000" cy="13716000"/>
+          </a:xfrm>
+          <a:prstGeom prst="roundRect">
+            <a:avLst>
+              <a:gd name="adj" fmla="val 4000"/>
+            </a:avLst>
+          </a:prstGeom>
+          <a:solidFill>
+            <a:srgbClr val="DBEAFE"/>
+          </a:solidFill>
+          <a:ln w="12700">
+            <a:solidFill>
+              <a:srgbClr val="90A4B5"/>
+            </a:solidFill>
+          </a:ln>
+          <a:effectLst/>
+        </p:spPr>
+        <p:style>
+          <a:lnRef idx="1">
+            <a:schemeClr val="accent1"/>
+          </a:lnRef>
+          <a:fillRef idx="3">
+            <a:schemeClr val="accent1"/>
+          </a:fillRef>
+          <a:effectRef idx="2">
+            <a:schemeClr val="accent1"/>
+          </a:effectRef>
+          <a:fontRef idx="minor">
+            <a:schemeClr val="lt1"/>
+          </a:fontRef>
+        </p:style>
+        <p:txBody>
+          <a:bodyPr rtlCol="0" anchor="ctr"/>
+          <a:lstStyle/>
+          <a:p>
+            <a:pPr algn="ctr"/>
+          </a:p>
+        </p:txBody>
+      </p:sp>
+      <p:sp>
+        <p:nvSpPr>
+          <p:cNvPr id="59" name="Rectangle 58"/>
+          <p:cNvSpPr/>
+          <p:nvPr/>
+        </p:nvSpPr>
+        <p:spPr>
+          <a:xfrm>
+            <a:off x="20208000" y="23184000"/>
+            <a:ext cx="9780000" cy="324000"/>
+          </a:xfrm>
+          <a:prstGeom prst="rect">
+            <a:avLst/>
+          </a:prstGeom>
+          <a:solidFill>
+            <a:srgbClr val="2563EB"/>
+          </a:solidFill>
+          <a:ln>
+            <a:noFill/>
+          </a:ln>
+          <a:effectLst/>
+        </p:spPr>
+        <p:style>
+          <a:lnRef idx="1">
+            <a:schemeClr val="accent1"/>
+          </a:lnRef>
+          <a:fillRef idx="3">
+            <a:schemeClr val="accent1"/>
+          </a:fillRef>
+          <a:effectRef idx="2">
+            <a:schemeClr val="accent1"/>
+          </a:effectRef>
+          <a:fontRef idx="minor">
+            <a:schemeClr val="lt1"/>
+          </a:fontRef>
+        </p:style>
+        <p:txBody>
+          <a:bodyPr rtlCol="0" anchor="ctr"/>
+          <a:lstStyle/>
+          <a:p>
+            <a:pPr algn="ctr"/>
+          </a:p>
+        </p:txBody>
+      </p:sp>
+      <p:sp>
+        <p:nvSpPr>
+          <p:cNvPr id="60" name="TextBox 59"/>
+          <p:cNvSpPr txBox="1"/>
+          <p:nvPr/>
+        </p:nvSpPr>
+        <p:spPr>
+          <a:xfrm>
+            <a:off x="20244000" y="23184000"/>
+            <a:ext cx="9708000" cy="324000"/>
+          </a:xfrm>
+          <a:prstGeom prst="rect">
+            <a:avLst/>
+          </a:prstGeom>
+          <a:noFill/>
+        </p:spPr>
+        <p:txBody>
+          <a:bodyPr wrap="square" anchor="ctr" lIns="72000" rIns="72000" tIns="36000" bIns="36000">
+            <a:spAutoFit/>
+          </a:bodyPr>
+          <a:lstStyle/>
+          <a:p>
+            <a:pPr algn="l">
+              <a:spcBef>
+                <a:spcPts val="0"/>
+              </a:spcBef>
+              <a:spcAft>
+                <a:spcPts val="200"/>
+              </a:spcAft>
+            </a:pPr>
+            <a:r>
+              <a:rPr sz="1400" b="1">
+                <a:solidFill>
+                  <a:srgbClr val="FFFFFF"/>
+                </a:solidFill>
+                <a:latin typeface="Meiryo"/>
+                <a:ea typeface="Meiryo"/>
+              </a:rPr>
+              <a:t>生体適合性｜Live/Dead〔新〕</a:t>
+            </a:r>
+          </a:p>
+        </p:txBody>
+      </p:sp>
+      <p:sp>
+        <p:nvSpPr>
+          <p:cNvPr id="61" name="TextBox 60"/>
+          <p:cNvSpPr txBox="1"/>
+          <p:nvPr/>
+        </p:nvSpPr>
+        <p:spPr>
+          <a:xfrm>
+            <a:off x="20262000" y="23544000"/>
+            <a:ext cx="9672000" cy="1080000"/>
+          </a:xfrm>
+          <a:prstGeom prst="rect">
+            <a:avLst/>
+          </a:prstGeom>
+          <a:noFill/>
+        </p:spPr>
+        <p:txBody>
+          <a:bodyPr wrap="square" anchor="t" lIns="72000" rIns="72000" tIns="36000" bIns="36000">
+            <a:spAutoFit/>
+          </a:bodyPr>
+          <a:lstStyle/>
+          <a:p>
+            <a:pPr algn="l">
+              <a:spcBef>
+                <a:spcPts val="0"/>
+              </a:spcBef>
+              <a:spcAft>
+                <a:spcPts val="200"/>
+              </a:spcAft>
+            </a:pPr>
+            <a:r>
+              <a:rPr sz="1200" b="0">
+                <a:solidFill>
+                  <a:srgbClr val="222222"/>
+                </a:solidFill>
+                <a:latin typeface="Meiryo"/>
+                <a:ea typeface="Meiryo"/>
+              </a:rPr>
+              <a:t>・D1細胞を3次元包埋し培養</a:t>
+            </a:r>
+          </a:p>
+          <a:p>
+            <a:pPr algn="l">
+              <a:spcBef>
+                <a:spcPts val="0"/>
+              </a:spcBef>
+              <a:spcAft>
+                <a:spcPts val="200"/>
+              </a:spcAft>
+            </a:pPr>
+            <a:r>
+              <a:rPr sz="1200" b="0">
+                <a:solidFill>
+                  <a:srgbClr val="222222"/>
+                </a:solidFill>
+                <a:latin typeface="Meiryo"/>
+                <a:ea typeface="Meiryo"/>
+              </a:rPr>
+              <a:t>・1/5/9日とも死細胞ほぼ無し</a:t>
+            </a:r>
+          </a:p>
+          <a:p>
+            <a:pPr algn="l">
+              <a:spcBef>
+                <a:spcPts val="0"/>
+              </a:spcBef>
+              <a:spcAft>
+                <a:spcPts val="200"/>
+              </a:spcAft>
+            </a:pPr>
+            <a:r>
+              <a:rPr sz="1200" b="0">
+                <a:solidFill>
+                  <a:srgbClr val="222222"/>
+                </a:solidFill>
+                <a:latin typeface="Meiryo"/>
+                <a:ea typeface="Meiryo"/>
+              </a:rPr>
+              <a:t>・→ 化学架橋剤なしで高生存率</a:t>
+            </a:r>
+          </a:p>
+        </p:txBody>
+      </p:sp>
+      <p:sp>
+        <p:nvSpPr>
+          <p:cNvPr id="62" name="Rectangle 61"/>
+          <p:cNvSpPr/>
+          <p:nvPr/>
+        </p:nvSpPr>
+        <p:spPr>
+          <a:xfrm>
+            <a:off x="20316000" y="24660000"/>
+            <a:ext cx="9564000" cy="12132000"/>
+          </a:xfrm>
+          <a:prstGeom prst="rect">
+            <a:avLst/>
+          </a:prstGeom>
+          <a:solidFill>
+            <a:srgbClr val="F0F3F6"/>
+          </a:solidFill>
+          <a:ln w="12700">
+            <a:solidFill>
+              <a:srgbClr val="B0BCC7"/>
+            </a:solidFill>
+          </a:ln>
+          <a:effectLst/>
+        </p:spPr>
+        <p:style>
+          <a:lnRef idx="1">
+            <a:schemeClr val="accent1"/>
+          </a:lnRef>
+          <a:fillRef idx="3">
+            <a:schemeClr val="accent1"/>
+          </a:fillRef>
+          <a:effectRef idx="2">
+            <a:schemeClr val="accent1"/>
+          </a:effectRef>
+          <a:fontRef idx="minor">
+            <a:schemeClr val="lt1"/>
+          </a:fontRef>
+        </p:style>
+        <p:txBody>
+          <a:bodyPr rtlCol="0" anchor="ctr"/>
+          <a:lstStyle/>
+          <a:p>
+            <a:pPr algn="ctr"/>
+          </a:p>
+        </p:txBody>
+      </p:sp>
+      <p:sp>
+        <p:nvSpPr>
+          <p:cNvPr id="63" name="TextBox 62"/>
+          <p:cNvSpPr txBox="1"/>
+          <p:nvPr/>
+        </p:nvSpPr>
+        <p:spPr>
+          <a:xfrm>
+            <a:off x="20316000" y="24660000"/>
+            <a:ext cx="9564000" cy="12132000"/>
+          </a:xfrm>
+          <a:prstGeom prst="rect">
+            <a:avLst/>
+          </a:prstGeom>
+          <a:noFill/>
+        </p:spPr>
+        <p:txBody>
+          <a:bodyPr wrap="square" anchor="ctr" lIns="72000" rIns="72000" tIns="36000" bIns="36000">
+            <a:spAutoFit/>
+          </a:bodyPr>
+          <a:lstStyle/>
+          <a:p>
+            <a:pPr algn="ctr">
+              <a:spcBef>
+                <a:spcPts val="0"/>
+              </a:spcBef>
+              <a:spcAft>
+                <a:spcPts val="200"/>
+              </a:spcAft>
+            </a:pPr>
+            <a:r>
+              <a:rPr sz="1100" b="1">
+                <a:solidFill>
+                  <a:srgbClr val="B0BCC7"/>
+                </a:solidFill>
+                <a:latin typeface="Meiryo"/>
+                <a:ea typeface="Meiryo"/>
+              </a:rPr>
+              <a:t>【図を差し込み】</a:t>
+            </a:r>
+          </a:p>
+          <a:p>
+            <a:pPr algn="ctr">
+              <a:spcBef>
+                <a:spcPts val="0"/>
+              </a:spcBef>
+              <a:spcAft>
+                <a:spcPts val="200"/>
+              </a:spcAft>
+            </a:pPr>
+            <a:r>
+              <a:rPr sz="1100" b="0">
+                <a:solidFill>
+                  <a:srgbClr val="6B7884"/>
+                </a:solidFill>
+                <a:latin typeface="Meiryo"/>
+                <a:ea typeface="Meiryo"/>
+              </a:rPr>
+              <a:t>図: 蛍光像(PG3-1/4-025/4-0125)</a:t>
+            </a:r>
+          </a:p>
+        </p:txBody>
+      </p:sp>
+      <p:sp>
+        <p:nvSpPr>
+          <p:cNvPr id="64" name="Rounded Rectangle 63"/>
           <p:cNvSpPr/>
           <p:nvPr/>
         </p:nvSpPr>
@@ -5730,7 +6571,7 @@
       </p:sp>
       <p:sp>
         <p:nvSpPr>
-          <p:cNvPr id="47" name="Rectangle 46"/>
+          <p:cNvPr id="65" name="Rectangle 64"/>
           <p:cNvSpPr/>
           <p:nvPr/>
         </p:nvSpPr>
@@ -5774,7 +6615,7 @@
       </p:sp>
       <p:sp>
         <p:nvSpPr>
-          <p:cNvPr id="48" name="TextBox 47"/>
+          <p:cNvPr id="66" name="TextBox 65"/>
           <p:cNvSpPr txBox="1"/>
           <p:nvPr/>
         </p:nvSpPr>
@@ -5817,7 +6658,7 @@
       </p:sp>
       <p:sp>
         <p:nvSpPr>
-          <p:cNvPr id="49" name="Rounded Rectangle 48"/>
+          <p:cNvPr id="67" name="Rounded Rectangle 66"/>
           <p:cNvSpPr/>
           <p:nvPr/>
         </p:nvSpPr>
@@ -5865,7 +6706,7 @@
       </p:sp>
       <p:sp>
         <p:nvSpPr>
-          <p:cNvPr id="50" name="Rectangle 49"/>
+          <p:cNvPr id="68" name="Rectangle 67"/>
           <p:cNvSpPr/>
           <p:nvPr/>
         </p:nvSpPr>
@@ -5909,7 +6750,7 @@
       </p:sp>
       <p:sp>
         <p:nvSpPr>
-          <p:cNvPr id="51" name="TextBox 50"/>
+          <p:cNvPr id="69" name="TextBox 68"/>
           <p:cNvSpPr txBox="1"/>
           <p:nvPr/>
         </p:nvSpPr>
@@ -5952,7 +6793,7 @@
       </p:sp>
       <p:sp>
         <p:nvSpPr>
-          <p:cNvPr id="52" name="TextBox 51"/>
+          <p:cNvPr id="70" name="TextBox 69"/>
           <p:cNvSpPr txBox="1"/>
           <p:nvPr/>
         </p:nvSpPr>
@@ -6055,7 +6896,7 @@
       </p:sp>
       <p:sp>
         <p:nvSpPr>
-          <p:cNvPr id="53" name="Rectangle 52"/>
+          <p:cNvPr id="71" name="Rectangle 70"/>
           <p:cNvSpPr/>
           <p:nvPr/>
         </p:nvSpPr>
@@ -6101,7 +6942,7 @@
       </p:sp>
       <p:sp>
         <p:nvSpPr>
-          <p:cNvPr id="54" name="TextBox 53"/>
+          <p:cNvPr id="72" name="TextBox 71"/>
           <p:cNvSpPr txBox="1"/>
           <p:nvPr/>
         </p:nvSpPr>
@@ -6164,7 +7005,7 @@
       </p:sp>
       <p:sp>
         <p:nvSpPr>
-          <p:cNvPr id="55" name="Rounded Rectangle 54"/>
+          <p:cNvPr id="73" name="Rounded Rectangle 72"/>
           <p:cNvSpPr/>
           <p:nvPr/>
         </p:nvSpPr>
@@ -6212,7 +7053,7 @@
       </p:sp>
       <p:sp>
         <p:nvSpPr>
-          <p:cNvPr id="56" name="Rectangle 55"/>
+          <p:cNvPr id="74" name="Rectangle 73"/>
           <p:cNvSpPr/>
           <p:nvPr/>
         </p:nvSpPr>
@@ -6256,7 +7097,7 @@
       </p:sp>
       <p:sp>
         <p:nvSpPr>
-          <p:cNvPr id="57" name="TextBox 56"/>
+          <p:cNvPr id="75" name="TextBox 74"/>
           <p:cNvSpPr txBox="1"/>
           <p:nvPr/>
         </p:nvSpPr>
@@ -6299,7 +7140,7 @@
       </p:sp>
       <p:sp>
         <p:nvSpPr>
-          <p:cNvPr id="58" name="TextBox 57"/>
+          <p:cNvPr id="76" name="TextBox 75"/>
           <p:cNvSpPr txBox="1"/>
           <p:nvPr/>
         </p:nvSpPr>
@@ -6402,7 +7243,7 @@
       </p:sp>
       <p:sp>
         <p:nvSpPr>
-          <p:cNvPr id="59" name="Rectangle 58"/>
+          <p:cNvPr id="77" name="Rectangle 76"/>
           <p:cNvSpPr/>
           <p:nvPr/>
         </p:nvSpPr>
@@ -6448,7 +7289,7 @@
       </p:sp>
       <p:sp>
         <p:nvSpPr>
-          <p:cNvPr id="60" name="TextBox 59"/>
+          <p:cNvPr id="78" name="TextBox 77"/>
           <p:cNvSpPr txBox="1"/>
           <p:nvPr/>
         </p:nvSpPr>
@@ -6511,7 +7352,7 @@
       </p:sp>
       <p:sp>
         <p:nvSpPr>
-          <p:cNvPr id="61" name="Rounded Rectangle 60"/>
+          <p:cNvPr id="79" name="Rounded Rectangle 78"/>
           <p:cNvSpPr/>
           <p:nvPr/>
         </p:nvSpPr>
@@ -6559,7 +7400,7 @@
       </p:sp>
       <p:sp>
         <p:nvSpPr>
-          <p:cNvPr id="62" name="TextBox 61"/>
+          <p:cNvPr id="80" name="TextBox 79"/>
           <p:cNvSpPr txBox="1"/>
           <p:nvPr/>
         </p:nvSpPr>
@@ -6602,7 +7443,7 @@
       </p:sp>
       <p:sp>
         <p:nvSpPr>
-          <p:cNvPr id="63" name="TextBox 62"/>
+          <p:cNvPr id="81" name="TextBox 80"/>
           <p:cNvSpPr txBox="1"/>
           <p:nvPr/>
         </p:nvSpPr>

--- a/poster/poster_A0.pptx
+++ b/poster/poster_A0.pptx
@@ -5670,7 +5670,7 @@
                 <a:latin typeface="Meiryo"/>
                 <a:ea typeface="Meiryo"/>
               </a:rPr>
-              <a:t>架橋点の同定｜GCアセチル化〔新〕</a:t>
+              <a:t>③ in vitro 分解性〔新〕</a:t>
             </a:r>
           </a:p>
         </p:txBody>
@@ -5713,7 +5713,7 @@
                 <a:latin typeface="Meiryo"/>
                 <a:ea typeface="Meiryo"/>
               </a:rPr>
-              <a:t>・GCアミノ基を部分N-アセチル化</a:t>
+              <a:t>・37℃ PBS中で分解、滞留期間を制御</a:t>
             </a:r>
           </a:p>
           <a:p>
@@ -5733,7 +5733,7 @@
                 <a:latin typeface="Meiryo"/>
                 <a:ea typeface="Meiryo"/>
               </a:rPr>
-              <a:t>・DA↑でゲル化遅延 (16.7%:1.5h→90%:80h)</a:t>
+              <a:t>・PG3-1:3日 / PG4-025:25日</a:t>
             </a:r>
           </a:p>
           <a:p>
@@ -5753,7 +5753,7 @@
                 <a:latin typeface="Meiryo"/>
                 <a:ea typeface="Meiryo"/>
               </a:rPr>
-              <a:t>・→ アミノ基が主架橋点と化学的に証明</a:t>
+              <a:t>・→ 数日〜数週間で任意に制御</a:t>
             </a:r>
           </a:p>
         </p:txBody>
@@ -5862,7 +5862,7 @@
                 <a:latin typeface="Meiryo"/>
                 <a:ea typeface="Meiryo"/>
               </a:rPr>
-              <a:t>図: DA vs ゲル化時間 / NMR</a:t>
+              <a:t>図: 分解曲線</a:t>
             </a:r>
           </a:p>
         </p:txBody>
@@ -5876,7 +5876,7 @@
         <p:spPr>
           <a:xfrm>
             <a:off x="20208000" y="9288000"/>
-            <a:ext cx="9780000" cy="13716000"/>
+            <a:ext cx="9780000" cy="27612000"/>
           </a:xfrm>
           <a:prstGeom prst="roundRect">
             <a:avLst>
@@ -5997,7 +5997,7 @@
                 <a:latin typeface="Meiryo"/>
                 <a:ea typeface="Meiryo"/>
               </a:rPr>
-              <a:t>③ in vitro 分解性〔新〕</a:t>
+              <a:t>④ 生体適合性｜Live/Dead〔新〕</a:t>
             </a:r>
           </a:p>
         </p:txBody>
@@ -6011,7 +6011,7 @@
         <p:spPr>
           <a:xfrm>
             <a:off x="20262000" y="9648000"/>
-            <a:ext cx="9672000" cy="1080000"/>
+            <a:ext cx="9672000" cy="1584000"/>
           </a:xfrm>
           <a:prstGeom prst="rect">
             <a:avLst/>
@@ -6040,7 +6040,7 @@
                 <a:latin typeface="Meiryo"/>
                 <a:ea typeface="Meiryo"/>
               </a:rPr>
-              <a:t>・37℃ PBS中で分解、滞留期間を制御</a:t>
+              <a:t>・D1細胞を3次元ゲル内に包埋し培養</a:t>
             </a:r>
           </a:p>
           <a:p>
@@ -6060,7 +6060,7 @@
                 <a:latin typeface="Meiryo"/>
                 <a:ea typeface="Meiryo"/>
               </a:rPr>
-              <a:t>・PG3-1:3日 / PG4-025:25日</a:t>
+              <a:t>・1/5/9日とも死細胞はほぼ観察されず</a:t>
             </a:r>
           </a:p>
           <a:p>
@@ -6080,7 +6080,27 @@
                 <a:latin typeface="Meiryo"/>
                 <a:ea typeface="Meiryo"/>
               </a:rPr>
-              <a:t>・→ 数日〜数週間で任意に制御</a:t>
+              <a:t>・溶解後も毒性なし</a:t>
+            </a:r>
+          </a:p>
+          <a:p>
+            <a:pPr algn="l">
+              <a:spcBef>
+                <a:spcPts val="0"/>
+              </a:spcBef>
+              <a:spcAft>
+                <a:spcPts val="200"/>
+              </a:spcAft>
+            </a:pPr>
+            <a:r>
+              <a:rPr sz="1200" b="0">
+                <a:solidFill>
+                  <a:srgbClr val="222222"/>
+                </a:solidFill>
+                <a:latin typeface="Meiryo"/>
+                <a:ea typeface="Meiryo"/>
+              </a:rPr>
+              <a:t>・→ 化学架橋剤なしで高い細胞生存率</a:t>
             </a:r>
           </a:p>
         </p:txBody>
@@ -6093,8 +6113,8 @@
         </p:nvSpPr>
         <p:spPr>
           <a:xfrm>
-            <a:off x="20316000" y="10764000"/>
-            <a:ext cx="9564000" cy="12132000"/>
+            <a:off x="20316000" y="11268000"/>
+            <a:ext cx="9564000" cy="25524000"/>
           </a:xfrm>
           <a:prstGeom prst="rect">
             <a:avLst/>
@@ -6139,8 +6159,8 @@
         </p:nvSpPr>
         <p:spPr>
           <a:xfrm>
-            <a:off x="20316000" y="10764000"/>
-            <a:ext cx="9564000" cy="12132000"/>
+            <a:off x="20316000" y="11268000"/>
+            <a:ext cx="9564000" cy="25524000"/>
           </a:xfrm>
           <a:prstGeom prst="rect">
             <a:avLst/>
@@ -6189,7 +6209,8 @@
                 <a:latin typeface="Meiryo"/>
                 <a:ea typeface="Meiryo"/>
               </a:rPr>
-              <a:t>図: 分解曲線</a:t>
+              <a:t>図: Live/Dead 蛍光像
+(PG3-1 / PG4-025 / PG4-0125 × 1・5・9日)</a:t>
             </a:r>
           </a:p>
         </p:txBody>
@@ -6202,8 +6223,143 @@
         </p:nvSpPr>
         <p:spPr>
           <a:xfrm>
-            <a:off x="20208000" y="23184000"/>
-            <a:ext cx="9780000" cy="13716000"/>
+            <a:off x="288000" y="37080000"/>
+            <a:ext cx="29700000" cy="3888000"/>
+          </a:xfrm>
+          <a:prstGeom prst="roundRect">
+            <a:avLst>
+              <a:gd name="adj" fmla="val 4000"/>
+            </a:avLst>
+          </a:prstGeom>
+          <a:solidFill>
+            <a:srgbClr val="FBF3EE"/>
+          </a:solidFill>
+          <a:ln w="25400">
+            <a:solidFill>
+              <a:srgbClr val="EA580C"/>
+            </a:solidFill>
+          </a:ln>
+          <a:effectLst/>
+        </p:spPr>
+        <p:style>
+          <a:lnRef idx="1">
+            <a:schemeClr val="accent1"/>
+          </a:lnRef>
+          <a:fillRef idx="3">
+            <a:schemeClr val="accent1"/>
+          </a:fillRef>
+          <a:effectRef idx="2">
+            <a:schemeClr val="accent1"/>
+          </a:effectRef>
+          <a:fontRef idx="minor">
+            <a:schemeClr val="lt1"/>
+          </a:fontRef>
+        </p:style>
+        <p:txBody>
+          <a:bodyPr rtlCol="0" anchor="ctr"/>
+          <a:lstStyle/>
+          <a:p>
+            <a:pPr algn="ctr"/>
+          </a:p>
+        </p:txBody>
+      </p:sp>
+      <p:sp>
+        <p:nvSpPr>
+          <p:cNvPr id="59" name="Rectangle 58"/>
+          <p:cNvSpPr/>
+          <p:nvPr/>
+        </p:nvSpPr>
+        <p:spPr>
+          <a:xfrm>
+            <a:off x="288000" y="37080000"/>
+            <a:ext cx="29700000" cy="396000"/>
+          </a:xfrm>
+          <a:prstGeom prst="rect">
+            <a:avLst/>
+          </a:prstGeom>
+          <a:solidFill>
+            <a:srgbClr val="33506B"/>
+          </a:solidFill>
+          <a:ln>
+            <a:noFill/>
+          </a:ln>
+          <a:effectLst/>
+        </p:spPr>
+        <p:style>
+          <a:lnRef idx="1">
+            <a:schemeClr val="accent1"/>
+          </a:lnRef>
+          <a:fillRef idx="3">
+            <a:schemeClr val="accent1"/>
+          </a:fillRef>
+          <a:effectRef idx="2">
+            <a:schemeClr val="accent1"/>
+          </a:effectRef>
+          <a:fontRef idx="minor">
+            <a:schemeClr val="lt1"/>
+          </a:fontRef>
+        </p:style>
+        <p:txBody>
+          <a:bodyPr rtlCol="0" anchor="ctr"/>
+          <a:lstStyle/>
+          <a:p>
+            <a:pPr algn="ctr"/>
+          </a:p>
+        </p:txBody>
+      </p:sp>
+      <p:sp>
+        <p:nvSpPr>
+          <p:cNvPr id="60" name="TextBox 59"/>
+          <p:cNvSpPr txBox="1"/>
+          <p:nvPr/>
+        </p:nvSpPr>
+        <p:spPr>
+          <a:xfrm>
+            <a:off x="432000" y="37080000"/>
+            <a:ext cx="29412000" cy="396000"/>
+          </a:xfrm>
+          <a:prstGeom prst="rect">
+            <a:avLst/>
+          </a:prstGeom>
+          <a:noFill/>
+        </p:spPr>
+        <p:txBody>
+          <a:bodyPr wrap="square" anchor="ctr" lIns="72000" rIns="72000" tIns="36000" bIns="36000">
+            <a:spAutoFit/>
+          </a:bodyPr>
+          <a:lstStyle/>
+          <a:p>
+            <a:pPr algn="l">
+              <a:spcBef>
+                <a:spcPts val="0"/>
+              </a:spcBef>
+              <a:spcAft>
+                <a:spcPts val="200"/>
+              </a:spcAft>
+            </a:pPr>
+            <a:r>
+              <a:rPr sz="1700" b="1">
+                <a:solidFill>
+                  <a:srgbClr val="FFFFFF"/>
+                </a:solidFill>
+                <a:latin typeface="Meiryo"/>
+                <a:ea typeface="Meiryo"/>
+              </a:rPr>
+              <a:t>C. 実用性評価 ｜ 注入試験（In vitro → In vivo）〔新データ・目玉〕</a:t>
+            </a:r>
+          </a:p>
+        </p:txBody>
+      </p:sp>
+      <p:sp>
+        <p:nvSpPr>
+          <p:cNvPr id="61" name="Rounded Rectangle 60"/>
+          <p:cNvSpPr/>
+          <p:nvPr/>
+        </p:nvSpPr>
+        <p:spPr>
+          <a:xfrm>
+            <a:off x="360000" y="37548000"/>
+            <a:ext cx="12337919" cy="3312000"/>
           </a:xfrm>
           <a:prstGeom prst="roundRect">
             <a:avLst>
@@ -6244,14 +6400,14 @@
       </p:sp>
       <p:sp>
         <p:nvSpPr>
-          <p:cNvPr id="59" name="Rectangle 58"/>
+          <p:cNvPr id="62" name="Rectangle 61"/>
           <p:cNvSpPr/>
           <p:nvPr/>
         </p:nvSpPr>
         <p:spPr>
           <a:xfrm>
-            <a:off x="20208000" y="23184000"/>
-            <a:ext cx="9780000" cy="324000"/>
+            <a:off x="360000" y="37548000"/>
+            <a:ext cx="12337919" cy="324000"/>
           </a:xfrm>
           <a:prstGeom prst="rect">
             <a:avLst/>
@@ -6288,14 +6444,14 @@
       </p:sp>
       <p:sp>
         <p:nvSpPr>
-          <p:cNvPr id="60" name="TextBox 59"/>
+          <p:cNvPr id="63" name="TextBox 62"/>
           <p:cNvSpPr txBox="1"/>
           <p:nvPr/>
         </p:nvSpPr>
         <p:spPr>
           <a:xfrm>
-            <a:off x="20244000" y="23184000"/>
-            <a:ext cx="9708000" cy="324000"/>
+            <a:off x="396000" y="37548000"/>
+            <a:ext cx="12265919" cy="324000"/>
           </a:xfrm>
           <a:prstGeom prst="rect">
             <a:avLst/>
@@ -6324,21 +6480,21 @@
                 <a:latin typeface="Meiryo"/>
                 <a:ea typeface="Meiryo"/>
               </a:rPr>
-              <a:t>生体適合性｜Live/Dead〔新〕</a:t>
-            </a:r>
-          </a:p>
-        </p:txBody>
-      </p:sp>
-      <p:sp>
-        <p:nvSpPr>
-          <p:cNvPr id="61" name="TextBox 60"/>
+              <a:t>C-1. in vitro 注入試験</a:t>
+            </a:r>
+          </a:p>
+        </p:txBody>
+      </p:sp>
+      <p:sp>
+        <p:nvSpPr>
+          <p:cNvPr id="64" name="TextBox 63"/>
           <p:cNvSpPr txBox="1"/>
           <p:nvPr/>
         </p:nvSpPr>
         <p:spPr>
           <a:xfrm>
-            <a:off x="20262000" y="23544000"/>
-            <a:ext cx="9672000" cy="1080000"/>
+            <a:off x="414000" y="37908000"/>
+            <a:ext cx="12229919" cy="1368000"/>
           </a:xfrm>
           <a:prstGeom prst="rect">
             <a:avLst/>
@@ -6367,7 +6523,7 @@
                 <a:latin typeface="Meiryo"/>
                 <a:ea typeface="Meiryo"/>
               </a:rPr>
-              <a:t>・D1細胞を3次元包埋し培養</a:t>
+              <a:t>・赤色化PG4-0125をシリンジから吐出</a:t>
             </a:r>
           </a:p>
           <a:p>
@@ -6387,7 +6543,7 @@
                 <a:latin typeface="Meiryo"/>
                 <a:ea typeface="Meiryo"/>
               </a:rPr>
-              <a:t>・1/5/9日とも死細胞ほぼ無し</a:t>
+              <a:t>・針内で高せん断 → ゾル化(シアシニング)</a:t>
             </a:r>
           </a:p>
           <a:p>
@@ -6407,21 +6563,41 @@
                 <a:latin typeface="Meiryo"/>
                 <a:ea typeface="Meiryo"/>
               </a:rPr>
-              <a:t>・→ 化学架橋剤なしで高生存率</a:t>
-            </a:r>
-          </a:p>
-        </p:txBody>
-      </p:sp>
-      <p:sp>
-        <p:nvSpPr>
-          <p:cNvPr id="62" name="Rectangle 61"/>
+              <a:t>・吐出直後に即ゲル化、液だれせず形状保持</a:t>
+            </a:r>
+          </a:p>
+          <a:p>
+            <a:pPr algn="l">
+              <a:spcBef>
+                <a:spcPts val="0"/>
+              </a:spcBef>
+              <a:spcAft>
+                <a:spcPts val="200"/>
+              </a:spcAft>
+            </a:pPr>
+            <a:r>
+              <a:rPr sz="1200" b="0">
+                <a:solidFill>
+                  <a:srgbClr val="222222"/>
+                </a:solidFill>
+                <a:latin typeface="Meiryo"/>
+                <a:ea typeface="Meiryo"/>
+              </a:rPr>
+              <a:t>→ レオロジー挙動を実機操作で可視化</a:t>
+            </a:r>
+          </a:p>
+        </p:txBody>
+      </p:sp>
+      <p:sp>
+        <p:nvSpPr>
+          <p:cNvPr id="65" name="Rectangle 64"/>
           <p:cNvSpPr/>
           <p:nvPr/>
         </p:nvSpPr>
         <p:spPr>
           <a:xfrm>
-            <a:off x="20316000" y="24660000"/>
-            <a:ext cx="9564000" cy="12132000"/>
+            <a:off x="468000" y="39312000"/>
+            <a:ext cx="12121919" cy="1440000"/>
           </a:xfrm>
           <a:prstGeom prst="rect">
             <a:avLst/>
@@ -6460,14 +6636,14 @@
       </p:sp>
       <p:sp>
         <p:nvSpPr>
-          <p:cNvPr id="63" name="TextBox 62"/>
+          <p:cNvPr id="66" name="TextBox 65"/>
           <p:cNvSpPr txBox="1"/>
           <p:nvPr/>
         </p:nvSpPr>
         <p:spPr>
           <a:xfrm>
-            <a:off x="20316000" y="24660000"/>
-            <a:ext cx="9564000" cy="12132000"/>
+            <a:off x="468000" y="39312000"/>
+            <a:ext cx="12121919" cy="1440000"/>
           </a:xfrm>
           <a:prstGeom prst="rect">
             <a:avLst/>
@@ -6516,21 +6692,21 @@
                 <a:latin typeface="Meiryo"/>
                 <a:ea typeface="Meiryo"/>
               </a:rPr>
-              <a:t>図: 蛍光像(PG3-1/4-025/4-0125)</a:t>
-            </a:r>
-          </a:p>
-        </p:txBody>
-      </p:sp>
-      <p:sp>
-        <p:nvSpPr>
-          <p:cNvPr id="64" name="Rounded Rectangle 63"/>
+              <a:t>図: in vitro 注入の連続写真</a:t>
+            </a:r>
+          </a:p>
+        </p:txBody>
+      </p:sp>
+      <p:sp>
+        <p:nvSpPr>
+          <p:cNvPr id="67" name="Rounded Rectangle 66"/>
           <p:cNvSpPr/>
           <p:nvPr/>
         </p:nvSpPr>
         <p:spPr>
           <a:xfrm>
-            <a:off x="288000" y="37080000"/>
-            <a:ext cx="29700000" cy="3888000"/>
+            <a:off x="12877919" y="37548000"/>
+            <a:ext cx="17038080" cy="3312000"/>
           </a:xfrm>
           <a:prstGeom prst="roundRect">
             <a:avLst>
@@ -6538,142 +6714,7 @@
             </a:avLst>
           </a:prstGeom>
           <a:solidFill>
-            <a:srgbClr val="FBF3EE"/>
-          </a:solidFill>
-          <a:ln w="25400">
-            <a:solidFill>
-              <a:srgbClr val="EA580C"/>
-            </a:solidFill>
-          </a:ln>
-          <a:effectLst/>
-        </p:spPr>
-        <p:style>
-          <a:lnRef idx="1">
-            <a:schemeClr val="accent1"/>
-          </a:lnRef>
-          <a:fillRef idx="3">
-            <a:schemeClr val="accent1"/>
-          </a:fillRef>
-          <a:effectRef idx="2">
-            <a:schemeClr val="accent1"/>
-          </a:effectRef>
-          <a:fontRef idx="minor">
-            <a:schemeClr val="lt1"/>
-          </a:fontRef>
-        </p:style>
-        <p:txBody>
-          <a:bodyPr rtlCol="0" anchor="ctr"/>
-          <a:lstStyle/>
-          <a:p>
-            <a:pPr algn="ctr"/>
-          </a:p>
-        </p:txBody>
-      </p:sp>
-      <p:sp>
-        <p:nvSpPr>
-          <p:cNvPr id="65" name="Rectangle 64"/>
-          <p:cNvSpPr/>
-          <p:nvPr/>
-        </p:nvSpPr>
-        <p:spPr>
-          <a:xfrm>
-            <a:off x="288000" y="37080000"/>
-            <a:ext cx="29700000" cy="396000"/>
-          </a:xfrm>
-          <a:prstGeom prst="rect">
-            <a:avLst/>
-          </a:prstGeom>
-          <a:solidFill>
-            <a:srgbClr val="33506B"/>
-          </a:solidFill>
-          <a:ln>
-            <a:noFill/>
-          </a:ln>
-          <a:effectLst/>
-        </p:spPr>
-        <p:style>
-          <a:lnRef idx="1">
-            <a:schemeClr val="accent1"/>
-          </a:lnRef>
-          <a:fillRef idx="3">
-            <a:schemeClr val="accent1"/>
-          </a:fillRef>
-          <a:effectRef idx="2">
-            <a:schemeClr val="accent1"/>
-          </a:effectRef>
-          <a:fontRef idx="minor">
-            <a:schemeClr val="lt1"/>
-          </a:fontRef>
-        </p:style>
-        <p:txBody>
-          <a:bodyPr rtlCol="0" anchor="ctr"/>
-          <a:lstStyle/>
-          <a:p>
-            <a:pPr algn="ctr"/>
-          </a:p>
-        </p:txBody>
-      </p:sp>
-      <p:sp>
-        <p:nvSpPr>
-          <p:cNvPr id="66" name="TextBox 65"/>
-          <p:cNvSpPr txBox="1"/>
-          <p:nvPr/>
-        </p:nvSpPr>
-        <p:spPr>
-          <a:xfrm>
-            <a:off x="432000" y="37080000"/>
-            <a:ext cx="29412000" cy="396000"/>
-          </a:xfrm>
-          <a:prstGeom prst="rect">
-            <a:avLst/>
-          </a:prstGeom>
-          <a:noFill/>
-        </p:spPr>
-        <p:txBody>
-          <a:bodyPr wrap="square" anchor="ctr" lIns="72000" rIns="72000" tIns="36000" bIns="36000">
-            <a:spAutoFit/>
-          </a:bodyPr>
-          <a:lstStyle/>
-          <a:p>
-            <a:pPr algn="l">
-              <a:spcBef>
-                <a:spcPts val="0"/>
-              </a:spcBef>
-              <a:spcAft>
-                <a:spcPts val="200"/>
-              </a:spcAft>
-            </a:pPr>
-            <a:r>
-              <a:rPr sz="1700" b="1">
-                <a:solidFill>
-                  <a:srgbClr val="FFFFFF"/>
-                </a:solidFill>
-                <a:latin typeface="Meiryo"/>
-                <a:ea typeface="Meiryo"/>
-              </a:rPr>
-              <a:t>C. 実用性評価 ｜ 注入試験（In vitro → In vivo）〔新データ・目玉〕</a:t>
-            </a:r>
-          </a:p>
-        </p:txBody>
-      </p:sp>
-      <p:sp>
-        <p:nvSpPr>
-          <p:cNvPr id="67" name="Rounded Rectangle 66"/>
-          <p:cNvSpPr/>
-          <p:nvPr/>
-        </p:nvSpPr>
-        <p:spPr>
-          <a:xfrm>
-            <a:off x="360000" y="37548000"/>
-            <a:ext cx="14688000" cy="3312000"/>
-          </a:xfrm>
-          <a:prstGeom prst="roundRect">
-            <a:avLst>
-              <a:gd name="adj" fmla="val 4000"/>
-            </a:avLst>
-          </a:prstGeom>
-          <a:solidFill>
-            <a:srgbClr val="DBEAFE"/>
+            <a:srgbClr val="FFE3D3"/>
           </a:solidFill>
           <a:ln w="12700">
             <a:solidFill>
@@ -6712,14 +6753,14 @@
         </p:nvSpPr>
         <p:spPr>
           <a:xfrm>
-            <a:off x="360000" y="37548000"/>
-            <a:ext cx="14688000" cy="324000"/>
+            <a:off x="12877919" y="37548000"/>
+            <a:ext cx="17038080" cy="324000"/>
           </a:xfrm>
           <a:prstGeom prst="rect">
             <a:avLst/>
           </a:prstGeom>
           <a:solidFill>
-            <a:srgbClr val="2563EB"/>
+            <a:srgbClr val="EA580C"/>
           </a:solidFill>
           <a:ln>
             <a:noFill/>
@@ -6756,8 +6797,8 @@
         </p:nvSpPr>
         <p:spPr>
           <a:xfrm>
-            <a:off x="396000" y="37548000"/>
-            <a:ext cx="14616000" cy="324000"/>
+            <a:off x="12913919" y="37548000"/>
+            <a:ext cx="16966080" cy="324000"/>
           </a:xfrm>
           <a:prstGeom prst="rect">
             <a:avLst/>
@@ -6786,7 +6827,7 @@
                 <a:latin typeface="Meiryo"/>
                 <a:ea typeface="Meiryo"/>
               </a:rPr>
-              <a:t>C-1. in vitro 注入試験</a:t>
+              <a:t>C-2. in vivo マウス皮下注入試験（最重要・目玉）</a:t>
             </a:r>
           </a:p>
         </p:txBody>
@@ -6799,8 +6840,8 @@
         </p:nvSpPr>
         <p:spPr>
           <a:xfrm>
-            <a:off x="414000" y="37908000"/>
-            <a:ext cx="14580000" cy="1368000"/>
+            <a:off x="12931919" y="37908000"/>
+            <a:ext cx="16930080" cy="1368000"/>
           </a:xfrm>
           <a:prstGeom prst="rect">
             <a:avLst/>
@@ -6829,7 +6870,7 @@
                 <a:latin typeface="Meiryo"/>
                 <a:ea typeface="Meiryo"/>
               </a:rPr>
-              <a:t>・赤色化PG4-0125をシリンジから吐出</a:t>
+              <a:t>・香港大 Sang-Jin Lee 先生との共同研究</a:t>
             </a:r>
           </a:p>
           <a:p>
@@ -6849,7 +6890,7 @@
                 <a:latin typeface="Meiryo"/>
                 <a:ea typeface="Meiryo"/>
               </a:rPr>
-              <a:t>・針内で高せん断 → ゾル化(シアシニング)</a:t>
+              <a:t>・PG4-0125(0.25 mL)をマウス背部皮下へ注入</a:t>
             </a:r>
           </a:p>
           <a:p>
@@ -6869,7 +6910,7 @@
                 <a:latin typeface="Meiryo"/>
                 <a:ea typeface="Meiryo"/>
               </a:rPr>
-              <a:t>・吐出直後に即ゲル化、液だれせず形状保持</a:t>
+              <a:t>・抵抗なく注入 → 生体内で即座に自己修復</a:t>
             </a:r>
           </a:p>
           <a:p>
@@ -6889,7 +6930,7 @@
                 <a:latin typeface="Meiryo"/>
                 <a:ea typeface="Meiryo"/>
               </a:rPr>
-              <a:t>→ レオロジー挙動を実機操作で可視化</a:t>
+              <a:t>→ 局所に明瞭なドーム状デポを形成し実用性を実証</a:t>
             </a:r>
           </a:p>
         </p:txBody>
@@ -6902,8 +6943,8 @@
         </p:nvSpPr>
         <p:spPr>
           <a:xfrm>
-            <a:off x="468000" y="39312000"/>
-            <a:ext cx="14472000" cy="1440000"/>
+            <a:off x="12985919" y="39312000"/>
+            <a:ext cx="16822080" cy="1440000"/>
           </a:xfrm>
           <a:prstGeom prst="rect">
             <a:avLst/>
@@ -6948,8 +6989,8 @@
         </p:nvSpPr>
         <p:spPr>
           <a:xfrm>
-            <a:off x="468000" y="39312000"/>
-            <a:ext cx="14472000" cy="1440000"/>
+            <a:off x="12985919" y="39312000"/>
+            <a:ext cx="16822080" cy="1440000"/>
           </a:xfrm>
           <a:prstGeom prst="rect">
             <a:avLst/>
@@ -6998,7 +7039,7 @@
                 <a:latin typeface="Meiryo"/>
                 <a:ea typeface="Meiryo"/>
               </a:rPr>
-              <a:t>図: in vitro 注入の連続写真</a:t>
+              <a:t>図: in vivo マウス皮下デポ写真(大きく)</a:t>
             </a:r>
           </a:p>
         </p:txBody>
@@ -7006,353 +7047,6 @@
       <p:sp>
         <p:nvSpPr>
           <p:cNvPr id="73" name="Rounded Rectangle 72"/>
-          <p:cNvSpPr/>
-          <p:nvPr/>
-        </p:nvSpPr>
-        <p:spPr>
-          <a:xfrm>
-            <a:off x="15228000" y="37548000"/>
-            <a:ext cx="14688000" cy="3312000"/>
-          </a:xfrm>
-          <a:prstGeom prst="roundRect">
-            <a:avLst>
-              <a:gd name="adj" fmla="val 4000"/>
-            </a:avLst>
-          </a:prstGeom>
-          <a:solidFill>
-            <a:srgbClr val="FFE3D3"/>
-          </a:solidFill>
-          <a:ln w="12700">
-            <a:solidFill>
-              <a:srgbClr val="90A4B5"/>
-            </a:solidFill>
-          </a:ln>
-          <a:effectLst/>
-        </p:spPr>
-        <p:style>
-          <a:lnRef idx="1">
-            <a:schemeClr val="accent1"/>
-          </a:lnRef>
-          <a:fillRef idx="3">
-            <a:schemeClr val="accent1"/>
-          </a:fillRef>
-          <a:effectRef idx="2">
-            <a:schemeClr val="accent1"/>
-          </a:effectRef>
-          <a:fontRef idx="minor">
-            <a:schemeClr val="lt1"/>
-          </a:fontRef>
-        </p:style>
-        <p:txBody>
-          <a:bodyPr rtlCol="0" anchor="ctr"/>
-          <a:lstStyle/>
-          <a:p>
-            <a:pPr algn="ctr"/>
-          </a:p>
-        </p:txBody>
-      </p:sp>
-      <p:sp>
-        <p:nvSpPr>
-          <p:cNvPr id="74" name="Rectangle 73"/>
-          <p:cNvSpPr/>
-          <p:nvPr/>
-        </p:nvSpPr>
-        <p:spPr>
-          <a:xfrm>
-            <a:off x="15228000" y="37548000"/>
-            <a:ext cx="14688000" cy="324000"/>
-          </a:xfrm>
-          <a:prstGeom prst="rect">
-            <a:avLst/>
-          </a:prstGeom>
-          <a:solidFill>
-            <a:srgbClr val="EA580C"/>
-          </a:solidFill>
-          <a:ln>
-            <a:noFill/>
-          </a:ln>
-          <a:effectLst/>
-        </p:spPr>
-        <p:style>
-          <a:lnRef idx="1">
-            <a:schemeClr val="accent1"/>
-          </a:lnRef>
-          <a:fillRef idx="3">
-            <a:schemeClr val="accent1"/>
-          </a:fillRef>
-          <a:effectRef idx="2">
-            <a:schemeClr val="accent1"/>
-          </a:effectRef>
-          <a:fontRef idx="minor">
-            <a:schemeClr val="lt1"/>
-          </a:fontRef>
-        </p:style>
-        <p:txBody>
-          <a:bodyPr rtlCol="0" anchor="ctr"/>
-          <a:lstStyle/>
-          <a:p>
-            <a:pPr algn="ctr"/>
-          </a:p>
-        </p:txBody>
-      </p:sp>
-      <p:sp>
-        <p:nvSpPr>
-          <p:cNvPr id="75" name="TextBox 74"/>
-          <p:cNvSpPr txBox="1"/>
-          <p:nvPr/>
-        </p:nvSpPr>
-        <p:spPr>
-          <a:xfrm>
-            <a:off x="15264000" y="37548000"/>
-            <a:ext cx="14616000" cy="324000"/>
-          </a:xfrm>
-          <a:prstGeom prst="rect">
-            <a:avLst/>
-          </a:prstGeom>
-          <a:noFill/>
-        </p:spPr>
-        <p:txBody>
-          <a:bodyPr wrap="square" anchor="ctr" lIns="72000" rIns="72000" tIns="36000" bIns="36000">
-            <a:spAutoFit/>
-          </a:bodyPr>
-          <a:lstStyle/>
-          <a:p>
-            <a:pPr algn="l">
-              <a:spcBef>
-                <a:spcPts val="0"/>
-              </a:spcBef>
-              <a:spcAft>
-                <a:spcPts val="200"/>
-              </a:spcAft>
-            </a:pPr>
-            <a:r>
-              <a:rPr sz="1400" b="1">
-                <a:solidFill>
-                  <a:srgbClr val="FFFFFF"/>
-                </a:solidFill>
-                <a:latin typeface="Meiryo"/>
-                <a:ea typeface="Meiryo"/>
-              </a:rPr>
-              <a:t>C-2. in vivo マウス皮下注入試験（最重要）</a:t>
-            </a:r>
-          </a:p>
-        </p:txBody>
-      </p:sp>
-      <p:sp>
-        <p:nvSpPr>
-          <p:cNvPr id="76" name="TextBox 75"/>
-          <p:cNvSpPr txBox="1"/>
-          <p:nvPr/>
-        </p:nvSpPr>
-        <p:spPr>
-          <a:xfrm>
-            <a:off x="15282000" y="37908000"/>
-            <a:ext cx="14580000" cy="1368000"/>
-          </a:xfrm>
-          <a:prstGeom prst="rect">
-            <a:avLst/>
-          </a:prstGeom>
-          <a:noFill/>
-        </p:spPr>
-        <p:txBody>
-          <a:bodyPr wrap="square" anchor="t" lIns="72000" rIns="72000" tIns="36000" bIns="36000">
-            <a:spAutoFit/>
-          </a:bodyPr>
-          <a:lstStyle/>
-          <a:p>
-            <a:pPr algn="l">
-              <a:spcBef>
-                <a:spcPts val="0"/>
-              </a:spcBef>
-              <a:spcAft>
-                <a:spcPts val="200"/>
-              </a:spcAft>
-            </a:pPr>
-            <a:r>
-              <a:rPr sz="1200" b="0">
-                <a:solidFill>
-                  <a:srgbClr val="222222"/>
-                </a:solidFill>
-                <a:latin typeface="Meiryo"/>
-                <a:ea typeface="Meiryo"/>
-              </a:rPr>
-              <a:t>・香港大 Sang-Jin Lee 先生との共同研究</a:t>
-            </a:r>
-          </a:p>
-          <a:p>
-            <a:pPr algn="l">
-              <a:spcBef>
-                <a:spcPts val="0"/>
-              </a:spcBef>
-              <a:spcAft>
-                <a:spcPts val="200"/>
-              </a:spcAft>
-            </a:pPr>
-            <a:r>
-              <a:rPr sz="1200" b="0">
-                <a:solidFill>
-                  <a:srgbClr val="222222"/>
-                </a:solidFill>
-                <a:latin typeface="Meiryo"/>
-                <a:ea typeface="Meiryo"/>
-              </a:rPr>
-              <a:t>・PG4-0125(0.25 mL)をマウス背部皮下へ注入</a:t>
-            </a:r>
-          </a:p>
-          <a:p>
-            <a:pPr algn="l">
-              <a:spcBef>
-                <a:spcPts val="0"/>
-              </a:spcBef>
-              <a:spcAft>
-                <a:spcPts val="200"/>
-              </a:spcAft>
-            </a:pPr>
-            <a:r>
-              <a:rPr sz="1200" b="0">
-                <a:solidFill>
-                  <a:srgbClr val="222222"/>
-                </a:solidFill>
-                <a:latin typeface="Meiryo"/>
-                <a:ea typeface="Meiryo"/>
-              </a:rPr>
-              <a:t>・抵抗なく注入 → 生体内で即座に自己修復</a:t>
-            </a:r>
-          </a:p>
-          <a:p>
-            <a:pPr algn="l">
-              <a:spcBef>
-                <a:spcPts val="0"/>
-              </a:spcBef>
-              <a:spcAft>
-                <a:spcPts val="200"/>
-              </a:spcAft>
-            </a:pPr>
-            <a:r>
-              <a:rPr sz="1200" b="0">
-                <a:solidFill>
-                  <a:srgbClr val="222222"/>
-                </a:solidFill>
-                <a:latin typeface="Meiryo"/>
-                <a:ea typeface="Meiryo"/>
-              </a:rPr>
-              <a:t>→ 局所に明瞭なドーム状デポを形成し実用性を実証</a:t>
-            </a:r>
-          </a:p>
-        </p:txBody>
-      </p:sp>
-      <p:sp>
-        <p:nvSpPr>
-          <p:cNvPr id="77" name="Rectangle 76"/>
-          <p:cNvSpPr/>
-          <p:nvPr/>
-        </p:nvSpPr>
-        <p:spPr>
-          <a:xfrm>
-            <a:off x="15336000" y="39312000"/>
-            <a:ext cx="14472000" cy="1440000"/>
-          </a:xfrm>
-          <a:prstGeom prst="rect">
-            <a:avLst/>
-          </a:prstGeom>
-          <a:solidFill>
-            <a:srgbClr val="F0F3F6"/>
-          </a:solidFill>
-          <a:ln w="12700">
-            <a:solidFill>
-              <a:srgbClr val="B0BCC7"/>
-            </a:solidFill>
-          </a:ln>
-          <a:effectLst/>
-        </p:spPr>
-        <p:style>
-          <a:lnRef idx="1">
-            <a:schemeClr val="accent1"/>
-          </a:lnRef>
-          <a:fillRef idx="3">
-            <a:schemeClr val="accent1"/>
-          </a:fillRef>
-          <a:effectRef idx="2">
-            <a:schemeClr val="accent1"/>
-          </a:effectRef>
-          <a:fontRef idx="minor">
-            <a:schemeClr val="lt1"/>
-          </a:fontRef>
-        </p:style>
-        <p:txBody>
-          <a:bodyPr rtlCol="0" anchor="ctr"/>
-          <a:lstStyle/>
-          <a:p>
-            <a:pPr algn="ctr"/>
-          </a:p>
-        </p:txBody>
-      </p:sp>
-      <p:sp>
-        <p:nvSpPr>
-          <p:cNvPr id="78" name="TextBox 77"/>
-          <p:cNvSpPr txBox="1"/>
-          <p:nvPr/>
-        </p:nvSpPr>
-        <p:spPr>
-          <a:xfrm>
-            <a:off x="15336000" y="39312000"/>
-            <a:ext cx="14472000" cy="1440000"/>
-          </a:xfrm>
-          <a:prstGeom prst="rect">
-            <a:avLst/>
-          </a:prstGeom>
-          <a:noFill/>
-        </p:spPr>
-        <p:txBody>
-          <a:bodyPr wrap="square" anchor="ctr" lIns="72000" rIns="72000" tIns="36000" bIns="36000">
-            <a:spAutoFit/>
-          </a:bodyPr>
-          <a:lstStyle/>
-          <a:p>
-            <a:pPr algn="ctr">
-              <a:spcBef>
-                <a:spcPts val="0"/>
-              </a:spcBef>
-              <a:spcAft>
-                <a:spcPts val="200"/>
-              </a:spcAft>
-            </a:pPr>
-            <a:r>
-              <a:rPr sz="1100" b="1">
-                <a:solidFill>
-                  <a:srgbClr val="B0BCC7"/>
-                </a:solidFill>
-                <a:latin typeface="Meiryo"/>
-                <a:ea typeface="Meiryo"/>
-              </a:rPr>
-              <a:t>【図を差し込み】</a:t>
-            </a:r>
-          </a:p>
-          <a:p>
-            <a:pPr algn="ctr">
-              <a:spcBef>
-                <a:spcPts val="0"/>
-              </a:spcBef>
-              <a:spcAft>
-                <a:spcPts val="200"/>
-              </a:spcAft>
-            </a:pPr>
-            <a:r>
-              <a:rPr sz="1100" b="0">
-                <a:solidFill>
-                  <a:srgbClr val="6B7884"/>
-                </a:solidFill>
-                <a:latin typeface="Meiryo"/>
-                <a:ea typeface="Meiryo"/>
-              </a:rPr>
-              <a:t>図: in vivo マウス皮下デポ写真(大きく)</a:t>
-            </a:r>
-          </a:p>
-        </p:txBody>
-      </p:sp>
-      <p:sp>
-        <p:nvSpPr>
-          <p:cNvPr id="79" name="Rounded Rectangle 78"/>
           <p:cNvSpPr/>
           <p:nvPr/>
         </p:nvSpPr>
@@ -7400,7 +7094,7 @@
       </p:sp>
       <p:sp>
         <p:nvSpPr>
-          <p:cNvPr id="80" name="TextBox 79"/>
+          <p:cNvPr id="74" name="TextBox 73"/>
           <p:cNvSpPr txBox="1"/>
           <p:nvPr/>
         </p:nvSpPr>
@@ -7443,7 +7137,7 @@
       </p:sp>
       <p:sp>
         <p:nvSpPr>
-          <p:cNvPr id="81" name="TextBox 80"/>
+          <p:cNvPr id="75" name="TextBox 74"/>
           <p:cNvSpPr txBox="1"/>
           <p:nvPr/>
         </p:nvSpPr>

--- a/poster/poster_A0.pptx
+++ b/poster/poster_A0.pptx
@@ -5876,7 +5876,7 @@
         <p:spPr>
           <a:xfrm>
             <a:off x="20208000" y="9288000"/>
-            <a:ext cx="9780000" cy="27612000"/>
+            <a:ext cx="9780000" cy="13716000"/>
           </a:xfrm>
           <a:prstGeom prst="roundRect">
             <a:avLst>
@@ -6011,7 +6011,7 @@
         <p:spPr>
           <a:xfrm>
             <a:off x="20262000" y="9648000"/>
-            <a:ext cx="9672000" cy="1584000"/>
+            <a:ext cx="9672000" cy="1080000"/>
           </a:xfrm>
           <a:prstGeom prst="rect">
             <a:avLst/>
@@ -6060,7 +6060,7 @@
                 <a:latin typeface="Meiryo"/>
                 <a:ea typeface="Meiryo"/>
               </a:rPr>
-              <a:t>・1/5/9日とも死細胞はほぼ観察されず</a:t>
+              <a:t>・1/5/9日とも死細胞はほぼ無し</a:t>
             </a:r>
           </a:p>
           <a:p>
@@ -6080,27 +6080,7 @@
                 <a:latin typeface="Meiryo"/>
                 <a:ea typeface="Meiryo"/>
               </a:rPr>
-              <a:t>・溶解後も毒性なし</a:t>
-            </a:r>
-          </a:p>
-          <a:p>
-            <a:pPr algn="l">
-              <a:spcBef>
-                <a:spcPts val="0"/>
-              </a:spcBef>
-              <a:spcAft>
-                <a:spcPts val="200"/>
-              </a:spcAft>
-            </a:pPr>
-            <a:r>
-              <a:rPr sz="1200" b="0">
-                <a:solidFill>
-                  <a:srgbClr val="222222"/>
-                </a:solidFill>
-                <a:latin typeface="Meiryo"/>
-                <a:ea typeface="Meiryo"/>
-              </a:rPr>
-              <a:t>・→ 化学架橋剤なしで高い細胞生存率</a:t>
+              <a:t>・→ 化学架橋剤なしで高生存率</a:t>
             </a:r>
           </a:p>
         </p:txBody>
@@ -6113,8 +6093,8 @@
         </p:nvSpPr>
         <p:spPr>
           <a:xfrm>
-            <a:off x="20316000" y="11268000"/>
-            <a:ext cx="9564000" cy="25524000"/>
+            <a:off x="20316000" y="10764000"/>
+            <a:ext cx="9564000" cy="12132000"/>
           </a:xfrm>
           <a:prstGeom prst="rect">
             <a:avLst/>
@@ -6159,8 +6139,8 @@
         </p:nvSpPr>
         <p:spPr>
           <a:xfrm>
-            <a:off x="20316000" y="11268000"/>
-            <a:ext cx="9564000" cy="25524000"/>
+            <a:off x="20316000" y="10764000"/>
+            <a:ext cx="9564000" cy="12132000"/>
           </a:xfrm>
           <a:prstGeom prst="rect">
             <a:avLst/>
@@ -6209,8 +6189,7 @@
                 <a:latin typeface="Meiryo"/>
                 <a:ea typeface="Meiryo"/>
               </a:rPr>
-              <a:t>図: Live/Dead 蛍光像
-(PG3-1 / PG4-025 / PG4-0125 × 1・5・9日)</a:t>
+              <a:t>図: Live/Dead 蛍光像</a:t>
             </a:r>
           </a:p>
         </p:txBody>
@@ -6223,143 +6202,8 @@
         </p:nvSpPr>
         <p:spPr>
           <a:xfrm>
-            <a:off x="288000" y="37080000"/>
-            <a:ext cx="29700000" cy="3888000"/>
-          </a:xfrm>
-          <a:prstGeom prst="roundRect">
-            <a:avLst>
-              <a:gd name="adj" fmla="val 4000"/>
-            </a:avLst>
-          </a:prstGeom>
-          <a:solidFill>
-            <a:srgbClr val="FBF3EE"/>
-          </a:solidFill>
-          <a:ln w="25400">
-            <a:solidFill>
-              <a:srgbClr val="EA580C"/>
-            </a:solidFill>
-          </a:ln>
-          <a:effectLst/>
-        </p:spPr>
-        <p:style>
-          <a:lnRef idx="1">
-            <a:schemeClr val="accent1"/>
-          </a:lnRef>
-          <a:fillRef idx="3">
-            <a:schemeClr val="accent1"/>
-          </a:fillRef>
-          <a:effectRef idx="2">
-            <a:schemeClr val="accent1"/>
-          </a:effectRef>
-          <a:fontRef idx="minor">
-            <a:schemeClr val="lt1"/>
-          </a:fontRef>
-        </p:style>
-        <p:txBody>
-          <a:bodyPr rtlCol="0" anchor="ctr"/>
-          <a:lstStyle/>
-          <a:p>
-            <a:pPr algn="ctr"/>
-          </a:p>
-        </p:txBody>
-      </p:sp>
-      <p:sp>
-        <p:nvSpPr>
-          <p:cNvPr id="59" name="Rectangle 58"/>
-          <p:cNvSpPr/>
-          <p:nvPr/>
-        </p:nvSpPr>
-        <p:spPr>
-          <a:xfrm>
-            <a:off x="288000" y="37080000"/>
-            <a:ext cx="29700000" cy="396000"/>
-          </a:xfrm>
-          <a:prstGeom prst="rect">
-            <a:avLst/>
-          </a:prstGeom>
-          <a:solidFill>
-            <a:srgbClr val="33506B"/>
-          </a:solidFill>
-          <a:ln>
-            <a:noFill/>
-          </a:ln>
-          <a:effectLst/>
-        </p:spPr>
-        <p:style>
-          <a:lnRef idx="1">
-            <a:schemeClr val="accent1"/>
-          </a:lnRef>
-          <a:fillRef idx="3">
-            <a:schemeClr val="accent1"/>
-          </a:fillRef>
-          <a:effectRef idx="2">
-            <a:schemeClr val="accent1"/>
-          </a:effectRef>
-          <a:fontRef idx="minor">
-            <a:schemeClr val="lt1"/>
-          </a:fontRef>
-        </p:style>
-        <p:txBody>
-          <a:bodyPr rtlCol="0" anchor="ctr"/>
-          <a:lstStyle/>
-          <a:p>
-            <a:pPr algn="ctr"/>
-          </a:p>
-        </p:txBody>
-      </p:sp>
-      <p:sp>
-        <p:nvSpPr>
-          <p:cNvPr id="60" name="TextBox 59"/>
-          <p:cNvSpPr txBox="1"/>
-          <p:nvPr/>
-        </p:nvSpPr>
-        <p:spPr>
-          <a:xfrm>
-            <a:off x="432000" y="37080000"/>
-            <a:ext cx="29412000" cy="396000"/>
-          </a:xfrm>
-          <a:prstGeom prst="rect">
-            <a:avLst/>
-          </a:prstGeom>
-          <a:noFill/>
-        </p:spPr>
-        <p:txBody>
-          <a:bodyPr wrap="square" anchor="ctr" lIns="72000" rIns="72000" tIns="36000" bIns="36000">
-            <a:spAutoFit/>
-          </a:bodyPr>
-          <a:lstStyle/>
-          <a:p>
-            <a:pPr algn="l">
-              <a:spcBef>
-                <a:spcPts val="0"/>
-              </a:spcBef>
-              <a:spcAft>
-                <a:spcPts val="200"/>
-              </a:spcAft>
-            </a:pPr>
-            <a:r>
-              <a:rPr sz="1700" b="1">
-                <a:solidFill>
-                  <a:srgbClr val="FFFFFF"/>
-                </a:solidFill>
-                <a:latin typeface="Meiryo"/>
-                <a:ea typeface="Meiryo"/>
-              </a:rPr>
-              <a:t>C. 実用性評価 ｜ 注入試験（In vitro → In vivo）〔新データ・目玉〕</a:t>
-            </a:r>
-          </a:p>
-        </p:txBody>
-      </p:sp>
-      <p:sp>
-        <p:nvSpPr>
-          <p:cNvPr id="61" name="Rounded Rectangle 60"/>
-          <p:cNvSpPr/>
-          <p:nvPr/>
-        </p:nvSpPr>
-        <p:spPr>
-          <a:xfrm>
-            <a:off x="360000" y="37548000"/>
-            <a:ext cx="12337919" cy="3312000"/>
+            <a:off x="20208000" y="23184000"/>
+            <a:ext cx="9780000" cy="13716000"/>
           </a:xfrm>
           <a:prstGeom prst="roundRect">
             <a:avLst>
@@ -6400,14 +6244,14 @@
       </p:sp>
       <p:sp>
         <p:nvSpPr>
-          <p:cNvPr id="62" name="Rectangle 61"/>
+          <p:cNvPr id="59" name="Rectangle 58"/>
           <p:cNvSpPr/>
           <p:nvPr/>
         </p:nvSpPr>
         <p:spPr>
           <a:xfrm>
-            <a:off x="360000" y="37548000"/>
-            <a:ext cx="12337919" cy="324000"/>
+            <a:off x="20208000" y="23184000"/>
+            <a:ext cx="9780000" cy="324000"/>
           </a:xfrm>
           <a:prstGeom prst="rect">
             <a:avLst/>
@@ -6444,14 +6288,14 @@
       </p:sp>
       <p:sp>
         <p:nvSpPr>
-          <p:cNvPr id="63" name="TextBox 62"/>
+          <p:cNvPr id="60" name="TextBox 59"/>
           <p:cNvSpPr txBox="1"/>
           <p:nvPr/>
         </p:nvSpPr>
         <p:spPr>
           <a:xfrm>
-            <a:off x="396000" y="37548000"/>
-            <a:ext cx="12265919" cy="324000"/>
+            <a:off x="20244000" y="23184000"/>
+            <a:ext cx="9708000" cy="324000"/>
           </a:xfrm>
           <a:prstGeom prst="rect">
             <a:avLst/>
@@ -6480,21 +6324,21 @@
                 <a:latin typeface="Meiryo"/>
                 <a:ea typeface="Meiryo"/>
               </a:rPr>
-              <a:t>C-1. in vitro 注入試験</a:t>
-            </a:r>
-          </a:p>
-        </p:txBody>
-      </p:sp>
-      <p:sp>
-        <p:nvSpPr>
-          <p:cNvPr id="64" name="TextBox 63"/>
+              <a:t>⑤ in vitro 注入試験〔新〕</a:t>
+            </a:r>
+          </a:p>
+        </p:txBody>
+      </p:sp>
+      <p:sp>
+        <p:nvSpPr>
+          <p:cNvPr id="61" name="TextBox 60"/>
           <p:cNvSpPr txBox="1"/>
           <p:nvPr/>
         </p:nvSpPr>
         <p:spPr>
           <a:xfrm>
-            <a:off x="414000" y="37908000"/>
-            <a:ext cx="12229919" cy="1368000"/>
+            <a:off x="20262000" y="23544000"/>
+            <a:ext cx="9672000" cy="1080000"/>
           </a:xfrm>
           <a:prstGeom prst="rect">
             <a:avLst/>
@@ -6543,7 +6387,7 @@
                 <a:latin typeface="Meiryo"/>
                 <a:ea typeface="Meiryo"/>
               </a:rPr>
-              <a:t>・針内で高せん断 → ゾル化(シアシニング)</a:t>
+              <a:t>・針内でゾル化 → 吐出後に即ゲル化</a:t>
             </a:r>
           </a:p>
           <a:p>
@@ -6563,41 +6407,21 @@
                 <a:latin typeface="Meiryo"/>
                 <a:ea typeface="Meiryo"/>
               </a:rPr>
-              <a:t>・吐出直後に即ゲル化、液だれせず形状保持</a:t>
-            </a:r>
-          </a:p>
-          <a:p>
-            <a:pPr algn="l">
-              <a:spcBef>
-                <a:spcPts val="0"/>
-              </a:spcBef>
-              <a:spcAft>
-                <a:spcPts val="200"/>
-              </a:spcAft>
-            </a:pPr>
-            <a:r>
-              <a:rPr sz="1200" b="0">
-                <a:solidFill>
-                  <a:srgbClr val="222222"/>
-                </a:solidFill>
-                <a:latin typeface="Meiryo"/>
-                <a:ea typeface="Meiryo"/>
-              </a:rPr>
-              <a:t>→ レオロジー挙動を実機操作で可視化</a:t>
-            </a:r>
-          </a:p>
-        </p:txBody>
-      </p:sp>
-      <p:sp>
-        <p:nvSpPr>
-          <p:cNvPr id="65" name="Rectangle 64"/>
+              <a:t>・→ 液だれせず形状を保持(自己修復)</a:t>
+            </a:r>
+          </a:p>
+        </p:txBody>
+      </p:sp>
+      <p:sp>
+        <p:nvSpPr>
+          <p:cNvPr id="62" name="Rectangle 61"/>
           <p:cNvSpPr/>
           <p:nvPr/>
         </p:nvSpPr>
         <p:spPr>
           <a:xfrm>
-            <a:off x="468000" y="39312000"/>
-            <a:ext cx="12121919" cy="1440000"/>
+            <a:off x="20316000" y="24660000"/>
+            <a:ext cx="9564000" cy="12132000"/>
           </a:xfrm>
           <a:prstGeom prst="rect">
             <a:avLst/>
@@ -6636,14 +6460,14 @@
       </p:sp>
       <p:sp>
         <p:nvSpPr>
-          <p:cNvPr id="66" name="TextBox 65"/>
+          <p:cNvPr id="63" name="TextBox 62"/>
           <p:cNvSpPr txBox="1"/>
           <p:nvPr/>
         </p:nvSpPr>
         <p:spPr>
           <a:xfrm>
-            <a:off x="468000" y="39312000"/>
-            <a:ext cx="12121919" cy="1440000"/>
+            <a:off x="20316000" y="24660000"/>
+            <a:ext cx="9564000" cy="12132000"/>
           </a:xfrm>
           <a:prstGeom prst="rect">
             <a:avLst/>
@@ -6699,14 +6523,14 @@
       </p:sp>
       <p:sp>
         <p:nvSpPr>
-          <p:cNvPr id="67" name="Rounded Rectangle 66"/>
+          <p:cNvPr id="64" name="Rounded Rectangle 63"/>
           <p:cNvSpPr/>
           <p:nvPr/>
         </p:nvSpPr>
         <p:spPr>
           <a:xfrm>
-            <a:off x="12877919" y="37548000"/>
-            <a:ext cx="17038080" cy="3312000"/>
+            <a:off x="288000" y="37080000"/>
+            <a:ext cx="29700000" cy="3888000"/>
           </a:xfrm>
           <a:prstGeom prst="roundRect">
             <a:avLst>
@@ -6716,9 +6540,9 @@
           <a:solidFill>
             <a:srgbClr val="FFE3D3"/>
           </a:solidFill>
-          <a:ln w="12700">
+          <a:ln w="25400">
             <a:solidFill>
-              <a:srgbClr val="90A4B5"/>
+              <a:srgbClr val="EA580C"/>
             </a:solidFill>
           </a:ln>
           <a:effectLst/>
@@ -6747,14 +6571,14 @@
       </p:sp>
       <p:sp>
         <p:nvSpPr>
-          <p:cNvPr id="68" name="Rectangle 67"/>
+          <p:cNvPr id="65" name="Rectangle 64"/>
           <p:cNvSpPr/>
           <p:nvPr/>
         </p:nvSpPr>
         <p:spPr>
           <a:xfrm>
-            <a:off x="12877919" y="37548000"/>
-            <a:ext cx="17038080" cy="324000"/>
+            <a:off x="288000" y="37080000"/>
+            <a:ext cx="29700000" cy="396000"/>
           </a:xfrm>
           <a:prstGeom prst="rect">
             <a:avLst/>
@@ -6791,14 +6615,14 @@
       </p:sp>
       <p:sp>
         <p:nvSpPr>
-          <p:cNvPr id="69" name="TextBox 68"/>
+          <p:cNvPr id="66" name="TextBox 65"/>
           <p:cNvSpPr txBox="1"/>
           <p:nvPr/>
         </p:nvSpPr>
         <p:spPr>
           <a:xfrm>
-            <a:off x="12913919" y="37548000"/>
-            <a:ext cx="16966080" cy="324000"/>
+            <a:off x="432000" y="37080000"/>
+            <a:ext cx="29412000" cy="396000"/>
           </a:xfrm>
           <a:prstGeom prst="rect">
             <a:avLst/>
@@ -6820,28 +6644,28 @@
               </a:spcAft>
             </a:pPr>
             <a:r>
-              <a:rPr sz="1400" b="1">
+              <a:rPr sz="1700" b="1">
                 <a:solidFill>
                   <a:srgbClr val="FFFFFF"/>
                 </a:solidFill>
                 <a:latin typeface="Meiryo"/>
                 <a:ea typeface="Meiryo"/>
               </a:rPr>
-              <a:t>C-2. in vivo マウス皮下注入試験（最重要・目玉）</a:t>
-            </a:r>
-          </a:p>
-        </p:txBody>
-      </p:sp>
-      <p:sp>
-        <p:nvSpPr>
-          <p:cNvPr id="70" name="TextBox 69"/>
+              <a:t>C. In vivo マウス皮下注入試験（実用性・目玉）〔新データ〕</a:t>
+            </a:r>
+          </a:p>
+        </p:txBody>
+      </p:sp>
+      <p:sp>
+        <p:nvSpPr>
+          <p:cNvPr id="67" name="TextBox 66"/>
           <p:cNvSpPr txBox="1"/>
           <p:nvPr/>
         </p:nvSpPr>
         <p:spPr>
           <a:xfrm>
-            <a:off x="12931919" y="37908000"/>
-            <a:ext cx="16930080" cy="1368000"/>
+            <a:off x="468000" y="37548000"/>
+            <a:ext cx="16632000" cy="3348000"/>
           </a:xfrm>
           <a:prstGeom prst="rect">
             <a:avLst/>
@@ -6859,11 +6683,11 @@
                 <a:spcPts val="0"/>
               </a:spcBef>
               <a:spcAft>
-                <a:spcPts val="200"/>
-              </a:spcAft>
-            </a:pPr>
-            <a:r>
-              <a:rPr sz="1200" b="0">
+                <a:spcPts val="300"/>
+              </a:spcAft>
+            </a:pPr>
+            <a:r>
+              <a:rPr sz="1300" b="0">
                 <a:solidFill>
                   <a:srgbClr val="222222"/>
                 </a:solidFill>
@@ -6879,11 +6703,11 @@
                 <a:spcPts val="0"/>
               </a:spcBef>
               <a:spcAft>
-                <a:spcPts val="200"/>
-              </a:spcAft>
-            </a:pPr>
-            <a:r>
-              <a:rPr sz="1200" b="0">
+                <a:spcPts val="300"/>
+              </a:spcAft>
+            </a:pPr>
+            <a:r>
+              <a:rPr sz="1300" b="0">
                 <a:solidFill>
                   <a:srgbClr val="222222"/>
                 </a:solidFill>
@@ -6899,18 +6723,18 @@
                 <a:spcPts val="0"/>
               </a:spcBef>
               <a:spcAft>
-                <a:spcPts val="200"/>
-              </a:spcAft>
-            </a:pPr>
-            <a:r>
-              <a:rPr sz="1200" b="0">
+                <a:spcPts val="300"/>
+              </a:spcAft>
+            </a:pPr>
+            <a:r>
+              <a:rPr sz="1300" b="0">
                 <a:solidFill>
                   <a:srgbClr val="222222"/>
                 </a:solidFill>
                 <a:latin typeface="Meiryo"/>
                 <a:ea typeface="Meiryo"/>
               </a:rPr>
-              <a:t>・抵抗なく注入 → 生体内で即座に自己修復</a:t>
+              <a:t>・シアシニング性により抵抗なくスムーズに注入</a:t>
             </a:r>
           </a:p>
           <a:p>
@@ -6919,32 +6743,72 @@
                 <a:spcPts val="0"/>
               </a:spcBef>
               <a:spcAft>
-                <a:spcPts val="200"/>
-              </a:spcAft>
-            </a:pPr>
-            <a:r>
-              <a:rPr sz="1200" b="0">
+                <a:spcPts val="300"/>
+              </a:spcAft>
+            </a:pPr>
+            <a:r>
+              <a:rPr sz="1300" b="0">
                 <a:solidFill>
                   <a:srgbClr val="222222"/>
                 </a:solidFill>
                 <a:latin typeface="Meiryo"/>
                 <a:ea typeface="Meiryo"/>
               </a:rPr>
-              <a:t>→ 局所に明瞭なドーム状デポを形成し実用性を実証</a:t>
-            </a:r>
-          </a:p>
-        </p:txBody>
-      </p:sp>
-      <p:sp>
-        <p:nvSpPr>
-          <p:cNvPr id="71" name="Rectangle 70"/>
+              <a:t>・皮下で即座に超分子ネットワークを再構築(自己修復)</a:t>
+            </a:r>
+          </a:p>
+          <a:p>
+            <a:pPr algn="l">
+              <a:spcBef>
+                <a:spcPts val="0"/>
+              </a:spcBef>
+              <a:spcAft>
+                <a:spcPts val="300"/>
+              </a:spcAft>
+            </a:pPr>
+            <a:r>
+              <a:rPr sz="1300" b="1">
+                <a:solidFill>
+                  <a:srgbClr val="222222"/>
+                </a:solidFill>
+                <a:latin typeface="Meiryo"/>
+                <a:ea typeface="Meiryo"/>
+              </a:rPr>
+              <a:t>→ 局所に明瞭なドーム状デポを形成し定着</a:t>
+            </a:r>
+          </a:p>
+          <a:p>
+            <a:pPr algn="l">
+              <a:spcBef>
+                <a:spcPts val="0"/>
+              </a:spcBef>
+              <a:spcAft>
+                <a:spcPts val="300"/>
+              </a:spcAft>
+            </a:pPr>
+            <a:r>
+              <a:rPr sz="1300" b="1">
+                <a:solidFill>
+                  <a:srgbClr val="222222"/>
+                </a:solidFill>
+                <a:latin typeface="Meiryo"/>
+                <a:ea typeface="Meiryo"/>
+              </a:rPr>
+              <a:t>→ 低侵襲な局所投与キャリアとしての実用性を実証</a:t>
+            </a:r>
+          </a:p>
+        </p:txBody>
+      </p:sp>
+      <p:sp>
+        <p:nvSpPr>
+          <p:cNvPr id="68" name="Rectangle 67"/>
           <p:cNvSpPr/>
           <p:nvPr/>
         </p:nvSpPr>
         <p:spPr>
           <a:xfrm>
-            <a:off x="12985919" y="39312000"/>
-            <a:ext cx="16822080" cy="1440000"/>
+            <a:off x="18108000" y="37620000"/>
+            <a:ext cx="11286000" cy="3168000"/>
           </a:xfrm>
           <a:prstGeom prst="rect">
             <a:avLst/>
@@ -6983,14 +6847,14 @@
       </p:sp>
       <p:sp>
         <p:nvSpPr>
-          <p:cNvPr id="72" name="TextBox 71"/>
+          <p:cNvPr id="69" name="TextBox 68"/>
           <p:cNvSpPr txBox="1"/>
           <p:nvPr/>
         </p:nvSpPr>
         <p:spPr>
           <a:xfrm>
-            <a:off x="12985919" y="39312000"/>
-            <a:ext cx="16822080" cy="1440000"/>
+            <a:off x="18108000" y="37620000"/>
+            <a:ext cx="11286000" cy="3168000"/>
           </a:xfrm>
           <a:prstGeom prst="rect">
             <a:avLst/>
@@ -7046,7 +6910,7 @@
       </p:sp>
       <p:sp>
         <p:nvSpPr>
-          <p:cNvPr id="73" name="Rounded Rectangle 72"/>
+          <p:cNvPr id="70" name="Rounded Rectangle 69"/>
           <p:cNvSpPr/>
           <p:nvPr/>
         </p:nvSpPr>
@@ -7094,7 +6958,7 @@
       </p:sp>
       <p:sp>
         <p:nvSpPr>
-          <p:cNvPr id="74" name="TextBox 73"/>
+          <p:cNvPr id="71" name="TextBox 70"/>
           <p:cNvSpPr txBox="1"/>
           <p:nvPr/>
         </p:nvSpPr>
@@ -7137,7 +7001,7 @@
       </p:sp>
       <p:sp>
         <p:nvSpPr>
-          <p:cNvPr id="75" name="TextBox 74"/>
+          <p:cNvPr id="72" name="TextBox 71"/>
           <p:cNvSpPr txBox="1"/>
           <p:nvPr/>
         </p:nvSpPr>

--- a/poster/poster_A0.pptx
+++ b/poster/poster_A0.pptx
@@ -3380,7 +3380,7 @@
         <p:spPr>
           <a:xfrm>
             <a:off x="288000" y="3204000"/>
-            <a:ext cx="9780000" cy="5400000"/>
+            <a:ext cx="9780000" cy="4176000"/>
           </a:xfrm>
           <a:prstGeom prst="roundRect">
             <a:avLst>
@@ -3515,7 +3515,7 @@
         <p:spPr>
           <a:xfrm>
             <a:off x="342000" y="3564000"/>
-            <a:ext cx="9672000" cy="2808000"/>
+            <a:ext cx="9672000" cy="2232000"/>
           </a:xfrm>
           <a:prstGeom prst="rect">
             <a:avLst/>
@@ -3637,8 +3637,8 @@
         </p:nvSpPr>
         <p:spPr>
           <a:xfrm>
-            <a:off x="396000" y="6408000"/>
-            <a:ext cx="9564000" cy="2088000"/>
+            <a:off x="396000" y="5832000"/>
+            <a:ext cx="9564000" cy="1440000"/>
           </a:xfrm>
           <a:prstGeom prst="rect">
             <a:avLst/>
@@ -3683,8 +3683,8 @@
         </p:nvSpPr>
         <p:spPr>
           <a:xfrm>
-            <a:off x="396000" y="6408000"/>
-            <a:ext cx="9564000" cy="2088000"/>
+            <a:off x="396000" y="5832000"/>
+            <a:ext cx="9564000" cy="1440000"/>
           </a:xfrm>
           <a:prstGeom prst="rect">
             <a:avLst/>
@@ -3747,7 +3747,7 @@
         <p:spPr>
           <a:xfrm>
             <a:off x="10248000" y="3204000"/>
-            <a:ext cx="9780000" cy="5400000"/>
+            <a:ext cx="9780000" cy="4176000"/>
           </a:xfrm>
           <a:prstGeom prst="roundRect">
             <a:avLst>
@@ -3882,7 +3882,7 @@
         <p:spPr>
           <a:xfrm>
             <a:off x="10302000" y="3564000"/>
-            <a:ext cx="9672000" cy="2808000"/>
+            <a:ext cx="9672000" cy="2232000"/>
           </a:xfrm>
           <a:prstGeom prst="rect">
             <a:avLst/>
@@ -4004,8 +4004,8 @@
         </p:nvSpPr>
         <p:spPr>
           <a:xfrm>
-            <a:off x="10356000" y="6408000"/>
-            <a:ext cx="9564000" cy="2088000"/>
+            <a:off x="10356000" y="5832000"/>
+            <a:ext cx="9564000" cy="1440000"/>
           </a:xfrm>
           <a:prstGeom prst="rect">
             <a:avLst/>
@@ -4050,8 +4050,8 @@
         </p:nvSpPr>
         <p:spPr>
           <a:xfrm>
-            <a:off x="10356000" y="6408000"/>
-            <a:ext cx="9564000" cy="2088000"/>
+            <a:off x="10356000" y="5832000"/>
+            <a:ext cx="9564000" cy="1440000"/>
           </a:xfrm>
           <a:prstGeom prst="rect">
             <a:avLst/>
@@ -4114,7 +4114,7 @@
         <p:spPr>
           <a:xfrm>
             <a:off x="20208000" y="3204000"/>
-            <a:ext cx="9780000" cy="5400000"/>
+            <a:ext cx="9780000" cy="4176000"/>
           </a:xfrm>
           <a:prstGeom prst="roundRect">
             <a:avLst>
@@ -4249,7 +4249,7 @@
         <p:spPr>
           <a:xfrm>
             <a:off x="20262000" y="3564000"/>
-            <a:ext cx="9672000" cy="2808000"/>
+            <a:ext cx="9672000" cy="2232000"/>
           </a:xfrm>
           <a:prstGeom prst="rect">
             <a:avLst/>
@@ -4371,8 +4371,8 @@
         </p:nvSpPr>
         <p:spPr>
           <a:xfrm>
-            <a:off x="20316000" y="6408000"/>
-            <a:ext cx="9564000" cy="2088000"/>
+            <a:off x="20316000" y="5832000"/>
+            <a:ext cx="9564000" cy="1440000"/>
           </a:xfrm>
           <a:prstGeom prst="rect">
             <a:avLst/>
@@ -4417,8 +4417,8 @@
         </p:nvSpPr>
         <p:spPr>
           <a:xfrm>
-            <a:off x="20316000" y="6408000"/>
-            <a:ext cx="9564000" cy="2088000"/>
+            <a:off x="20316000" y="5832000"/>
+            <a:ext cx="9564000" cy="1440000"/>
           </a:xfrm>
           <a:prstGeom prst="rect">
             <a:avLst/>
@@ -4480,7 +4480,7 @@
         </p:nvSpPr>
         <p:spPr>
           <a:xfrm>
-            <a:off x="288000" y="8784000"/>
+            <a:off x="288000" y="7560000"/>
             <a:ext cx="29700000" cy="432000"/>
           </a:xfrm>
           <a:prstGeom prst="rect">
@@ -4524,7 +4524,7 @@
         </p:nvSpPr>
         <p:spPr>
           <a:xfrm>
-            <a:off x="432000" y="8784000"/>
+            <a:off x="432000" y="7560000"/>
             <a:ext cx="29412000" cy="432000"/>
           </a:xfrm>
           <a:prstGeom prst="rect">
@@ -4567,8 +4567,8 @@
         </p:nvSpPr>
         <p:spPr>
           <a:xfrm>
-            <a:off x="288000" y="9288000"/>
-            <a:ext cx="9780000" cy="13716000"/>
+            <a:off x="288000" y="8064000"/>
+            <a:ext cx="9780000" cy="12924000"/>
           </a:xfrm>
           <a:prstGeom prst="roundRect">
             <a:avLst>
@@ -4615,7 +4615,7 @@
         </p:nvSpPr>
         <p:spPr>
           <a:xfrm>
-            <a:off x="288000" y="9288000"/>
+            <a:off x="288000" y="8064000"/>
             <a:ext cx="9780000" cy="324000"/>
           </a:xfrm>
           <a:prstGeom prst="rect">
@@ -4659,7 +4659,7 @@
         </p:nvSpPr>
         <p:spPr>
           <a:xfrm>
-            <a:off x="324000" y="9288000"/>
+            <a:off x="324000" y="8064000"/>
             <a:ext cx="9708000" cy="324000"/>
           </a:xfrm>
           <a:prstGeom prst="rect">
@@ -4702,7 +4702,7 @@
         </p:nvSpPr>
         <p:spPr>
           <a:xfrm>
-            <a:off x="342000" y="9648000"/>
+            <a:off x="342000" y="8424000"/>
             <a:ext cx="9672000" cy="1080000"/>
           </a:xfrm>
           <a:prstGeom prst="rect">
@@ -4785,8 +4785,8 @@
         </p:nvSpPr>
         <p:spPr>
           <a:xfrm>
-            <a:off x="396000" y="10764000"/>
-            <a:ext cx="9564000" cy="12132000"/>
+            <a:off x="396000" y="9540000"/>
+            <a:ext cx="9564000" cy="11340000"/>
           </a:xfrm>
           <a:prstGeom prst="rect">
             <a:avLst/>
@@ -4831,8 +4831,8 @@
         </p:nvSpPr>
         <p:spPr>
           <a:xfrm>
-            <a:off x="396000" y="10764000"/>
-            <a:ext cx="9564000" cy="12132000"/>
+            <a:off x="396000" y="9540000"/>
+            <a:ext cx="9564000" cy="11340000"/>
           </a:xfrm>
           <a:prstGeom prst="rect">
             <a:avLst/>
@@ -4894,8 +4894,8 @@
         </p:nvSpPr>
         <p:spPr>
           <a:xfrm>
-            <a:off x="288000" y="23184000"/>
-            <a:ext cx="9780000" cy="13716000"/>
+            <a:off x="288000" y="21168000"/>
+            <a:ext cx="9780000" cy="12924000"/>
           </a:xfrm>
           <a:prstGeom prst="roundRect">
             <a:avLst>
@@ -4942,7 +4942,7 @@
         </p:nvSpPr>
         <p:spPr>
           <a:xfrm>
-            <a:off x="288000" y="23184000"/>
+            <a:off x="288000" y="21168000"/>
             <a:ext cx="9780000" cy="324000"/>
           </a:xfrm>
           <a:prstGeom prst="rect">
@@ -4986,7 +4986,7 @@
         </p:nvSpPr>
         <p:spPr>
           <a:xfrm>
-            <a:off x="324000" y="23184000"/>
+            <a:off x="324000" y="21168000"/>
             <a:ext cx="9708000" cy="324000"/>
           </a:xfrm>
           <a:prstGeom prst="rect">
@@ -5029,7 +5029,7 @@
         </p:nvSpPr>
         <p:spPr>
           <a:xfrm>
-            <a:off x="342000" y="23544000"/>
+            <a:off x="342000" y="21528000"/>
             <a:ext cx="9672000" cy="1080000"/>
           </a:xfrm>
           <a:prstGeom prst="rect">
@@ -5112,8 +5112,8 @@
         </p:nvSpPr>
         <p:spPr>
           <a:xfrm>
-            <a:off x="396000" y="24660000"/>
-            <a:ext cx="9564000" cy="12132000"/>
+            <a:off x="396000" y="22644000"/>
+            <a:ext cx="9564000" cy="11340000"/>
           </a:xfrm>
           <a:prstGeom prst="rect">
             <a:avLst/>
@@ -5158,8 +5158,8 @@
         </p:nvSpPr>
         <p:spPr>
           <a:xfrm>
-            <a:off x="396000" y="24660000"/>
-            <a:ext cx="9564000" cy="12132000"/>
+            <a:off x="396000" y="22644000"/>
+            <a:ext cx="9564000" cy="11340000"/>
           </a:xfrm>
           <a:prstGeom prst="rect">
             <a:avLst/>
@@ -5221,8 +5221,8 @@
         </p:nvSpPr>
         <p:spPr>
           <a:xfrm>
-            <a:off x="10248000" y="9288000"/>
-            <a:ext cx="9780000" cy="13716000"/>
+            <a:off x="10248000" y="8064000"/>
+            <a:ext cx="9780000" cy="12924000"/>
           </a:xfrm>
           <a:prstGeom prst="roundRect">
             <a:avLst>
@@ -5269,7 +5269,7 @@
         </p:nvSpPr>
         <p:spPr>
           <a:xfrm>
-            <a:off x="10248000" y="9288000"/>
+            <a:off x="10248000" y="8064000"/>
             <a:ext cx="9780000" cy="324000"/>
           </a:xfrm>
           <a:prstGeom prst="rect">
@@ -5313,7 +5313,7 @@
         </p:nvSpPr>
         <p:spPr>
           <a:xfrm>
-            <a:off x="10284000" y="9288000"/>
+            <a:off x="10284000" y="8064000"/>
             <a:ext cx="9708000" cy="324000"/>
           </a:xfrm>
           <a:prstGeom prst="rect">
@@ -5356,7 +5356,7 @@
         </p:nvSpPr>
         <p:spPr>
           <a:xfrm>
-            <a:off x="10302000" y="9648000"/>
+            <a:off x="10302000" y="8424000"/>
             <a:ext cx="9672000" cy="1080000"/>
           </a:xfrm>
           <a:prstGeom prst="rect">
@@ -5439,8 +5439,8 @@
         </p:nvSpPr>
         <p:spPr>
           <a:xfrm>
-            <a:off x="10356000" y="10764000"/>
-            <a:ext cx="9564000" cy="12132000"/>
+            <a:off x="10356000" y="9540000"/>
+            <a:ext cx="9564000" cy="11340000"/>
           </a:xfrm>
           <a:prstGeom prst="rect">
             <a:avLst/>
@@ -5485,8 +5485,8 @@
         </p:nvSpPr>
         <p:spPr>
           <a:xfrm>
-            <a:off x="10356000" y="10764000"/>
-            <a:ext cx="9564000" cy="12132000"/>
+            <a:off x="10356000" y="9540000"/>
+            <a:ext cx="9564000" cy="11340000"/>
           </a:xfrm>
           <a:prstGeom prst="rect">
             <a:avLst/>
@@ -5548,8 +5548,8 @@
         </p:nvSpPr>
         <p:spPr>
           <a:xfrm>
-            <a:off x="10248000" y="23184000"/>
-            <a:ext cx="9780000" cy="13716000"/>
+            <a:off x="10248000" y="21168000"/>
+            <a:ext cx="9780000" cy="12924000"/>
           </a:xfrm>
           <a:prstGeom prst="roundRect">
             <a:avLst>
@@ -5596,7 +5596,7 @@
         </p:nvSpPr>
         <p:spPr>
           <a:xfrm>
-            <a:off x="10248000" y="23184000"/>
+            <a:off x="10248000" y="21168000"/>
             <a:ext cx="9780000" cy="324000"/>
           </a:xfrm>
           <a:prstGeom prst="rect">
@@ -5640,7 +5640,7 @@
         </p:nvSpPr>
         <p:spPr>
           <a:xfrm>
-            <a:off x="10284000" y="23184000"/>
+            <a:off x="10284000" y="21168000"/>
             <a:ext cx="9708000" cy="324000"/>
           </a:xfrm>
           <a:prstGeom prst="rect">
@@ -5683,7 +5683,7 @@
         </p:nvSpPr>
         <p:spPr>
           <a:xfrm>
-            <a:off x="10302000" y="23544000"/>
+            <a:off x="10302000" y="21528000"/>
             <a:ext cx="9672000" cy="1080000"/>
           </a:xfrm>
           <a:prstGeom prst="rect">
@@ -5766,8 +5766,8 @@
         </p:nvSpPr>
         <p:spPr>
           <a:xfrm>
-            <a:off x="10356000" y="24660000"/>
-            <a:ext cx="9564000" cy="12132000"/>
+            <a:off x="10356000" y="22644000"/>
+            <a:ext cx="9564000" cy="11340000"/>
           </a:xfrm>
           <a:prstGeom prst="rect">
             <a:avLst/>
@@ -5812,8 +5812,8 @@
         </p:nvSpPr>
         <p:spPr>
           <a:xfrm>
-            <a:off x="10356000" y="24660000"/>
-            <a:ext cx="9564000" cy="12132000"/>
+            <a:off x="10356000" y="22644000"/>
+            <a:ext cx="9564000" cy="11340000"/>
           </a:xfrm>
           <a:prstGeom prst="rect">
             <a:avLst/>
@@ -5875,8 +5875,8 @@
         </p:nvSpPr>
         <p:spPr>
           <a:xfrm>
-            <a:off x="20208000" y="9288000"/>
-            <a:ext cx="9780000" cy="13716000"/>
+            <a:off x="20208000" y="8064000"/>
+            <a:ext cx="9780000" cy="12924000"/>
           </a:xfrm>
           <a:prstGeom prst="roundRect">
             <a:avLst>
@@ -5923,7 +5923,7 @@
         </p:nvSpPr>
         <p:spPr>
           <a:xfrm>
-            <a:off x="20208000" y="9288000"/>
+            <a:off x="20208000" y="8064000"/>
             <a:ext cx="9780000" cy="324000"/>
           </a:xfrm>
           <a:prstGeom prst="rect">
@@ -5967,7 +5967,7 @@
         </p:nvSpPr>
         <p:spPr>
           <a:xfrm>
-            <a:off x="20244000" y="9288000"/>
+            <a:off x="20244000" y="8064000"/>
             <a:ext cx="9708000" cy="324000"/>
           </a:xfrm>
           <a:prstGeom prst="rect">
@@ -6010,7 +6010,7 @@
         </p:nvSpPr>
         <p:spPr>
           <a:xfrm>
-            <a:off x="20262000" y="9648000"/>
+            <a:off x="20262000" y="8424000"/>
             <a:ext cx="9672000" cy="1080000"/>
           </a:xfrm>
           <a:prstGeom prst="rect">
@@ -6093,8 +6093,8 @@
         </p:nvSpPr>
         <p:spPr>
           <a:xfrm>
-            <a:off x="20316000" y="10764000"/>
-            <a:ext cx="9564000" cy="12132000"/>
+            <a:off x="20316000" y="9540000"/>
+            <a:ext cx="9564000" cy="11340000"/>
           </a:xfrm>
           <a:prstGeom prst="rect">
             <a:avLst/>
@@ -6139,8 +6139,8 @@
         </p:nvSpPr>
         <p:spPr>
           <a:xfrm>
-            <a:off x="20316000" y="10764000"/>
-            <a:ext cx="9564000" cy="12132000"/>
+            <a:off x="20316000" y="9540000"/>
+            <a:ext cx="9564000" cy="11340000"/>
           </a:xfrm>
           <a:prstGeom prst="rect">
             <a:avLst/>
@@ -6202,8 +6202,8 @@
         </p:nvSpPr>
         <p:spPr>
           <a:xfrm>
-            <a:off x="20208000" y="23184000"/>
-            <a:ext cx="9780000" cy="13716000"/>
+            <a:off x="20208000" y="21168000"/>
+            <a:ext cx="9780000" cy="12924000"/>
           </a:xfrm>
           <a:prstGeom prst="roundRect">
             <a:avLst>
@@ -6250,7 +6250,7 @@
         </p:nvSpPr>
         <p:spPr>
           <a:xfrm>
-            <a:off x="20208000" y="23184000"/>
+            <a:off x="20208000" y="21168000"/>
             <a:ext cx="9780000" cy="324000"/>
           </a:xfrm>
           <a:prstGeom prst="rect">
@@ -6294,7 +6294,7 @@
         </p:nvSpPr>
         <p:spPr>
           <a:xfrm>
-            <a:off x="20244000" y="23184000"/>
+            <a:off x="20244000" y="21168000"/>
             <a:ext cx="9708000" cy="324000"/>
           </a:xfrm>
           <a:prstGeom prst="rect">
@@ -6337,7 +6337,7 @@
         </p:nvSpPr>
         <p:spPr>
           <a:xfrm>
-            <a:off x="20262000" y="23544000"/>
+            <a:off x="20262000" y="21528000"/>
             <a:ext cx="9672000" cy="1080000"/>
           </a:xfrm>
           <a:prstGeom prst="rect">
@@ -6420,8 +6420,8 @@
         </p:nvSpPr>
         <p:spPr>
           <a:xfrm>
-            <a:off x="20316000" y="24660000"/>
-            <a:ext cx="9564000" cy="12132000"/>
+            <a:off x="20316000" y="22644000"/>
+            <a:ext cx="9564000" cy="11340000"/>
           </a:xfrm>
           <a:prstGeom prst="rect">
             <a:avLst/>
@@ -6466,8 +6466,8 @@
         </p:nvSpPr>
         <p:spPr>
           <a:xfrm>
-            <a:off x="20316000" y="24660000"/>
-            <a:ext cx="9564000" cy="12132000"/>
+            <a:off x="20316000" y="22644000"/>
+            <a:ext cx="9564000" cy="11340000"/>
           </a:xfrm>
           <a:prstGeom prst="rect">
             <a:avLst/>
@@ -6529,8 +6529,8 @@
         </p:nvSpPr>
         <p:spPr>
           <a:xfrm>
-            <a:off x="288000" y="37080000"/>
-            <a:ext cx="29700000" cy="3888000"/>
+            <a:off x="288000" y="34272000"/>
+            <a:ext cx="29700000" cy="6840000"/>
           </a:xfrm>
           <a:prstGeom prst="roundRect">
             <a:avLst>
@@ -6577,7 +6577,7 @@
         </p:nvSpPr>
         <p:spPr>
           <a:xfrm>
-            <a:off x="288000" y="37080000"/>
+            <a:off x="288000" y="34272000"/>
             <a:ext cx="29700000" cy="396000"/>
           </a:xfrm>
           <a:prstGeom prst="rect">
@@ -6621,7 +6621,7 @@
         </p:nvSpPr>
         <p:spPr>
           <a:xfrm>
-            <a:off x="432000" y="37080000"/>
+            <a:off x="432000" y="34272000"/>
             <a:ext cx="29412000" cy="396000"/>
           </a:xfrm>
           <a:prstGeom prst="rect">
@@ -6664,8 +6664,8 @@
         </p:nvSpPr>
         <p:spPr>
           <a:xfrm>
-            <a:off x="468000" y="37548000"/>
-            <a:ext cx="16632000" cy="3348000"/>
+            <a:off x="468000" y="34740000"/>
+            <a:ext cx="16632000" cy="6300000"/>
           </a:xfrm>
           <a:prstGeom prst="rect">
             <a:avLst/>
@@ -6807,8 +6807,8 @@
         </p:nvSpPr>
         <p:spPr>
           <a:xfrm>
-            <a:off x="18108000" y="37620000"/>
-            <a:ext cx="11286000" cy="3168000"/>
+            <a:off x="18108000" y="34812000"/>
+            <a:ext cx="11286000" cy="6120000"/>
           </a:xfrm>
           <a:prstGeom prst="rect">
             <a:avLst/>
@@ -6853,8 +6853,8 @@
         </p:nvSpPr>
         <p:spPr>
           <a:xfrm>
-            <a:off x="18108000" y="37620000"/>
-            <a:ext cx="11286000" cy="3168000"/>
+            <a:off x="18108000" y="34812000"/>
+            <a:ext cx="11286000" cy="6120000"/>
           </a:xfrm>
           <a:prstGeom prst="rect">
             <a:avLst/>
@@ -6916,8 +6916,8 @@
         </p:nvSpPr>
         <p:spPr>
           <a:xfrm>
-            <a:off x="288000" y="41148000"/>
-            <a:ext cx="29700000" cy="1368000"/>
+            <a:off x="288000" y="41292000"/>
+            <a:ext cx="29700000" cy="1224000"/>
           </a:xfrm>
           <a:prstGeom prst="roundRect">
             <a:avLst>
@@ -6964,7 +6964,7 @@
         </p:nvSpPr>
         <p:spPr>
           <a:xfrm>
-            <a:off x="396000" y="41220000"/>
+            <a:off x="396000" y="41364000"/>
             <a:ext cx="29484000" cy="648000"/>
           </a:xfrm>
           <a:prstGeom prst="rect">
@@ -7007,7 +7007,7 @@
         </p:nvSpPr>
         <p:spPr>
           <a:xfrm>
-            <a:off x="396000" y="41868000"/>
+            <a:off x="396000" y="42012000"/>
             <a:ext cx="29484000" cy="648000"/>
           </a:xfrm>
           <a:prstGeom prst="rect">

--- a/poster/poster_A0.pptx
+++ b/poster/poster_A0.pptx
@@ -3380,7 +3380,7 @@
         <p:spPr>
           <a:xfrm>
             <a:off x="288000" y="3204000"/>
-            <a:ext cx="9780000" cy="4176000"/>
+            <a:ext cx="9780000" cy="4968000"/>
           </a:xfrm>
           <a:prstGeom prst="roundRect">
             <a:avLst>
@@ -3515,7 +3515,7 @@
         <p:spPr>
           <a:xfrm>
             <a:off x="342000" y="3564000"/>
-            <a:ext cx="9672000" cy="2232000"/>
+            <a:ext cx="9672000" cy="2520000"/>
           </a:xfrm>
           <a:prstGeom prst="rect">
             <a:avLst/>
@@ -3637,8 +3637,8 @@
         </p:nvSpPr>
         <p:spPr>
           <a:xfrm>
-            <a:off x="396000" y="5832000"/>
-            <a:ext cx="9564000" cy="1440000"/>
+            <a:off x="396000" y="6120000"/>
+            <a:ext cx="9564000" cy="1944000"/>
           </a:xfrm>
           <a:prstGeom prst="rect">
             <a:avLst/>
@@ -3683,8 +3683,8 @@
         </p:nvSpPr>
         <p:spPr>
           <a:xfrm>
-            <a:off x="396000" y="5832000"/>
-            <a:ext cx="9564000" cy="1440000"/>
+            <a:off x="396000" y="6120000"/>
+            <a:ext cx="9564000" cy="1944000"/>
           </a:xfrm>
           <a:prstGeom prst="rect">
             <a:avLst/>
@@ -3747,7 +3747,7 @@
         <p:spPr>
           <a:xfrm>
             <a:off x="10248000" y="3204000"/>
-            <a:ext cx="9780000" cy="4176000"/>
+            <a:ext cx="9780000" cy="4968000"/>
           </a:xfrm>
           <a:prstGeom prst="roundRect">
             <a:avLst>
@@ -3882,7 +3882,7 @@
         <p:spPr>
           <a:xfrm>
             <a:off x="10302000" y="3564000"/>
-            <a:ext cx="9672000" cy="2232000"/>
+            <a:ext cx="9672000" cy="2520000"/>
           </a:xfrm>
           <a:prstGeom prst="rect">
             <a:avLst/>
@@ -4004,8 +4004,8 @@
         </p:nvSpPr>
         <p:spPr>
           <a:xfrm>
-            <a:off x="10356000" y="5832000"/>
-            <a:ext cx="9564000" cy="1440000"/>
+            <a:off x="10356000" y="6120000"/>
+            <a:ext cx="9564000" cy="1944000"/>
           </a:xfrm>
           <a:prstGeom prst="rect">
             <a:avLst/>
@@ -4050,8 +4050,8 @@
         </p:nvSpPr>
         <p:spPr>
           <a:xfrm>
-            <a:off x="10356000" y="5832000"/>
-            <a:ext cx="9564000" cy="1440000"/>
+            <a:off x="10356000" y="6120000"/>
+            <a:ext cx="9564000" cy="1944000"/>
           </a:xfrm>
           <a:prstGeom prst="rect">
             <a:avLst/>
@@ -4114,7 +4114,7 @@
         <p:spPr>
           <a:xfrm>
             <a:off x="20208000" y="3204000"/>
-            <a:ext cx="9780000" cy="4176000"/>
+            <a:ext cx="9780000" cy="4968000"/>
           </a:xfrm>
           <a:prstGeom prst="roundRect">
             <a:avLst>
@@ -4249,7 +4249,7 @@
         <p:spPr>
           <a:xfrm>
             <a:off x="20262000" y="3564000"/>
-            <a:ext cx="9672000" cy="2232000"/>
+            <a:ext cx="9672000" cy="2520000"/>
           </a:xfrm>
           <a:prstGeom prst="rect">
             <a:avLst/>
@@ -4371,8 +4371,8 @@
         </p:nvSpPr>
         <p:spPr>
           <a:xfrm>
-            <a:off x="20316000" y="5832000"/>
-            <a:ext cx="9564000" cy="1440000"/>
+            <a:off x="20316000" y="6120000"/>
+            <a:ext cx="9564000" cy="1944000"/>
           </a:xfrm>
           <a:prstGeom prst="rect">
             <a:avLst/>
@@ -4417,8 +4417,8 @@
         </p:nvSpPr>
         <p:spPr>
           <a:xfrm>
-            <a:off x="20316000" y="5832000"/>
-            <a:ext cx="9564000" cy="1440000"/>
+            <a:off x="20316000" y="6120000"/>
+            <a:ext cx="9564000" cy="1944000"/>
           </a:xfrm>
           <a:prstGeom prst="rect">
             <a:avLst/>
@@ -4480,7 +4480,7 @@
         </p:nvSpPr>
         <p:spPr>
           <a:xfrm>
-            <a:off x="288000" y="7560000"/>
+            <a:off x="288000" y="8352000"/>
             <a:ext cx="29700000" cy="432000"/>
           </a:xfrm>
           <a:prstGeom prst="rect">
@@ -4524,7 +4524,7 @@
         </p:nvSpPr>
         <p:spPr>
           <a:xfrm>
-            <a:off x="432000" y="7560000"/>
+            <a:off x="432000" y="8352000"/>
             <a:ext cx="29412000" cy="432000"/>
           </a:xfrm>
           <a:prstGeom prst="rect">
@@ -4567,8 +4567,8 @@
         </p:nvSpPr>
         <p:spPr>
           <a:xfrm>
-            <a:off x="288000" y="8064000"/>
-            <a:ext cx="9780000" cy="12924000"/>
+            <a:off x="288000" y="8856000"/>
+            <a:ext cx="9780000" cy="10632000"/>
           </a:xfrm>
           <a:prstGeom prst="roundRect">
             <a:avLst>
@@ -4615,7 +4615,7 @@
         </p:nvSpPr>
         <p:spPr>
           <a:xfrm>
-            <a:off x="288000" y="8064000"/>
+            <a:off x="288000" y="8856000"/>
             <a:ext cx="9780000" cy="324000"/>
           </a:xfrm>
           <a:prstGeom prst="rect">
@@ -4659,7 +4659,7 @@
         </p:nvSpPr>
         <p:spPr>
           <a:xfrm>
-            <a:off x="324000" y="8064000"/>
+            <a:off x="324000" y="8856000"/>
             <a:ext cx="9708000" cy="324000"/>
           </a:xfrm>
           <a:prstGeom prst="rect">
@@ -4702,8 +4702,8 @@
         </p:nvSpPr>
         <p:spPr>
           <a:xfrm>
-            <a:off x="342000" y="8424000"/>
-            <a:ext cx="9672000" cy="1080000"/>
+            <a:off x="342000" y="9216000"/>
+            <a:ext cx="9672000" cy="936000"/>
           </a:xfrm>
           <a:prstGeom prst="rect">
             <a:avLst/>
@@ -4785,8 +4785,8 @@
         </p:nvSpPr>
         <p:spPr>
           <a:xfrm>
-            <a:off x="396000" y="9540000"/>
-            <a:ext cx="9564000" cy="11340000"/>
+            <a:off x="396000" y="10187999"/>
+            <a:ext cx="9564000" cy="9192000"/>
           </a:xfrm>
           <a:prstGeom prst="rect">
             <a:avLst/>
@@ -4831,8 +4831,8 @@
         </p:nvSpPr>
         <p:spPr>
           <a:xfrm>
-            <a:off x="396000" y="9540000"/>
-            <a:ext cx="9564000" cy="11340000"/>
+            <a:off x="396000" y="10187999"/>
+            <a:ext cx="9564000" cy="9192000"/>
           </a:xfrm>
           <a:prstGeom prst="rect">
             <a:avLst/>
@@ -4894,8 +4894,8 @@
         </p:nvSpPr>
         <p:spPr>
           <a:xfrm>
-            <a:off x="288000" y="21168000"/>
-            <a:ext cx="9780000" cy="12924000"/>
+            <a:off x="288000" y="19667999"/>
+            <a:ext cx="9780000" cy="10632000"/>
           </a:xfrm>
           <a:prstGeom prst="roundRect">
             <a:avLst>
@@ -4942,7 +4942,7 @@
         </p:nvSpPr>
         <p:spPr>
           <a:xfrm>
-            <a:off x="288000" y="21168000"/>
+            <a:off x="288000" y="19667999"/>
             <a:ext cx="9780000" cy="324000"/>
           </a:xfrm>
           <a:prstGeom prst="rect">
@@ -4986,7 +4986,7 @@
         </p:nvSpPr>
         <p:spPr>
           <a:xfrm>
-            <a:off x="324000" y="21168000"/>
+            <a:off x="324000" y="19667999"/>
             <a:ext cx="9708000" cy="324000"/>
           </a:xfrm>
           <a:prstGeom prst="rect">
@@ -5016,7 +5016,7 @@
                 <a:latin typeface="Meiryo"/>
                 <a:ea typeface="Meiryo"/>
               </a:rPr>
-              <a:t>レオロジー｜自己修復性 (In vitro・目玉)</a:t>
+              <a:t>② 自己修復性 (レオロジー)〔目玉〕</a:t>
             </a:r>
           </a:p>
         </p:txBody>
@@ -5029,8 +5029,8 @@
         </p:nvSpPr>
         <p:spPr>
           <a:xfrm>
-            <a:off x="342000" y="21528000"/>
-            <a:ext cx="9672000" cy="1080000"/>
+            <a:off x="342000" y="20027999"/>
+            <a:ext cx="9672000" cy="936000"/>
           </a:xfrm>
           <a:prstGeom prst="rect">
             <a:avLst/>
@@ -5059,7 +5059,7 @@
                 <a:latin typeface="Meiryo"/>
                 <a:ea typeface="Meiryo"/>
               </a:rPr>
-              <a:t>・G′&gt;G″ 安定なゲルネットワーク</a:t>
+              <a:t>・せん断除去で G′ が即座に回復</a:t>
             </a:r>
           </a:p>
           <a:p>
@@ -5079,7 +5079,7 @@
                 <a:latin typeface="Meiryo"/>
                 <a:ea typeface="Meiryo"/>
               </a:rPr>
-              <a:t>・大歪500%でゾル化 → 低歪で即 G′回復</a:t>
+              <a:t>・元の強固なゲル構造へ再構築</a:t>
             </a:r>
           </a:p>
           <a:p>
@@ -5099,7 +5099,7 @@
                 <a:latin typeface="Meiryo"/>
                 <a:ea typeface="Meiryo"/>
               </a:rPr>
-              <a:t>・複数サイクルで再現 → 自己修復を実証</a:t>
+              <a:t>・複数サイクルで再現性よく回復</a:t>
             </a:r>
           </a:p>
         </p:txBody>
@@ -5112,8 +5112,8 @@
         </p:nvSpPr>
         <p:spPr>
           <a:xfrm>
-            <a:off x="396000" y="22644000"/>
-            <a:ext cx="9564000" cy="11340000"/>
+            <a:off x="396000" y="20999999"/>
+            <a:ext cx="9564000" cy="9192000"/>
           </a:xfrm>
           <a:prstGeom prst="rect">
             <a:avLst/>
@@ -5158,8 +5158,8 @@
         </p:nvSpPr>
         <p:spPr>
           <a:xfrm>
-            <a:off x="396000" y="22644000"/>
-            <a:ext cx="9564000" cy="11340000"/>
+            <a:off x="396000" y="20999999"/>
+            <a:ext cx="9564000" cy="9192000"/>
           </a:xfrm>
           <a:prstGeom prst="rect">
             <a:avLst/>
@@ -5208,7 +5208,7 @@
                 <a:latin typeface="Meiryo"/>
                 <a:ea typeface="Meiryo"/>
               </a:rPr>
-              <a:t>図: Time sweep / ステップ歪み</a:t>
+              <a:t>図: ステップ歪みサイクル (G′/G″)</a:t>
             </a:r>
           </a:p>
         </p:txBody>
@@ -5221,8 +5221,8 @@
         </p:nvSpPr>
         <p:spPr>
           <a:xfrm>
-            <a:off x="10248000" y="8064000"/>
-            <a:ext cx="9780000" cy="12924000"/>
+            <a:off x="288000" y="30480000"/>
+            <a:ext cx="9780000" cy="10632000"/>
           </a:xfrm>
           <a:prstGeom prst="roundRect">
             <a:avLst>
@@ -5269,7 +5269,7 @@
         </p:nvSpPr>
         <p:spPr>
           <a:xfrm>
-            <a:off x="10248000" y="8064000"/>
+            <a:off x="288000" y="30480000"/>
             <a:ext cx="9780000" cy="324000"/>
           </a:xfrm>
           <a:prstGeom prst="rect">
@@ -5313,7 +5313,7 @@
         </p:nvSpPr>
         <p:spPr>
           <a:xfrm>
-            <a:off x="10284000" y="8064000"/>
+            <a:off x="324000" y="30480000"/>
             <a:ext cx="9708000" cy="324000"/>
           </a:xfrm>
           <a:prstGeom prst="rect">
@@ -5343,7 +5343,7 @@
                 <a:latin typeface="Meiryo"/>
                 <a:ea typeface="Meiryo"/>
               </a:rPr>
-              <a:t>② ゲル化時間の制御 (In vitro)</a:t>
+              <a:t>③ シアシニング性 (レオロジー)</a:t>
             </a:r>
           </a:p>
         </p:txBody>
@@ -5356,8 +5356,8 @@
         </p:nvSpPr>
         <p:spPr>
           <a:xfrm>
-            <a:off x="10302000" y="8424000"/>
-            <a:ext cx="9672000" cy="1080000"/>
+            <a:off x="342000" y="30840000"/>
+            <a:ext cx="9672000" cy="936000"/>
           </a:xfrm>
           <a:prstGeom prst="rect">
             <a:avLst/>
@@ -5386,7 +5386,7 @@
                 <a:latin typeface="Meiryo"/>
                 <a:ea typeface="Meiryo"/>
               </a:rPr>
-              <a:t>・世代↑・PGD比↑でゲル化時間を短縮</a:t>
+              <a:t>・高せん断でゲルが流動化(ゾル化)</a:t>
             </a:r>
           </a:p>
           <a:p>
@@ -5406,7 +5406,7 @@
                 <a:latin typeface="Meiryo"/>
                 <a:ea typeface="Meiryo"/>
               </a:rPr>
-              <a:t>・PG4-025: 2分 / PG3-1: 67分</a:t>
+              <a:t>・粘度が急低下 → 注射針を通過可能</a:t>
             </a:r>
           </a:p>
           <a:p>
@@ -5426,7 +5426,7 @@
                 <a:latin typeface="Meiryo"/>
                 <a:ea typeface="Meiryo"/>
               </a:rPr>
-              <a:t>・架橋点密度に依存</a:t>
+              <a:t>・大歪500%で G′&lt;G″</a:t>
             </a:r>
           </a:p>
         </p:txBody>
@@ -5439,8 +5439,8 @@
         </p:nvSpPr>
         <p:spPr>
           <a:xfrm>
-            <a:off x="10356000" y="9540000"/>
-            <a:ext cx="9564000" cy="11340000"/>
+            <a:off x="396000" y="31812000"/>
+            <a:ext cx="9564000" cy="9192000"/>
           </a:xfrm>
           <a:prstGeom prst="rect">
             <a:avLst/>
@@ -5485,8 +5485,8 @@
         </p:nvSpPr>
         <p:spPr>
           <a:xfrm>
-            <a:off x="10356000" y="9540000"/>
-            <a:ext cx="9564000" cy="11340000"/>
+            <a:off x="396000" y="31812000"/>
+            <a:ext cx="9564000" cy="9192000"/>
           </a:xfrm>
           <a:prstGeom prst="rect">
             <a:avLst/>
@@ -5535,7 +5535,7 @@
                 <a:latin typeface="Meiryo"/>
                 <a:ea typeface="Meiryo"/>
               </a:rPr>
-              <a:t>図: ゲル化時間 vs アミノ基比</a:t>
+              <a:t>図: せん断速度-粘度 / 大歪での G′低下</a:t>
             </a:r>
           </a:p>
         </p:txBody>
@@ -5548,8 +5548,8 @@
         </p:nvSpPr>
         <p:spPr>
           <a:xfrm>
-            <a:off x="10248000" y="21168000"/>
-            <a:ext cx="9780000" cy="12924000"/>
+            <a:off x="10248000" y="8856000"/>
+            <a:ext cx="9780000" cy="16038000"/>
           </a:xfrm>
           <a:prstGeom prst="roundRect">
             <a:avLst>
@@ -5596,7 +5596,7 @@
         </p:nvSpPr>
         <p:spPr>
           <a:xfrm>
-            <a:off x="10248000" y="21168000"/>
+            <a:off x="10248000" y="8856000"/>
             <a:ext cx="9780000" cy="324000"/>
           </a:xfrm>
           <a:prstGeom prst="rect">
@@ -5640,7 +5640,7 @@
         </p:nvSpPr>
         <p:spPr>
           <a:xfrm>
-            <a:off x="10284000" y="21168000"/>
+            <a:off x="10284000" y="8856000"/>
             <a:ext cx="9708000" cy="324000"/>
           </a:xfrm>
           <a:prstGeom prst="rect">
@@ -5670,7 +5670,7 @@
                 <a:latin typeface="Meiryo"/>
                 <a:ea typeface="Meiryo"/>
               </a:rPr>
-              <a:t>③ in vitro 分解性〔新〕</a:t>
+              <a:t>④ In vitro 安全性｜Live/Dead〔新〕</a:t>
             </a:r>
           </a:p>
         </p:txBody>
@@ -5683,8 +5683,8 @@
         </p:nvSpPr>
         <p:spPr>
           <a:xfrm>
-            <a:off x="10302000" y="21528000"/>
-            <a:ext cx="9672000" cy="1080000"/>
+            <a:off x="10302000" y="9216000"/>
+            <a:ext cx="9672000" cy="1296000"/>
           </a:xfrm>
           <a:prstGeom prst="rect">
             <a:avLst/>
@@ -5713,7 +5713,7 @@
                 <a:latin typeface="Meiryo"/>
                 <a:ea typeface="Meiryo"/>
               </a:rPr>
-              <a:t>・37℃ PBS中で分解、滞留期間を制御</a:t>
+              <a:t>・D1細胞を3次元ゲル内に包埋し培養</a:t>
             </a:r>
           </a:p>
           <a:p>
@@ -5733,7 +5733,7 @@
                 <a:latin typeface="Meiryo"/>
                 <a:ea typeface="Meiryo"/>
               </a:rPr>
-              <a:t>・PG3-1:3日 / PG4-025:25日</a:t>
+              <a:t>・1/5/9日とも死細胞はほぼ観察されず</a:t>
             </a:r>
           </a:p>
           <a:p>
@@ -5753,7 +5753,27 @@
                 <a:latin typeface="Meiryo"/>
                 <a:ea typeface="Meiryo"/>
               </a:rPr>
-              <a:t>・→ 数日〜数週間で任意に制御</a:t>
+              <a:t>・溶解後も毒性なし</a:t>
+            </a:r>
+          </a:p>
+          <a:p>
+            <a:pPr algn="l">
+              <a:spcBef>
+                <a:spcPts val="0"/>
+              </a:spcBef>
+              <a:spcAft>
+                <a:spcPts val="200"/>
+              </a:spcAft>
+            </a:pPr>
+            <a:r>
+              <a:rPr sz="1200" b="0">
+                <a:solidFill>
+                  <a:srgbClr val="222222"/>
+                </a:solidFill>
+                <a:latin typeface="Meiryo"/>
+                <a:ea typeface="Meiryo"/>
+              </a:rPr>
+              <a:t>・→ 化学架橋剤なしで高い細胞生存率</a:t>
             </a:r>
           </a:p>
         </p:txBody>
@@ -5766,8 +5786,8 @@
         </p:nvSpPr>
         <p:spPr>
           <a:xfrm>
-            <a:off x="10356000" y="22644000"/>
-            <a:ext cx="9564000" cy="11340000"/>
+            <a:off x="10356000" y="10548000"/>
+            <a:ext cx="9564000" cy="14238000"/>
           </a:xfrm>
           <a:prstGeom prst="rect">
             <a:avLst/>
@@ -5812,8 +5832,8 @@
         </p:nvSpPr>
         <p:spPr>
           <a:xfrm>
-            <a:off x="10356000" y="22644000"/>
-            <a:ext cx="9564000" cy="11340000"/>
+            <a:off x="10356000" y="10548000"/>
+            <a:ext cx="9564000" cy="14238000"/>
           </a:xfrm>
           <a:prstGeom prst="rect">
             <a:avLst/>
@@ -5862,7 +5882,8 @@
                 <a:latin typeface="Meiryo"/>
                 <a:ea typeface="Meiryo"/>
               </a:rPr>
-              <a:t>図: 分解曲線</a:t>
+              <a:t>図: Live/Dead 蛍光像
+(PG3-1 / PG4-025 / PG4-0125 ×1・5・9日)</a:t>
             </a:r>
           </a:p>
         </p:txBody>
@@ -5875,8 +5896,8 @@
         </p:nvSpPr>
         <p:spPr>
           <a:xfrm>
-            <a:off x="20208000" y="8064000"/>
-            <a:ext cx="9780000" cy="12924000"/>
+            <a:off x="10248000" y="25074000"/>
+            <a:ext cx="9780000" cy="16038000"/>
           </a:xfrm>
           <a:prstGeom prst="roundRect">
             <a:avLst>
@@ -5923,7 +5944,7 @@
         </p:nvSpPr>
         <p:spPr>
           <a:xfrm>
-            <a:off x="20208000" y="8064000"/>
+            <a:off x="10248000" y="25074000"/>
             <a:ext cx="9780000" cy="324000"/>
           </a:xfrm>
           <a:prstGeom prst="rect">
@@ -5967,7 +5988,7 @@
         </p:nvSpPr>
         <p:spPr>
           <a:xfrm>
-            <a:off x="20244000" y="8064000"/>
+            <a:off x="10284000" y="25074000"/>
             <a:ext cx="9708000" cy="324000"/>
           </a:xfrm>
           <a:prstGeom prst="rect">
@@ -5997,7 +6018,7 @@
                 <a:latin typeface="Meiryo"/>
                 <a:ea typeface="Meiryo"/>
               </a:rPr>
-              <a:t>④ 生体適合性｜Live/Dead〔新〕</a:t>
+              <a:t>⑤ In vitro 分解性〔新〕</a:t>
             </a:r>
           </a:p>
         </p:txBody>
@@ -6010,8 +6031,8 @@
         </p:nvSpPr>
         <p:spPr>
           <a:xfrm>
-            <a:off x="20262000" y="8424000"/>
-            <a:ext cx="9672000" cy="1080000"/>
+            <a:off x="10302000" y="25434000"/>
+            <a:ext cx="9672000" cy="1296000"/>
           </a:xfrm>
           <a:prstGeom prst="rect">
             <a:avLst/>
@@ -6040,7 +6061,7 @@
                 <a:latin typeface="Meiryo"/>
                 <a:ea typeface="Meiryo"/>
               </a:rPr>
-              <a:t>・D1細胞を3次元ゲル内に包埋し培養</a:t>
+              <a:t>・37℃ PBS中の重量変化で分解を評価</a:t>
             </a:r>
           </a:p>
           <a:p>
@@ -6060,7 +6081,7 @@
                 <a:latin typeface="Meiryo"/>
                 <a:ea typeface="Meiryo"/>
               </a:rPr>
-              <a:t>・1/5/9日とも死細胞はほぼ無し</a:t>
+              <a:t>・PG3-1:3日 / PG4-0125:4日 / PG4-025:25日</a:t>
             </a:r>
           </a:p>
           <a:p>
@@ -6080,7 +6101,27 @@
                 <a:latin typeface="Meiryo"/>
                 <a:ea typeface="Meiryo"/>
               </a:rPr>
-              <a:t>・→ 化学架橋剤なしで高生存率</a:t>
+              <a:t>・世代・混合比で滞留期間を制御</a:t>
+            </a:r>
+          </a:p>
+          <a:p>
+            <a:pPr algn="l">
+              <a:spcBef>
+                <a:spcPts val="0"/>
+              </a:spcBef>
+              <a:spcAft>
+                <a:spcPts val="200"/>
+              </a:spcAft>
+            </a:pPr>
+            <a:r>
+              <a:rPr sz="1200" b="0">
+                <a:solidFill>
+                  <a:srgbClr val="222222"/>
+                </a:solidFill>
+                <a:latin typeface="Meiryo"/>
+                <a:ea typeface="Meiryo"/>
+              </a:rPr>
+              <a:t>・→ 数日〜数週間で任意に制御可能</a:t>
             </a:r>
           </a:p>
         </p:txBody>
@@ -6093,8 +6134,8 @@
         </p:nvSpPr>
         <p:spPr>
           <a:xfrm>
-            <a:off x="20316000" y="9540000"/>
-            <a:ext cx="9564000" cy="11340000"/>
+            <a:off x="10356000" y="26766000"/>
+            <a:ext cx="9564000" cy="14238000"/>
           </a:xfrm>
           <a:prstGeom prst="rect">
             <a:avLst/>
@@ -6139,8 +6180,8 @@
         </p:nvSpPr>
         <p:spPr>
           <a:xfrm>
-            <a:off x="20316000" y="9540000"/>
-            <a:ext cx="9564000" cy="11340000"/>
+            <a:off x="10356000" y="26766000"/>
+            <a:ext cx="9564000" cy="14238000"/>
           </a:xfrm>
           <a:prstGeom prst="rect">
             <a:avLst/>
@@ -6189,7 +6230,7 @@
                 <a:latin typeface="Meiryo"/>
                 <a:ea typeface="Meiryo"/>
               </a:rPr>
-              <a:t>図: Live/Dead 蛍光像</a:t>
+              <a:t>図: 分解曲線 (重量比 vs 時間)</a:t>
             </a:r>
           </a:p>
         </p:txBody>
@@ -6202,8 +6243,8 @@
         </p:nvSpPr>
         <p:spPr>
           <a:xfrm>
-            <a:off x="20208000" y="21168000"/>
-            <a:ext cx="9780000" cy="12924000"/>
+            <a:off x="20208000" y="8856000"/>
+            <a:ext cx="9780000" cy="16038000"/>
           </a:xfrm>
           <a:prstGeom prst="roundRect">
             <a:avLst>
@@ -6211,7 +6252,7 @@
             </a:avLst>
           </a:prstGeom>
           <a:solidFill>
-            <a:srgbClr val="DBEAFE"/>
+            <a:srgbClr val="FFE3D3"/>
           </a:solidFill>
           <a:ln w="12700">
             <a:solidFill>
@@ -6250,14 +6291,14 @@
         </p:nvSpPr>
         <p:spPr>
           <a:xfrm>
-            <a:off x="20208000" y="21168000"/>
+            <a:off x="20208000" y="8856000"/>
             <a:ext cx="9780000" cy="324000"/>
           </a:xfrm>
           <a:prstGeom prst="rect">
             <a:avLst/>
           </a:prstGeom>
           <a:solidFill>
-            <a:srgbClr val="2563EB"/>
+            <a:srgbClr val="EA580C"/>
           </a:solidFill>
           <a:ln>
             <a:noFill/>
@@ -6294,7 +6335,7 @@
         </p:nvSpPr>
         <p:spPr>
           <a:xfrm>
-            <a:off x="20244000" y="21168000"/>
+            <a:off x="20244000" y="8856000"/>
             <a:ext cx="9708000" cy="324000"/>
           </a:xfrm>
           <a:prstGeom prst="rect">
@@ -6324,7 +6365,7 @@
                 <a:latin typeface="Meiryo"/>
                 <a:ea typeface="Meiryo"/>
               </a:rPr>
-              <a:t>⑤ in vitro 注入試験〔新〕</a:t>
+              <a:t>⑥ 注入試験 (In vitro &amp; In vivo)〔新〕</a:t>
             </a:r>
           </a:p>
         </p:txBody>
@@ -6337,8 +6378,8 @@
         </p:nvSpPr>
         <p:spPr>
           <a:xfrm>
-            <a:off x="20262000" y="21528000"/>
-            <a:ext cx="9672000" cy="1080000"/>
+            <a:off x="20262000" y="9216000"/>
+            <a:ext cx="9672000" cy="1296000"/>
           </a:xfrm>
           <a:prstGeom prst="rect">
             <a:avLst/>
@@ -6367,7 +6408,7 @@
                 <a:latin typeface="Meiryo"/>
                 <a:ea typeface="Meiryo"/>
               </a:rPr>
-              <a:t>・赤色化PG4-0125をシリンジから吐出</a:t>
+              <a:t>・in vitro: 赤色化ゲルをシリンジ吐出→即ゲル化</a:t>
             </a:r>
           </a:p>
           <a:p>
@@ -6387,7 +6428,7 @@
                 <a:latin typeface="Meiryo"/>
                 <a:ea typeface="Meiryo"/>
               </a:rPr>
-              <a:t>・針内でゾル化 → 吐出後に即ゲル化</a:t>
+              <a:t>・in vivo: マウス背部皮下へ注入(0.25 mL)</a:t>
             </a:r>
           </a:p>
           <a:p>
@@ -6407,7 +6448,27 @@
                 <a:latin typeface="Meiryo"/>
                 <a:ea typeface="Meiryo"/>
               </a:rPr>
-              <a:t>・→ 液だれせず形状を保持(自己修復)</a:t>
+              <a:t>・抵抗なく注入→局所にドーム状デポを形成</a:t>
+            </a:r>
+          </a:p>
+          <a:p>
+            <a:pPr algn="l">
+              <a:spcBef>
+                <a:spcPts val="0"/>
+              </a:spcBef>
+              <a:spcAft>
+                <a:spcPts val="200"/>
+              </a:spcAft>
+            </a:pPr>
+            <a:r>
+              <a:rPr sz="1200" b="0">
+                <a:solidFill>
+                  <a:srgbClr val="222222"/>
+                </a:solidFill>
+                <a:latin typeface="Meiryo"/>
+                <a:ea typeface="Meiryo"/>
+              </a:rPr>
+              <a:t>・香港大 Sang-Jin Lee 先生と共同研究</a:t>
             </a:r>
           </a:p>
         </p:txBody>
@@ -6420,8 +6481,8 @@
         </p:nvSpPr>
         <p:spPr>
           <a:xfrm>
-            <a:off x="20316000" y="22644000"/>
-            <a:ext cx="9564000" cy="11340000"/>
+            <a:off x="20316000" y="10548000"/>
+            <a:ext cx="9564000" cy="14238000"/>
           </a:xfrm>
           <a:prstGeom prst="rect">
             <a:avLst/>
@@ -6466,8 +6527,8 @@
         </p:nvSpPr>
         <p:spPr>
           <a:xfrm>
-            <a:off x="20316000" y="22644000"/>
-            <a:ext cx="9564000" cy="11340000"/>
+            <a:off x="20316000" y="10548000"/>
+            <a:ext cx="9564000" cy="14238000"/>
           </a:xfrm>
           <a:prstGeom prst="rect">
             <a:avLst/>
@@ -6516,7 +6577,7 @@
                 <a:latin typeface="Meiryo"/>
                 <a:ea typeface="Meiryo"/>
               </a:rPr>
-              <a:t>図: in vitro 注入の連続写真</a:t>
+              <a:t>図: in vitro 注入写真 / in vivo マウス皮下デポ写真</a:t>
             </a:r>
           </a:p>
         </p:txBody>
@@ -6529,8 +6590,8 @@
         </p:nvSpPr>
         <p:spPr>
           <a:xfrm>
-            <a:off x="288000" y="34272000"/>
-            <a:ext cx="29700000" cy="6840000"/>
+            <a:off x="20208000" y="25074000"/>
+            <a:ext cx="9780000" cy="16038000"/>
           </a:xfrm>
           <a:prstGeom prst="roundRect">
             <a:avLst>
@@ -6540,9 +6601,9 @@
           <a:solidFill>
             <a:srgbClr val="FFE3D3"/>
           </a:solidFill>
-          <a:ln w="25400">
+          <a:ln w="12700">
             <a:solidFill>
-              <a:srgbClr val="EA580C"/>
+              <a:srgbClr val="90A4B5"/>
             </a:solidFill>
           </a:ln>
           <a:effectLst/>
@@ -6577,8 +6638,8 @@
         </p:nvSpPr>
         <p:spPr>
           <a:xfrm>
-            <a:off x="288000" y="34272000"/>
-            <a:ext cx="29700000" cy="396000"/>
+            <a:off x="20208000" y="25074000"/>
+            <a:ext cx="9780000" cy="324000"/>
           </a:xfrm>
           <a:prstGeom prst="rect">
             <a:avLst/>
@@ -6621,8 +6682,8 @@
         </p:nvSpPr>
         <p:spPr>
           <a:xfrm>
-            <a:off x="432000" y="34272000"/>
-            <a:ext cx="29412000" cy="396000"/>
+            <a:off x="20244000" y="25074000"/>
+            <a:ext cx="9708000" cy="324000"/>
           </a:xfrm>
           <a:prstGeom prst="rect">
             <a:avLst/>
@@ -6644,14 +6705,14 @@
               </a:spcAft>
             </a:pPr>
             <a:r>
-              <a:rPr sz="1700" b="1">
+              <a:rPr sz="1400" b="1">
                 <a:solidFill>
                   <a:srgbClr val="FFFFFF"/>
                 </a:solidFill>
                 <a:latin typeface="Meiryo"/>
                 <a:ea typeface="Meiryo"/>
               </a:rPr>
-              <a:t>C. In vivo マウス皮下注入試験（実用性・目玉）〔新データ〕</a:t>
+              <a:t>⑦ In vivo 分解試験 (H&amp;E染色)〔要データ〕</a:t>
             </a:r>
           </a:p>
         </p:txBody>
@@ -6664,8 +6725,8 @@
         </p:nvSpPr>
         <p:spPr>
           <a:xfrm>
-            <a:off x="468000" y="34740000"/>
-            <a:ext cx="16632000" cy="6300000"/>
+            <a:off x="20262000" y="25434000"/>
+            <a:ext cx="9672000" cy="1296000"/>
           </a:xfrm>
           <a:prstGeom prst="rect">
             <a:avLst/>
@@ -6683,18 +6744,18 @@
                 <a:spcPts val="0"/>
               </a:spcBef>
               <a:spcAft>
-                <a:spcPts val="300"/>
-              </a:spcAft>
-            </a:pPr>
-            <a:r>
-              <a:rPr sz="1300" b="0">
+                <a:spcPts val="200"/>
+              </a:spcAft>
+            </a:pPr>
+            <a:r>
+              <a:rPr sz="1200" b="0">
                 <a:solidFill>
                   <a:srgbClr val="222222"/>
                 </a:solidFill>
                 <a:latin typeface="Meiryo"/>
                 <a:ea typeface="Meiryo"/>
               </a:rPr>
-              <a:t>・香港大 Sang-Jin Lee 先生との共同研究</a:t>
+              <a:t>・皮下デポの経時的な分解・吸収を評価</a:t>
             </a:r>
           </a:p>
           <a:p>
@@ -6703,18 +6764,18 @@
                 <a:spcPts val="0"/>
               </a:spcBef>
               <a:spcAft>
-                <a:spcPts val="300"/>
-              </a:spcAft>
-            </a:pPr>
-            <a:r>
-              <a:rPr sz="1300" b="0">
+                <a:spcPts val="200"/>
+              </a:spcAft>
+            </a:pPr>
+            <a:r>
+              <a:rPr sz="1200" b="0">
                 <a:solidFill>
                   <a:srgbClr val="222222"/>
                 </a:solidFill>
                 <a:latin typeface="Meiryo"/>
                 <a:ea typeface="Meiryo"/>
               </a:rPr>
-              <a:t>・PG4-0125(0.25 mL)をマウス背部皮下へ注入</a:t>
+              <a:t>・H&amp;E染色で組織反応・分解挙動を観察</a:t>
             </a:r>
           </a:p>
           <a:p>
@@ -6723,18 +6784,18 @@
                 <a:spcPts val="0"/>
               </a:spcBef>
               <a:spcAft>
-                <a:spcPts val="300"/>
-              </a:spcAft>
-            </a:pPr>
-            <a:r>
-              <a:rPr sz="1300" b="0">
+                <a:spcPts val="200"/>
+              </a:spcAft>
+            </a:pPr>
+            <a:r>
+              <a:rPr sz="1200" b="0">
                 <a:solidFill>
                   <a:srgbClr val="222222"/>
                 </a:solidFill>
                 <a:latin typeface="Meiryo"/>
                 <a:ea typeface="Meiryo"/>
               </a:rPr>
-              <a:t>・シアシニング性により抵抗なくスムーズに注入</a:t>
+              <a:t>・(生分解性・生体適合性を組織学的に確認)</a:t>
             </a:r>
           </a:p>
           <a:p>
@@ -6743,58 +6804,18 @@
                 <a:spcPts val="0"/>
               </a:spcBef>
               <a:spcAft>
-                <a:spcPts val="300"/>
-              </a:spcAft>
-            </a:pPr>
-            <a:r>
-              <a:rPr sz="1300" b="0">
+                <a:spcPts val="200"/>
+              </a:spcAft>
+            </a:pPr>
+            <a:r>
+              <a:rPr sz="1200" b="0">
                 <a:solidFill>
                   <a:srgbClr val="222222"/>
                 </a:solidFill>
                 <a:latin typeface="Meiryo"/>
                 <a:ea typeface="Meiryo"/>
               </a:rPr>
-              <a:t>・皮下で即座に超分子ネットワークを再構築(自己修復)</a:t>
-            </a:r>
-          </a:p>
-          <a:p>
-            <a:pPr algn="l">
-              <a:spcBef>
-                <a:spcPts val="0"/>
-              </a:spcBef>
-              <a:spcAft>
-                <a:spcPts val="300"/>
-              </a:spcAft>
-            </a:pPr>
-            <a:r>
-              <a:rPr sz="1300" b="1">
-                <a:solidFill>
-                  <a:srgbClr val="222222"/>
-                </a:solidFill>
-                <a:latin typeface="Meiryo"/>
-                <a:ea typeface="Meiryo"/>
-              </a:rPr>
-              <a:t>→ 局所に明瞭なドーム状デポを形成し定着</a:t>
-            </a:r>
-          </a:p>
-          <a:p>
-            <a:pPr algn="l">
-              <a:spcBef>
-                <a:spcPts val="0"/>
-              </a:spcBef>
-              <a:spcAft>
-                <a:spcPts val="300"/>
-              </a:spcAft>
-            </a:pPr>
-            <a:r>
-              <a:rPr sz="1300" b="1">
-                <a:solidFill>
-                  <a:srgbClr val="222222"/>
-                </a:solidFill>
-                <a:latin typeface="Meiryo"/>
-                <a:ea typeface="Meiryo"/>
-              </a:rPr>
-              <a:t>→ 低侵襲な局所投与キャリアとしての実用性を実証</a:t>
+              <a:t>※元データは別途ご提供をお願いします</a:t>
             </a:r>
           </a:p>
         </p:txBody>
@@ -6807,8 +6828,8 @@
         </p:nvSpPr>
         <p:spPr>
           <a:xfrm>
-            <a:off x="18108000" y="34812000"/>
-            <a:ext cx="11286000" cy="6120000"/>
+            <a:off x="20316000" y="26766000"/>
+            <a:ext cx="9564000" cy="14238000"/>
           </a:xfrm>
           <a:prstGeom prst="rect">
             <a:avLst/>
@@ -6853,8 +6874,8 @@
         </p:nvSpPr>
         <p:spPr>
           <a:xfrm>
-            <a:off x="18108000" y="34812000"/>
-            <a:ext cx="11286000" cy="6120000"/>
+            <a:off x="20316000" y="26766000"/>
+            <a:ext cx="9564000" cy="14238000"/>
           </a:xfrm>
           <a:prstGeom prst="rect">
             <a:avLst/>
@@ -6903,7 +6924,7 @@
                 <a:latin typeface="Meiryo"/>
                 <a:ea typeface="Meiryo"/>
               </a:rPr>
-              <a:t>図: in vivo マウス皮下デポ写真(大きく)</a:t>
+              <a:t>図: H&amp;E染色 組織像 (経時)</a:t>
             </a:r>
           </a:p>
         </p:txBody>

--- a/poster/poster_A0.pptx
+++ b/poster/poster_A0.pptx
@@ -4561,14 +4561,275 @@
       </p:sp>
       <p:sp>
         <p:nvSpPr>
-          <p:cNvPr id="28" name="Rounded Rectangle 27"/>
+          <p:cNvPr id="28" name="Rectangle 27"/>
           <p:cNvSpPr/>
           <p:nvPr/>
         </p:nvSpPr>
         <p:spPr>
           <a:xfrm>
             <a:off x="288000" y="8856000"/>
-            <a:ext cx="9780000" cy="10632000"/>
+            <a:ext cx="9780000" cy="360000"/>
+          </a:xfrm>
+          <a:prstGeom prst="rect">
+            <a:avLst/>
+          </a:prstGeom>
+          <a:solidFill>
+            <a:srgbClr val="33506B"/>
+          </a:solidFill>
+          <a:ln>
+            <a:noFill/>
+          </a:ln>
+          <a:effectLst/>
+        </p:spPr>
+        <p:style>
+          <a:lnRef idx="1">
+            <a:schemeClr val="accent1"/>
+          </a:lnRef>
+          <a:fillRef idx="3">
+            <a:schemeClr val="accent1"/>
+          </a:fillRef>
+          <a:effectRef idx="2">
+            <a:schemeClr val="accent1"/>
+          </a:effectRef>
+          <a:fontRef idx="minor">
+            <a:schemeClr val="lt1"/>
+          </a:fontRef>
+        </p:style>
+        <p:txBody>
+          <a:bodyPr rtlCol="0" anchor="ctr"/>
+          <a:lstStyle/>
+          <a:p>
+            <a:pPr algn="ctr"/>
+          </a:p>
+        </p:txBody>
+      </p:sp>
+      <p:sp>
+        <p:nvSpPr>
+          <p:cNvPr id="29" name="TextBox 28"/>
+          <p:cNvSpPr txBox="1"/>
+          <p:nvPr/>
+        </p:nvSpPr>
+        <p:spPr>
+          <a:xfrm>
+            <a:off x="288000" y="8856000"/>
+            <a:ext cx="9780000" cy="360000"/>
+          </a:xfrm>
+          <a:prstGeom prst="rect">
+            <a:avLst/>
+          </a:prstGeom>
+          <a:noFill/>
+        </p:spPr>
+        <p:txBody>
+          <a:bodyPr wrap="square" anchor="ctr" lIns="72000" rIns="72000" tIns="36000" bIns="36000">
+            <a:spAutoFit/>
+          </a:bodyPr>
+          <a:lstStyle/>
+          <a:p>
+            <a:pPr algn="ctr">
+              <a:spcBef>
+                <a:spcPts val="0"/>
+              </a:spcBef>
+              <a:spcAft>
+                <a:spcPts val="200"/>
+              </a:spcAft>
+            </a:pPr>
+            <a:r>
+              <a:rPr sz="1500" b="1">
+                <a:solidFill>
+                  <a:srgbClr val="FFFFFF"/>
+                </a:solidFill>
+                <a:latin typeface="Meiryo"/>
+                <a:ea typeface="Meiryo"/>
+              </a:rPr>
+              <a:t>材料合成・インジェクタブル特性</a:t>
+            </a:r>
+          </a:p>
+        </p:txBody>
+      </p:sp>
+      <p:sp>
+        <p:nvSpPr>
+          <p:cNvPr id="30" name="Rectangle 29"/>
+          <p:cNvSpPr/>
+          <p:nvPr/>
+        </p:nvSpPr>
+        <p:spPr>
+          <a:xfrm>
+            <a:off x="10248000" y="8856000"/>
+            <a:ext cx="9780000" cy="360000"/>
+          </a:xfrm>
+          <a:prstGeom prst="rect">
+            <a:avLst/>
+          </a:prstGeom>
+          <a:solidFill>
+            <a:srgbClr val="2563EB"/>
+          </a:solidFill>
+          <a:ln>
+            <a:noFill/>
+          </a:ln>
+          <a:effectLst/>
+        </p:spPr>
+        <p:style>
+          <a:lnRef idx="1">
+            <a:schemeClr val="accent1"/>
+          </a:lnRef>
+          <a:fillRef idx="3">
+            <a:schemeClr val="accent1"/>
+          </a:fillRef>
+          <a:effectRef idx="2">
+            <a:schemeClr val="accent1"/>
+          </a:effectRef>
+          <a:fontRef idx="minor">
+            <a:schemeClr val="lt1"/>
+          </a:fontRef>
+        </p:style>
+        <p:txBody>
+          <a:bodyPr rtlCol="0" anchor="ctr"/>
+          <a:lstStyle/>
+          <a:p>
+            <a:pPr algn="ctr"/>
+          </a:p>
+        </p:txBody>
+      </p:sp>
+      <p:sp>
+        <p:nvSpPr>
+          <p:cNvPr id="31" name="TextBox 30"/>
+          <p:cNvSpPr txBox="1"/>
+          <p:nvPr/>
+        </p:nvSpPr>
+        <p:spPr>
+          <a:xfrm>
+            <a:off x="10248000" y="8856000"/>
+            <a:ext cx="9780000" cy="360000"/>
+          </a:xfrm>
+          <a:prstGeom prst="rect">
+            <a:avLst/>
+          </a:prstGeom>
+          <a:noFill/>
+        </p:spPr>
+        <p:txBody>
+          <a:bodyPr wrap="square" anchor="ctr" lIns="72000" rIns="72000" tIns="36000" bIns="36000">
+            <a:spAutoFit/>
+          </a:bodyPr>
+          <a:lstStyle/>
+          <a:p>
+            <a:pPr algn="ctr">
+              <a:spcBef>
+                <a:spcPts val="0"/>
+              </a:spcBef>
+              <a:spcAft>
+                <a:spcPts val="200"/>
+              </a:spcAft>
+            </a:pPr>
+            <a:r>
+              <a:rPr sz="1500" b="1">
+                <a:solidFill>
+                  <a:srgbClr val="FFFFFF"/>
+                </a:solidFill>
+                <a:latin typeface="Meiryo"/>
+                <a:ea typeface="Meiryo"/>
+              </a:rPr>
+              <a:t>In vitro 生体適合性評価</a:t>
+            </a:r>
+          </a:p>
+        </p:txBody>
+      </p:sp>
+      <p:sp>
+        <p:nvSpPr>
+          <p:cNvPr id="32" name="Rectangle 31"/>
+          <p:cNvSpPr/>
+          <p:nvPr/>
+        </p:nvSpPr>
+        <p:spPr>
+          <a:xfrm>
+            <a:off x="20208000" y="8856000"/>
+            <a:ext cx="9780000" cy="360000"/>
+          </a:xfrm>
+          <a:prstGeom prst="rect">
+            <a:avLst/>
+          </a:prstGeom>
+          <a:solidFill>
+            <a:srgbClr val="EA580C"/>
+          </a:solidFill>
+          <a:ln>
+            <a:noFill/>
+          </a:ln>
+          <a:effectLst/>
+        </p:spPr>
+        <p:style>
+          <a:lnRef idx="1">
+            <a:schemeClr val="accent1"/>
+          </a:lnRef>
+          <a:fillRef idx="3">
+            <a:schemeClr val="accent1"/>
+          </a:fillRef>
+          <a:effectRef idx="2">
+            <a:schemeClr val="accent1"/>
+          </a:effectRef>
+          <a:fontRef idx="minor">
+            <a:schemeClr val="lt1"/>
+          </a:fontRef>
+        </p:style>
+        <p:txBody>
+          <a:bodyPr rtlCol="0" anchor="ctr"/>
+          <a:lstStyle/>
+          <a:p>
+            <a:pPr algn="ctr"/>
+          </a:p>
+        </p:txBody>
+      </p:sp>
+      <p:sp>
+        <p:nvSpPr>
+          <p:cNvPr id="33" name="TextBox 32"/>
+          <p:cNvSpPr txBox="1"/>
+          <p:nvPr/>
+        </p:nvSpPr>
+        <p:spPr>
+          <a:xfrm>
+            <a:off x="20208000" y="8856000"/>
+            <a:ext cx="9780000" cy="360000"/>
+          </a:xfrm>
+          <a:prstGeom prst="rect">
+            <a:avLst/>
+          </a:prstGeom>
+          <a:noFill/>
+        </p:spPr>
+        <p:txBody>
+          <a:bodyPr wrap="square" anchor="ctr" lIns="72000" rIns="72000" tIns="36000" bIns="36000">
+            <a:spAutoFit/>
+          </a:bodyPr>
+          <a:lstStyle/>
+          <a:p>
+            <a:pPr algn="ctr">
+              <a:spcBef>
+                <a:spcPts val="0"/>
+              </a:spcBef>
+              <a:spcAft>
+                <a:spcPts val="200"/>
+              </a:spcAft>
+            </a:pPr>
+            <a:r>
+              <a:rPr sz="1500" b="1">
+                <a:solidFill>
+                  <a:srgbClr val="FFFFFF"/>
+                </a:solidFill>
+                <a:latin typeface="Meiryo"/>
+                <a:ea typeface="Meiryo"/>
+              </a:rPr>
+              <a:t>実用性評価 (In vitro / In vivo)</a:t>
+            </a:r>
+          </a:p>
+        </p:txBody>
+      </p:sp>
+      <p:sp>
+        <p:nvSpPr>
+          <p:cNvPr id="34" name="Rounded Rectangle 33"/>
+          <p:cNvSpPr/>
+          <p:nvPr/>
+        </p:nvSpPr>
+        <p:spPr>
+          <a:xfrm>
+            <a:off x="288000" y="9360000"/>
+            <a:ext cx="9780000" cy="10464000"/>
           </a:xfrm>
           <a:prstGeom prst="roundRect">
             <a:avLst>
@@ -4609,13 +4870,13 @@
       </p:sp>
       <p:sp>
         <p:nvSpPr>
-          <p:cNvPr id="29" name="Rectangle 28"/>
+          <p:cNvPr id="35" name="Rectangle 34"/>
           <p:cNvSpPr/>
           <p:nvPr/>
         </p:nvSpPr>
         <p:spPr>
           <a:xfrm>
-            <a:off x="288000" y="8856000"/>
+            <a:off x="288000" y="9360000"/>
             <a:ext cx="9780000" cy="324000"/>
           </a:xfrm>
           <a:prstGeom prst="rect">
@@ -4653,13 +4914,13 @@
       </p:sp>
       <p:sp>
         <p:nvSpPr>
-          <p:cNvPr id="30" name="TextBox 29"/>
+          <p:cNvPr id="36" name="TextBox 35"/>
           <p:cNvSpPr txBox="1"/>
           <p:nvPr/>
         </p:nvSpPr>
         <p:spPr>
           <a:xfrm>
-            <a:off x="324000" y="8856000"/>
+            <a:off x="324000" y="9360000"/>
             <a:ext cx="9708000" cy="324000"/>
           </a:xfrm>
           <a:prstGeom prst="rect">
@@ -4696,13 +4957,13 @@
       </p:sp>
       <p:sp>
         <p:nvSpPr>
-          <p:cNvPr id="31" name="TextBox 30"/>
+          <p:cNvPr id="37" name="TextBox 36"/>
           <p:cNvSpPr txBox="1"/>
           <p:nvPr/>
         </p:nvSpPr>
         <p:spPr>
           <a:xfrm>
-            <a:off x="342000" y="9216000"/>
+            <a:off x="342000" y="9720000"/>
             <a:ext cx="9672000" cy="936000"/>
           </a:xfrm>
           <a:prstGeom prst="rect">
@@ -4779,14 +5040,14 @@
       </p:sp>
       <p:sp>
         <p:nvSpPr>
-          <p:cNvPr id="32" name="Rectangle 31"/>
+          <p:cNvPr id="38" name="Rectangle 37"/>
           <p:cNvSpPr/>
           <p:nvPr/>
         </p:nvSpPr>
         <p:spPr>
           <a:xfrm>
-            <a:off x="396000" y="10187999"/>
-            <a:ext cx="9564000" cy="9192000"/>
+            <a:off x="396000" y="10692000"/>
+            <a:ext cx="9564000" cy="9024000"/>
           </a:xfrm>
           <a:prstGeom prst="rect">
             <a:avLst/>
@@ -4825,14 +5086,14 @@
       </p:sp>
       <p:sp>
         <p:nvSpPr>
-          <p:cNvPr id="33" name="TextBox 32"/>
+          <p:cNvPr id="39" name="TextBox 38"/>
           <p:cNvSpPr txBox="1"/>
           <p:nvPr/>
         </p:nvSpPr>
         <p:spPr>
           <a:xfrm>
-            <a:off x="396000" y="10187999"/>
-            <a:ext cx="9564000" cy="9192000"/>
+            <a:off x="396000" y="10692000"/>
+            <a:ext cx="9564000" cy="9024000"/>
           </a:xfrm>
           <a:prstGeom prst="rect">
             <a:avLst/>
@@ -4888,14 +5149,14 @@
       </p:sp>
       <p:sp>
         <p:nvSpPr>
-          <p:cNvPr id="34" name="Rounded Rectangle 33"/>
+          <p:cNvPr id="40" name="Rounded Rectangle 39"/>
           <p:cNvSpPr/>
           <p:nvPr/>
         </p:nvSpPr>
         <p:spPr>
           <a:xfrm>
-            <a:off x="288000" y="19667999"/>
-            <a:ext cx="9780000" cy="10632000"/>
+            <a:off x="288000" y="20004000"/>
+            <a:ext cx="9780000" cy="10464000"/>
           </a:xfrm>
           <a:prstGeom prst="roundRect">
             <a:avLst>
@@ -4936,13 +5197,13 @@
       </p:sp>
       <p:sp>
         <p:nvSpPr>
-          <p:cNvPr id="35" name="Rectangle 34"/>
+          <p:cNvPr id="41" name="Rectangle 40"/>
           <p:cNvSpPr/>
           <p:nvPr/>
         </p:nvSpPr>
         <p:spPr>
           <a:xfrm>
-            <a:off x="288000" y="19667999"/>
+            <a:off x="288000" y="20004000"/>
             <a:ext cx="9780000" cy="324000"/>
           </a:xfrm>
           <a:prstGeom prst="rect">
@@ -4980,13 +5241,13 @@
       </p:sp>
       <p:sp>
         <p:nvSpPr>
-          <p:cNvPr id="36" name="TextBox 35"/>
+          <p:cNvPr id="42" name="TextBox 41"/>
           <p:cNvSpPr txBox="1"/>
           <p:nvPr/>
         </p:nvSpPr>
         <p:spPr>
           <a:xfrm>
-            <a:off x="324000" y="19667999"/>
+            <a:off x="324000" y="20004000"/>
             <a:ext cx="9708000" cy="324000"/>
           </a:xfrm>
           <a:prstGeom prst="rect">
@@ -5023,13 +5284,13 @@
       </p:sp>
       <p:sp>
         <p:nvSpPr>
-          <p:cNvPr id="37" name="TextBox 36"/>
+          <p:cNvPr id="43" name="TextBox 42"/>
           <p:cNvSpPr txBox="1"/>
           <p:nvPr/>
         </p:nvSpPr>
         <p:spPr>
           <a:xfrm>
-            <a:off x="342000" y="20027999"/>
+            <a:off x="342000" y="20364000"/>
             <a:ext cx="9672000" cy="936000"/>
           </a:xfrm>
           <a:prstGeom prst="rect">
@@ -5106,14 +5367,14 @@
       </p:sp>
       <p:sp>
         <p:nvSpPr>
-          <p:cNvPr id="38" name="Rectangle 37"/>
+          <p:cNvPr id="44" name="Rectangle 43"/>
           <p:cNvSpPr/>
           <p:nvPr/>
         </p:nvSpPr>
         <p:spPr>
           <a:xfrm>
-            <a:off x="396000" y="20999999"/>
-            <a:ext cx="9564000" cy="9192000"/>
+            <a:off x="396000" y="21336000"/>
+            <a:ext cx="9564000" cy="9024000"/>
           </a:xfrm>
           <a:prstGeom prst="rect">
             <a:avLst/>
@@ -5152,14 +5413,14 @@
       </p:sp>
       <p:sp>
         <p:nvSpPr>
-          <p:cNvPr id="39" name="TextBox 38"/>
+          <p:cNvPr id="45" name="TextBox 44"/>
           <p:cNvSpPr txBox="1"/>
           <p:nvPr/>
         </p:nvSpPr>
         <p:spPr>
           <a:xfrm>
-            <a:off x="396000" y="20999999"/>
-            <a:ext cx="9564000" cy="9192000"/>
+            <a:off x="396000" y="21336000"/>
+            <a:ext cx="9564000" cy="9024000"/>
           </a:xfrm>
           <a:prstGeom prst="rect">
             <a:avLst/>
@@ -5215,14 +5476,14 @@
       </p:sp>
       <p:sp>
         <p:nvSpPr>
-          <p:cNvPr id="40" name="Rounded Rectangle 39"/>
+          <p:cNvPr id="46" name="Rounded Rectangle 45"/>
           <p:cNvSpPr/>
           <p:nvPr/>
         </p:nvSpPr>
         <p:spPr>
           <a:xfrm>
-            <a:off x="288000" y="30480000"/>
-            <a:ext cx="9780000" cy="10632000"/>
+            <a:off x="288000" y="30648000"/>
+            <a:ext cx="9780000" cy="10464000"/>
           </a:xfrm>
           <a:prstGeom prst="roundRect">
             <a:avLst>
@@ -5263,13 +5524,13 @@
       </p:sp>
       <p:sp>
         <p:nvSpPr>
-          <p:cNvPr id="41" name="Rectangle 40"/>
+          <p:cNvPr id="47" name="Rectangle 46"/>
           <p:cNvSpPr/>
           <p:nvPr/>
         </p:nvSpPr>
         <p:spPr>
           <a:xfrm>
-            <a:off x="288000" y="30480000"/>
+            <a:off x="288000" y="30648000"/>
             <a:ext cx="9780000" cy="324000"/>
           </a:xfrm>
           <a:prstGeom prst="rect">
@@ -5307,13 +5568,13 @@
       </p:sp>
       <p:sp>
         <p:nvSpPr>
-          <p:cNvPr id="42" name="TextBox 41"/>
+          <p:cNvPr id="48" name="TextBox 47"/>
           <p:cNvSpPr txBox="1"/>
           <p:nvPr/>
         </p:nvSpPr>
         <p:spPr>
           <a:xfrm>
-            <a:off x="324000" y="30480000"/>
+            <a:off x="324000" y="30648000"/>
             <a:ext cx="9708000" cy="324000"/>
           </a:xfrm>
           <a:prstGeom prst="rect">
@@ -5350,13 +5611,13 @@
       </p:sp>
       <p:sp>
         <p:nvSpPr>
-          <p:cNvPr id="43" name="TextBox 42"/>
+          <p:cNvPr id="49" name="TextBox 48"/>
           <p:cNvSpPr txBox="1"/>
           <p:nvPr/>
         </p:nvSpPr>
         <p:spPr>
           <a:xfrm>
-            <a:off x="342000" y="30840000"/>
+            <a:off x="342000" y="31008000"/>
             <a:ext cx="9672000" cy="936000"/>
           </a:xfrm>
           <a:prstGeom prst="rect">
@@ -5433,14 +5694,14 @@
       </p:sp>
       <p:sp>
         <p:nvSpPr>
-          <p:cNvPr id="44" name="Rectangle 43"/>
+          <p:cNvPr id="50" name="Rectangle 49"/>
           <p:cNvSpPr/>
           <p:nvPr/>
         </p:nvSpPr>
         <p:spPr>
           <a:xfrm>
-            <a:off x="396000" y="31812000"/>
-            <a:ext cx="9564000" cy="9192000"/>
+            <a:off x="396000" y="31979999"/>
+            <a:ext cx="9564000" cy="9024000"/>
           </a:xfrm>
           <a:prstGeom prst="rect">
             <a:avLst/>
@@ -5479,14 +5740,14 @@
       </p:sp>
       <p:sp>
         <p:nvSpPr>
-          <p:cNvPr id="45" name="TextBox 44"/>
+          <p:cNvPr id="51" name="TextBox 50"/>
           <p:cNvSpPr txBox="1"/>
           <p:nvPr/>
         </p:nvSpPr>
         <p:spPr>
           <a:xfrm>
-            <a:off x="396000" y="31812000"/>
-            <a:ext cx="9564000" cy="9192000"/>
+            <a:off x="396000" y="31979999"/>
+            <a:ext cx="9564000" cy="9024000"/>
           </a:xfrm>
           <a:prstGeom prst="rect">
             <a:avLst/>
@@ -5542,14 +5803,14 @@
       </p:sp>
       <p:sp>
         <p:nvSpPr>
-          <p:cNvPr id="46" name="Rounded Rectangle 45"/>
+          <p:cNvPr id="52" name="Rounded Rectangle 51"/>
           <p:cNvSpPr/>
           <p:nvPr/>
         </p:nvSpPr>
         <p:spPr>
           <a:xfrm>
-            <a:off x="10248000" y="8856000"/>
-            <a:ext cx="9780000" cy="16038000"/>
+            <a:off x="10248000" y="9360000"/>
+            <a:ext cx="9780000" cy="15786000"/>
           </a:xfrm>
           <a:prstGeom prst="roundRect">
             <a:avLst>
@@ -5590,13 +5851,13 @@
       </p:sp>
       <p:sp>
         <p:nvSpPr>
-          <p:cNvPr id="47" name="Rectangle 46"/>
+          <p:cNvPr id="53" name="Rectangle 52"/>
           <p:cNvSpPr/>
           <p:nvPr/>
         </p:nvSpPr>
         <p:spPr>
           <a:xfrm>
-            <a:off x="10248000" y="8856000"/>
+            <a:off x="10248000" y="9360000"/>
             <a:ext cx="9780000" cy="324000"/>
           </a:xfrm>
           <a:prstGeom prst="rect">
@@ -5634,13 +5895,13 @@
       </p:sp>
       <p:sp>
         <p:nvSpPr>
-          <p:cNvPr id="48" name="TextBox 47"/>
+          <p:cNvPr id="54" name="TextBox 53"/>
           <p:cNvSpPr txBox="1"/>
           <p:nvPr/>
         </p:nvSpPr>
         <p:spPr>
           <a:xfrm>
-            <a:off x="10284000" y="8856000"/>
+            <a:off x="10284000" y="9360000"/>
             <a:ext cx="9708000" cy="324000"/>
           </a:xfrm>
           <a:prstGeom prst="rect">
@@ -5677,13 +5938,13 @@
       </p:sp>
       <p:sp>
         <p:nvSpPr>
-          <p:cNvPr id="49" name="TextBox 48"/>
+          <p:cNvPr id="55" name="TextBox 54"/>
           <p:cNvSpPr txBox="1"/>
           <p:nvPr/>
         </p:nvSpPr>
         <p:spPr>
           <a:xfrm>
-            <a:off x="10302000" y="9216000"/>
+            <a:off x="10302000" y="9720000"/>
             <a:ext cx="9672000" cy="1296000"/>
           </a:xfrm>
           <a:prstGeom prst="rect">
@@ -5780,14 +6041,14 @@
       </p:sp>
       <p:sp>
         <p:nvSpPr>
-          <p:cNvPr id="50" name="Rectangle 49"/>
+          <p:cNvPr id="56" name="Rectangle 55"/>
           <p:cNvSpPr/>
           <p:nvPr/>
         </p:nvSpPr>
         <p:spPr>
           <a:xfrm>
-            <a:off x="10356000" y="10548000"/>
-            <a:ext cx="9564000" cy="14238000"/>
+            <a:off x="10356000" y="11052000"/>
+            <a:ext cx="9564000" cy="13986000"/>
           </a:xfrm>
           <a:prstGeom prst="rect">
             <a:avLst/>
@@ -5826,14 +6087,14 @@
       </p:sp>
       <p:sp>
         <p:nvSpPr>
-          <p:cNvPr id="51" name="TextBox 50"/>
+          <p:cNvPr id="57" name="TextBox 56"/>
           <p:cNvSpPr txBox="1"/>
           <p:nvPr/>
         </p:nvSpPr>
         <p:spPr>
           <a:xfrm>
-            <a:off x="10356000" y="10548000"/>
-            <a:ext cx="9564000" cy="14238000"/>
+            <a:off x="10356000" y="11052000"/>
+            <a:ext cx="9564000" cy="13986000"/>
           </a:xfrm>
           <a:prstGeom prst="rect">
             <a:avLst/>
@@ -5890,14 +6151,14 @@
       </p:sp>
       <p:sp>
         <p:nvSpPr>
-          <p:cNvPr id="52" name="Rounded Rectangle 51"/>
+          <p:cNvPr id="58" name="Rounded Rectangle 57"/>
           <p:cNvSpPr/>
           <p:nvPr/>
         </p:nvSpPr>
         <p:spPr>
           <a:xfrm>
-            <a:off x="10248000" y="25074000"/>
-            <a:ext cx="9780000" cy="16038000"/>
+            <a:off x="10248000" y="25326000"/>
+            <a:ext cx="9780000" cy="15786000"/>
           </a:xfrm>
           <a:prstGeom prst="roundRect">
             <a:avLst>
@@ -5938,13 +6199,13 @@
       </p:sp>
       <p:sp>
         <p:nvSpPr>
-          <p:cNvPr id="53" name="Rectangle 52"/>
+          <p:cNvPr id="59" name="Rectangle 58"/>
           <p:cNvSpPr/>
           <p:nvPr/>
         </p:nvSpPr>
         <p:spPr>
           <a:xfrm>
-            <a:off x="10248000" y="25074000"/>
+            <a:off x="10248000" y="25326000"/>
             <a:ext cx="9780000" cy="324000"/>
           </a:xfrm>
           <a:prstGeom prst="rect">
@@ -5982,13 +6243,13 @@
       </p:sp>
       <p:sp>
         <p:nvSpPr>
-          <p:cNvPr id="54" name="TextBox 53"/>
+          <p:cNvPr id="60" name="TextBox 59"/>
           <p:cNvSpPr txBox="1"/>
           <p:nvPr/>
         </p:nvSpPr>
         <p:spPr>
           <a:xfrm>
-            <a:off x="10284000" y="25074000"/>
+            <a:off x="10284000" y="25326000"/>
             <a:ext cx="9708000" cy="324000"/>
           </a:xfrm>
           <a:prstGeom prst="rect">
@@ -6025,13 +6286,13 @@
       </p:sp>
       <p:sp>
         <p:nvSpPr>
-          <p:cNvPr id="55" name="TextBox 54"/>
+          <p:cNvPr id="61" name="TextBox 60"/>
           <p:cNvSpPr txBox="1"/>
           <p:nvPr/>
         </p:nvSpPr>
         <p:spPr>
           <a:xfrm>
-            <a:off x="10302000" y="25434000"/>
+            <a:off x="10302000" y="25686000"/>
             <a:ext cx="9672000" cy="1296000"/>
           </a:xfrm>
           <a:prstGeom prst="rect">
@@ -6128,14 +6389,14 @@
       </p:sp>
       <p:sp>
         <p:nvSpPr>
-          <p:cNvPr id="56" name="Rectangle 55"/>
+          <p:cNvPr id="62" name="Rectangle 61"/>
           <p:cNvSpPr/>
           <p:nvPr/>
         </p:nvSpPr>
         <p:spPr>
           <a:xfrm>
-            <a:off x="10356000" y="26766000"/>
-            <a:ext cx="9564000" cy="14238000"/>
+            <a:off x="10356000" y="27018000"/>
+            <a:ext cx="9564000" cy="13986000"/>
           </a:xfrm>
           <a:prstGeom prst="rect">
             <a:avLst/>
@@ -6174,14 +6435,14 @@
       </p:sp>
       <p:sp>
         <p:nvSpPr>
-          <p:cNvPr id="57" name="TextBox 56"/>
+          <p:cNvPr id="63" name="TextBox 62"/>
           <p:cNvSpPr txBox="1"/>
           <p:nvPr/>
         </p:nvSpPr>
         <p:spPr>
           <a:xfrm>
-            <a:off x="10356000" y="26766000"/>
-            <a:ext cx="9564000" cy="14238000"/>
+            <a:off x="10356000" y="27018000"/>
+            <a:ext cx="9564000" cy="13986000"/>
           </a:xfrm>
           <a:prstGeom prst="rect">
             <a:avLst/>
@@ -6237,14 +6498,14 @@
       </p:sp>
       <p:sp>
         <p:nvSpPr>
-          <p:cNvPr id="58" name="Rounded Rectangle 57"/>
+          <p:cNvPr id="64" name="Rounded Rectangle 63"/>
           <p:cNvSpPr/>
           <p:nvPr/>
         </p:nvSpPr>
         <p:spPr>
           <a:xfrm>
-            <a:off x="20208000" y="8856000"/>
-            <a:ext cx="9780000" cy="16038000"/>
+            <a:off x="20208000" y="9360000"/>
+            <a:ext cx="9780000" cy="15786000"/>
           </a:xfrm>
           <a:prstGeom prst="roundRect">
             <a:avLst>
@@ -6285,13 +6546,13 @@
       </p:sp>
       <p:sp>
         <p:nvSpPr>
-          <p:cNvPr id="59" name="Rectangle 58"/>
+          <p:cNvPr id="65" name="Rectangle 64"/>
           <p:cNvSpPr/>
           <p:nvPr/>
         </p:nvSpPr>
         <p:spPr>
           <a:xfrm>
-            <a:off x="20208000" y="8856000"/>
+            <a:off x="20208000" y="9360000"/>
             <a:ext cx="9780000" cy="324000"/>
           </a:xfrm>
           <a:prstGeom prst="rect">
@@ -6329,13 +6590,13 @@
       </p:sp>
       <p:sp>
         <p:nvSpPr>
-          <p:cNvPr id="60" name="TextBox 59"/>
+          <p:cNvPr id="66" name="TextBox 65"/>
           <p:cNvSpPr txBox="1"/>
           <p:nvPr/>
         </p:nvSpPr>
         <p:spPr>
           <a:xfrm>
-            <a:off x="20244000" y="8856000"/>
+            <a:off x="20244000" y="9360000"/>
             <a:ext cx="9708000" cy="324000"/>
           </a:xfrm>
           <a:prstGeom prst="rect">
@@ -6372,13 +6633,13 @@
       </p:sp>
       <p:sp>
         <p:nvSpPr>
-          <p:cNvPr id="61" name="TextBox 60"/>
+          <p:cNvPr id="67" name="TextBox 66"/>
           <p:cNvSpPr txBox="1"/>
           <p:nvPr/>
         </p:nvSpPr>
         <p:spPr>
           <a:xfrm>
-            <a:off x="20262000" y="9216000"/>
+            <a:off x="20262000" y="9720000"/>
             <a:ext cx="9672000" cy="1296000"/>
           </a:xfrm>
           <a:prstGeom prst="rect">
@@ -6475,14 +6736,14 @@
       </p:sp>
       <p:sp>
         <p:nvSpPr>
-          <p:cNvPr id="62" name="Rectangle 61"/>
+          <p:cNvPr id="68" name="Rectangle 67"/>
           <p:cNvSpPr/>
           <p:nvPr/>
         </p:nvSpPr>
         <p:spPr>
           <a:xfrm>
-            <a:off x="20316000" y="10548000"/>
-            <a:ext cx="9564000" cy="14238000"/>
+            <a:off x="20316000" y="11052000"/>
+            <a:ext cx="9564000" cy="13986000"/>
           </a:xfrm>
           <a:prstGeom prst="rect">
             <a:avLst/>
@@ -6521,14 +6782,14 @@
       </p:sp>
       <p:sp>
         <p:nvSpPr>
-          <p:cNvPr id="63" name="TextBox 62"/>
+          <p:cNvPr id="69" name="TextBox 68"/>
           <p:cNvSpPr txBox="1"/>
           <p:nvPr/>
         </p:nvSpPr>
         <p:spPr>
           <a:xfrm>
-            <a:off x="20316000" y="10548000"/>
-            <a:ext cx="9564000" cy="14238000"/>
+            <a:off x="20316000" y="11052000"/>
+            <a:ext cx="9564000" cy="13986000"/>
           </a:xfrm>
           <a:prstGeom prst="rect">
             <a:avLst/>
@@ -6584,14 +6845,14 @@
       </p:sp>
       <p:sp>
         <p:nvSpPr>
-          <p:cNvPr id="64" name="Rounded Rectangle 63"/>
+          <p:cNvPr id="70" name="Rounded Rectangle 69"/>
           <p:cNvSpPr/>
           <p:nvPr/>
         </p:nvSpPr>
         <p:spPr>
           <a:xfrm>
-            <a:off x="20208000" y="25074000"/>
-            <a:ext cx="9780000" cy="16038000"/>
+            <a:off x="20208000" y="25326000"/>
+            <a:ext cx="9780000" cy="15786000"/>
           </a:xfrm>
           <a:prstGeom prst="roundRect">
             <a:avLst>
@@ -6632,13 +6893,13 @@
       </p:sp>
       <p:sp>
         <p:nvSpPr>
-          <p:cNvPr id="65" name="Rectangle 64"/>
+          <p:cNvPr id="71" name="Rectangle 70"/>
           <p:cNvSpPr/>
           <p:nvPr/>
         </p:nvSpPr>
         <p:spPr>
           <a:xfrm>
-            <a:off x="20208000" y="25074000"/>
+            <a:off x="20208000" y="25326000"/>
             <a:ext cx="9780000" cy="324000"/>
           </a:xfrm>
           <a:prstGeom prst="rect">
@@ -6676,13 +6937,13 @@
       </p:sp>
       <p:sp>
         <p:nvSpPr>
-          <p:cNvPr id="66" name="TextBox 65"/>
+          <p:cNvPr id="72" name="TextBox 71"/>
           <p:cNvSpPr txBox="1"/>
           <p:nvPr/>
         </p:nvSpPr>
         <p:spPr>
           <a:xfrm>
-            <a:off x="20244000" y="25074000"/>
+            <a:off x="20244000" y="25326000"/>
             <a:ext cx="9708000" cy="324000"/>
           </a:xfrm>
           <a:prstGeom prst="rect">
@@ -6719,13 +6980,13 @@
       </p:sp>
       <p:sp>
         <p:nvSpPr>
-          <p:cNvPr id="67" name="TextBox 66"/>
+          <p:cNvPr id="73" name="TextBox 72"/>
           <p:cNvSpPr txBox="1"/>
           <p:nvPr/>
         </p:nvSpPr>
         <p:spPr>
           <a:xfrm>
-            <a:off x="20262000" y="25434000"/>
+            <a:off x="20262000" y="25686000"/>
             <a:ext cx="9672000" cy="1296000"/>
           </a:xfrm>
           <a:prstGeom prst="rect">
@@ -6822,14 +7083,14 @@
       </p:sp>
       <p:sp>
         <p:nvSpPr>
-          <p:cNvPr id="68" name="Rectangle 67"/>
+          <p:cNvPr id="74" name="Rectangle 73"/>
           <p:cNvSpPr/>
           <p:nvPr/>
         </p:nvSpPr>
         <p:spPr>
           <a:xfrm>
-            <a:off x="20316000" y="26766000"/>
-            <a:ext cx="9564000" cy="14238000"/>
+            <a:off x="20316000" y="27018000"/>
+            <a:ext cx="9564000" cy="13986000"/>
           </a:xfrm>
           <a:prstGeom prst="rect">
             <a:avLst/>
@@ -6868,14 +7129,14 @@
       </p:sp>
       <p:sp>
         <p:nvSpPr>
-          <p:cNvPr id="69" name="TextBox 68"/>
+          <p:cNvPr id="75" name="TextBox 74"/>
           <p:cNvSpPr txBox="1"/>
           <p:nvPr/>
         </p:nvSpPr>
         <p:spPr>
           <a:xfrm>
-            <a:off x="20316000" y="26766000"/>
-            <a:ext cx="9564000" cy="14238000"/>
+            <a:off x="20316000" y="27018000"/>
+            <a:ext cx="9564000" cy="13986000"/>
           </a:xfrm>
           <a:prstGeom prst="rect">
             <a:avLst/>
@@ -6931,7 +7192,7 @@
       </p:sp>
       <p:sp>
         <p:nvSpPr>
-          <p:cNvPr id="70" name="Rounded Rectangle 69"/>
+          <p:cNvPr id="76" name="Rounded Rectangle 75"/>
           <p:cNvSpPr/>
           <p:nvPr/>
         </p:nvSpPr>
@@ -6979,7 +7240,7 @@
       </p:sp>
       <p:sp>
         <p:nvSpPr>
-          <p:cNvPr id="71" name="TextBox 70"/>
+          <p:cNvPr id="77" name="TextBox 76"/>
           <p:cNvSpPr txBox="1"/>
           <p:nvPr/>
         </p:nvSpPr>
@@ -7022,7 +7283,7 @@
       </p:sp>
       <p:sp>
         <p:nvSpPr>
-          <p:cNvPr id="72" name="TextBox 71"/>
+          <p:cNvPr id="78" name="TextBox 77"/>
           <p:cNvSpPr txBox="1"/>
           <p:nvPr/>
         </p:nvSpPr>

--- a/poster/poster_A0.pptx
+++ b/poster/poster_A0.pptx
@@ -6505,7 +6505,7 @@
         <p:spPr>
           <a:xfrm>
             <a:off x="20208000" y="9360000"/>
-            <a:ext cx="9780000" cy="15786000"/>
+            <a:ext cx="9780000" cy="11365919"/>
           </a:xfrm>
           <a:prstGeom prst="roundRect">
             <a:avLst>
@@ -6640,7 +6640,7 @@
         <p:spPr>
           <a:xfrm>
             <a:off x="20262000" y="9720000"/>
-            <a:ext cx="9672000" cy="1296000"/>
+            <a:ext cx="9672000" cy="1080000"/>
           </a:xfrm>
           <a:prstGeom prst="rect">
             <a:avLst/>
@@ -6709,27 +6709,7 @@
                 <a:latin typeface="Meiryo"/>
                 <a:ea typeface="Meiryo"/>
               </a:rPr>
-              <a:t>・抵抗なく注入→局所にドーム状デポを形成</a:t>
-            </a:r>
-          </a:p>
-          <a:p>
-            <a:pPr algn="l">
-              <a:spcBef>
-                <a:spcPts val="0"/>
-              </a:spcBef>
-              <a:spcAft>
-                <a:spcPts val="200"/>
-              </a:spcAft>
-            </a:pPr>
-            <a:r>
-              <a:rPr sz="1200" b="0">
-                <a:solidFill>
-                  <a:srgbClr val="222222"/>
-                </a:solidFill>
-                <a:latin typeface="Meiryo"/>
-                <a:ea typeface="Meiryo"/>
-              </a:rPr>
-              <a:t>・香港大 Sang-Jin Lee 先生と共同研究</a:t>
+              <a:t>・抵抗なく注入→液漏れせずドーム状デポ形成</a:t>
             </a:r>
           </a:p>
         </p:txBody>
@@ -6742,8 +6722,8 @@
         </p:nvSpPr>
         <p:spPr>
           <a:xfrm>
-            <a:off x="20316000" y="11052000"/>
-            <a:ext cx="9564000" cy="13986000"/>
+            <a:off x="20316000" y="10836000"/>
+            <a:ext cx="9564000" cy="9781919"/>
           </a:xfrm>
           <a:prstGeom prst="rect">
             <a:avLst/>
@@ -6788,8 +6768,8 @@
         </p:nvSpPr>
         <p:spPr>
           <a:xfrm>
-            <a:off x="20316000" y="11052000"/>
-            <a:ext cx="9564000" cy="13986000"/>
+            <a:off x="20316000" y="10836000"/>
+            <a:ext cx="9564000" cy="9781919"/>
           </a:xfrm>
           <a:prstGeom prst="rect">
             <a:avLst/>
@@ -6851,8 +6831,8 @@
         </p:nvSpPr>
         <p:spPr>
           <a:xfrm>
-            <a:off x="20208000" y="25326000"/>
-            <a:ext cx="9780000" cy="15786000"/>
+            <a:off x="20208000" y="20905920"/>
+            <a:ext cx="9780000" cy="20206080"/>
           </a:xfrm>
           <a:prstGeom prst="roundRect">
             <a:avLst>
@@ -6899,7 +6879,7 @@
         </p:nvSpPr>
         <p:spPr>
           <a:xfrm>
-            <a:off x="20208000" y="25326000"/>
+            <a:off x="20208000" y="20905920"/>
             <a:ext cx="9780000" cy="324000"/>
           </a:xfrm>
           <a:prstGeom prst="rect">
@@ -6943,7 +6923,7 @@
         </p:nvSpPr>
         <p:spPr>
           <a:xfrm>
-            <a:off x="20244000" y="25326000"/>
+            <a:off x="20244000" y="20905920"/>
             <a:ext cx="9708000" cy="324000"/>
           </a:xfrm>
           <a:prstGeom prst="rect">
@@ -6973,7 +6953,7 @@
                 <a:latin typeface="Meiryo"/>
                 <a:ea typeface="Meiryo"/>
               </a:rPr>
-              <a:t>⑦ In vivo 分解試験 (H&amp;E染色)〔要データ〕</a:t>
+              <a:t>⑦ In vivo 組織学的評価 H&amp;E染色〔考察・新〕</a:t>
             </a:r>
           </a:p>
         </p:txBody>
@@ -6986,8 +6966,8 @@
         </p:nvSpPr>
         <p:spPr>
           <a:xfrm>
-            <a:off x="20262000" y="25686000"/>
-            <a:ext cx="9672000" cy="1296000"/>
+            <a:off x="20262000" y="21265920"/>
+            <a:ext cx="9672000" cy="1584000"/>
           </a:xfrm>
           <a:prstGeom prst="rect">
             <a:avLst/>
@@ -7016,7 +6996,7 @@
                 <a:latin typeface="Meiryo"/>
                 <a:ea typeface="Meiryo"/>
               </a:rPr>
-              <a:t>・皮下デポの経時的な分解・吸収を評価</a:t>
+              <a:t>・Day 0/5/14で皮下デポを採取しH&amp;E評価</a:t>
             </a:r>
           </a:p>
           <a:p>
@@ -7036,7 +7016,7 @@
                 <a:latin typeface="Meiryo"/>
                 <a:ea typeface="Meiryo"/>
               </a:rPr>
-              <a:t>・H&amp;E染色で組織反応・分解挙動を観察</a:t>
+              <a:t>・ゲル辺縁から宿主細胞が内部へ浸潤(矢印)</a:t>
             </a:r>
           </a:p>
           <a:p>
@@ -7056,7 +7036,7 @@
                 <a:latin typeface="Meiryo"/>
                 <a:ea typeface="Meiryo"/>
               </a:rPr>
-              <a:t>・(生分解性・生体適合性を組織学的に確認)</a:t>
+              <a:t>・Day5→14で浸潤進行 → 緩やかに生分解・組織置換</a:t>
             </a:r>
           </a:p>
           <a:p>
@@ -7076,7 +7056,27 @@
                 <a:latin typeface="Meiryo"/>
                 <a:ea typeface="Meiryo"/>
               </a:rPr>
-              <a:t>※元データは別途ご提供をお願いします</a:t>
+              <a:t>・14日後もデポ残存。重度の炎症・壊死なし(高適合性)</a:t>
+            </a:r>
+          </a:p>
+          <a:p>
+            <a:pPr algn="l">
+              <a:spcBef>
+                <a:spcPts val="0"/>
+              </a:spcBef>
+              <a:spcAft>
+                <a:spcPts val="200"/>
+              </a:spcAft>
+            </a:pPr>
+            <a:r>
+              <a:rPr sz="1200" b="0">
+                <a:solidFill>
+                  <a:srgbClr val="222222"/>
+                </a:solidFill>
+                <a:latin typeface="Meiryo"/>
+                <a:ea typeface="Meiryo"/>
+              </a:rPr>
+              <a:t>・in vitro分解(≈25日)と整合 → 局所貯留に好適</a:t>
             </a:r>
           </a:p>
         </p:txBody>
@@ -7089,8 +7089,8 @@
         </p:nvSpPr>
         <p:spPr>
           <a:xfrm>
-            <a:off x="20316000" y="27018000"/>
-            <a:ext cx="9564000" cy="13986000"/>
+            <a:off x="20316000" y="22885920"/>
+            <a:ext cx="9564000" cy="18118080"/>
           </a:xfrm>
           <a:prstGeom prst="rect">
             <a:avLst/>
@@ -7135,8 +7135,8 @@
         </p:nvSpPr>
         <p:spPr>
           <a:xfrm>
-            <a:off x="20316000" y="27018000"/>
-            <a:ext cx="9564000" cy="13986000"/>
+            <a:off x="20316000" y="22885920"/>
+            <a:ext cx="9564000" cy="18118080"/>
           </a:xfrm>
           <a:prstGeom prst="rect">
             <a:avLst/>
@@ -7185,7 +7185,8 @@
                 <a:latin typeface="Meiryo"/>
                 <a:ea typeface="Meiryo"/>
               </a:rPr>
-              <a:t>図: H&amp;E染色 組織像 (経時)</a:t>
+              <a:t>図: 実験スキーム / Optical(デポ) / H&amp;E組織像
+(Native vs PG4-025 ×0・5・14日)</a:t>
             </a:r>
           </a:p>
         </p:txBody>
